--- a/semantic-search.pptx
+++ b/semantic-search.pptx
@@ -12,18 +12,18 @@
     <p:sldId id="257" r:id="rId3"/>
     <p:sldId id="258" r:id="rId4"/>
     <p:sldId id="259" r:id="rId5"/>
-    <p:sldId id="260" r:id="rId6"/>
-    <p:sldId id="261" r:id="rId7"/>
-    <p:sldId id="262" r:id="rId8"/>
-    <p:sldId id="263" r:id="rId9"/>
-    <p:sldId id="264" r:id="rId10"/>
-    <p:sldId id="265" r:id="rId11"/>
-    <p:sldId id="266" r:id="rId12"/>
-    <p:sldId id="267" r:id="rId13"/>
-    <p:sldId id="268" r:id="rId14"/>
-    <p:sldId id="269" r:id="rId15"/>
-    <p:sldId id="270" r:id="rId16"/>
-    <p:sldId id="271" r:id="rId17"/>
+    <p:sldId id="273" r:id="rId6"/>
+    <p:sldId id="260" r:id="rId7"/>
+    <p:sldId id="261" r:id="rId8"/>
+    <p:sldId id="262" r:id="rId9"/>
+    <p:sldId id="263" r:id="rId10"/>
+    <p:sldId id="264" r:id="rId11"/>
+    <p:sldId id="265" r:id="rId12"/>
+    <p:sldId id="266" r:id="rId13"/>
+    <p:sldId id="267" r:id="rId14"/>
+    <p:sldId id="268" r:id="rId15"/>
+    <p:sldId id="269" r:id="rId16"/>
+    <p:sldId id="270" r:id="rId17"/>
     <p:sldId id="272" r:id="rId18"/>
   </p:sldIdLst>
   <p:sldSz cx="12192000" cy="6858000"/>
@@ -1269,7 +1269,13 @@
   <p:cSld>
     <p:spTree>
       <p:nvGrpSpPr>
-        <p:cNvPr id="1" name=""/>
+        <p:cNvPr id="1" name="">
+          <a:extLst>
+            <a:ext uri="{FF2B5EF4-FFF2-40B4-BE49-F238E27FC236}">
+              <a16:creationId xmlns:a16="http://schemas.microsoft.com/office/drawing/2014/main" id="{C51E8A6E-8E80-823D-4F57-24F32018D564}"/>
+            </a:ext>
+          </a:extLst>
+        </p:cNvPr>
         <p:cNvGrpSpPr/>
         <p:nvPr/>
       </p:nvGrpSpPr>
@@ -1283,7 +1289,13 @@
       </p:grpSpPr>
       <p:sp>
         <p:nvSpPr>
-          <p:cNvPr id="2" name="Slide Image Placeholder 1"/>
+          <p:cNvPr id="2" name="Slide Image Placeholder 1">
+            <a:extLst>
+              <a:ext uri="{FF2B5EF4-FFF2-40B4-BE49-F238E27FC236}">
+                <a16:creationId xmlns:a16="http://schemas.microsoft.com/office/drawing/2014/main" id="{950C540B-80C2-067A-6942-E27492761CD8}"/>
+              </a:ext>
+            </a:extLst>
+          </p:cNvPr>
           <p:cNvSpPr>
             <a:spLocks noGrp="1" noRot="1" noChangeAspect="1"/>
           </p:cNvSpPr>
@@ -1295,7 +1307,13 @@
       </p:sp>
       <p:sp>
         <p:nvSpPr>
-          <p:cNvPr id="3" name="Notes Placeholder 2"/>
+          <p:cNvPr id="3" name="Notes Placeholder 2">
+            <a:extLst>
+              <a:ext uri="{FF2B5EF4-FFF2-40B4-BE49-F238E27FC236}">
+                <a16:creationId xmlns:a16="http://schemas.microsoft.com/office/drawing/2014/main" id="{E37CAEB8-7727-5AE9-5177-0354A494BE5C}"/>
+              </a:ext>
+            </a:extLst>
+          </p:cNvPr>
           <p:cNvSpPr>
             <a:spLocks noGrp="1"/>
           </p:cNvSpPr>
@@ -1314,7 +1332,13 @@
       </p:sp>
       <p:sp>
         <p:nvSpPr>
-          <p:cNvPr id="4" name="Slide Number Placeholder 3"/>
+          <p:cNvPr id="4" name="Slide Number Placeholder 3">
+            <a:extLst>
+              <a:ext uri="{FF2B5EF4-FFF2-40B4-BE49-F238E27FC236}">
+                <a16:creationId xmlns:a16="http://schemas.microsoft.com/office/drawing/2014/main" id="{87209CE2-3CB5-E4F6-C665-7EC181A343BA}"/>
+              </a:ext>
+            </a:extLst>
+          </p:cNvPr>
           <p:cNvSpPr>
             <a:spLocks noGrp="1"/>
           </p:cNvSpPr>
@@ -1338,7 +1362,7 @@
     </p:spTree>
     <p:extLst>
       <p:ext uri="{BB962C8B-B14F-4D97-AF65-F5344CB8AC3E}">
-        <p14:creationId xmlns:p14="http://schemas.microsoft.com/office/powerpoint/2010/main" val="1024086991"/>
+        <p14:creationId xmlns:p14="http://schemas.microsoft.com/office/powerpoint/2010/main" val="489819337"/>
       </p:ext>
     </p:extLst>
   </p:cSld>
@@ -1867,7 +1891,7 @@
           </a:prstGeom>
           <a:extLst>
             <a:ext uri="{C572A759-6A51-4108-AA02-DFA0A04FC94B}">
-              <ma14:wrappingTextBoxFlag xmlns:ma14="http://schemas.microsoft.com/office/mac/drawingml/2011/main" xmlns="" val="0"/>
+              <ma14:wrappingTextBoxFlag xmlns="" xmlns:ma14="http://schemas.microsoft.com/office/mac/drawingml/2011/main" val="0"/>
             </a:ext>
           </a:extLst>
         </p:spPr>
@@ -1945,7 +1969,7 @@
           </a:prstGeom>
           <a:extLst>
             <a:ext uri="{C572A759-6A51-4108-AA02-DFA0A04FC94B}">
-              <ma14:wrappingTextBoxFlag xmlns:ma14="http://schemas.microsoft.com/office/mac/drawingml/2011/main" xmlns="" val="0"/>
+              <ma14:wrappingTextBoxFlag xmlns="" xmlns:ma14="http://schemas.microsoft.com/office/mac/drawingml/2011/main" val="0"/>
             </a:ext>
           </a:extLst>
         </p:spPr>
@@ -2274,7 +2298,10 @@
             <a:avLst/>
           </a:prstGeom>
           <a:solidFill>
-            <a:srgbClr val="0E2841"/>
+            <a:schemeClr val="tx1">
+              <a:lumMod val="65000"/>
+              <a:lumOff val="35000"/>
+            </a:schemeClr>
           </a:solidFill>
           <a:ln w="12700">
             <a:solidFill>
@@ -2287,7 +2314,7 @@
           <a:bodyPr/>
           <a:lstStyle/>
           <a:p>
-            <a:endParaRPr lang="en-US"/>
+            <a:endParaRPr lang="en-US" dirty="0"/>
           </a:p>
         </p:txBody>
       </p:sp>
@@ -2299,7 +2326,7 @@
         </p:nvSpPr>
         <p:spPr>
           <a:xfrm>
-            <a:off x="7589520" y="-548640"/>
+            <a:off x="5950915" y="932689"/>
             <a:ext cx="5303520" cy="5303520"/>
           </a:xfrm>
           <a:prstGeom prst="arc">
@@ -2331,7 +2358,7 @@
         </p:nvSpPr>
         <p:spPr>
           <a:xfrm>
-            <a:off x="8686800" y="1005840"/>
+            <a:off x="7205472" y="1601402"/>
             <a:ext cx="3840480" cy="3840480"/>
           </a:xfrm>
           <a:prstGeom prst="arc">
@@ -2447,7 +2474,7 @@
         </p:spPr>
         <p:txBody>
           <a:bodyPr wrap="square" lIns="508" tIns="508" rIns="508" bIns="508" rtlCol="0" anchor="ctr">
-            <a:normAutofit/>
+            <a:noAutofit/>
           </a:bodyPr>
           <a:lstStyle/>
           <a:p>
@@ -2455,7 +2482,7 @@
               <a:buNone/>
             </a:pPr>
             <a:r>
-              <a:rPr lang="en-US" sz="3100" b="1" dirty="0">
+              <a:rPr lang="en-US" sz="4000" b="1" dirty="0">
                 <a:solidFill>
                   <a:srgbClr val="FFFFFF"/>
                 </a:solidFill>
@@ -2465,7 +2492,7 @@
               </a:rPr>
               <a:t>Semantic Search w Javie</a:t>
             </a:r>
-            <a:endParaRPr lang="en-US" sz="3100" dirty="0"/>
+            <a:endParaRPr lang="en-US" sz="4000" dirty="0"/>
           </a:p>
         </p:txBody>
       </p:sp>
@@ -2477,7 +2504,7 @@
         </p:nvSpPr>
         <p:spPr>
           <a:xfrm>
-            <a:off x="896112" y="2121408"/>
+            <a:off x="864056" y="2198064"/>
             <a:ext cx="7040880" cy="475488"/>
           </a:xfrm>
           <a:prstGeom prst="rect">
@@ -2496,7 +2523,7 @@
               <a:buNone/>
             </a:pPr>
             <a:r>
-              <a:rPr lang="en-US" sz="2000" dirty="0">
+              <a:rPr lang="en-US" sz="2400" dirty="0">
                 <a:solidFill>
                   <a:srgbClr val="DCEAF1"/>
                 </a:solidFill>
@@ -2506,20 +2533,20 @@
               </a:rPr>
               <a:t>PostgreSQL + pgvector bez osobnej bazy wektorowej</a:t>
             </a:r>
-            <a:endParaRPr lang="en-US" sz="2000" dirty="0"/>
-          </a:p>
-        </p:txBody>
-      </p:sp>
-      <p:sp>
-        <p:nvSpPr>
-          <p:cNvPr id="9" name="Text 7"/>
-          <p:cNvSpPr/>
-          <p:nvPr/>
-        </p:nvSpPr>
-        <p:spPr>
-          <a:xfrm>
-            <a:off x="896112" y="2971800"/>
-            <a:ext cx="6309360" cy="301752"/>
+            <a:endParaRPr lang="en-US" sz="2400" dirty="0"/>
+          </a:p>
+        </p:txBody>
+      </p:sp>
+      <p:sp>
+        <p:nvSpPr>
+          <p:cNvPr id="10" name="Text 8"/>
+          <p:cNvSpPr/>
+          <p:nvPr/>
+        </p:nvSpPr>
+        <p:spPr>
+          <a:xfrm>
+            <a:off x="896112" y="5989320"/>
+            <a:ext cx="5303520" cy="201168"/>
           </a:xfrm>
           <a:prstGeom prst="rect">
             <a:avLst/>
@@ -2529,7 +2556,7 @@
         </p:spPr>
         <p:txBody>
           <a:bodyPr wrap="square" lIns="508" tIns="508" rIns="508" bIns="508" rtlCol="0" anchor="ctr">
-            <a:normAutofit/>
+            <a:noAutofit/>
           </a:bodyPr>
           <a:lstStyle/>
           <a:p>
@@ -2537,7 +2564,7 @@
               <a:buNone/>
             </a:pPr>
             <a:r>
-              <a:rPr lang="pl-PL" sz="1300" dirty="0">
+              <a:rPr lang="pl-PL" dirty="0">
                 <a:solidFill>
                   <a:srgbClr val="AFC9D5"/>
                 </a:solidFill>
@@ -2545,127 +2572,9 @@
                 <a:ea typeface="Aptos" pitchFamily="34" charset="-122"/>
                 <a:cs typeface="Aptos" pitchFamily="34" charset="-120"/>
               </a:rPr>
-              <a:t>Java, Spring </a:t>
-            </a:r>
-            <a:r>
-              <a:rPr lang="pl-PL" sz="1300" dirty="0" err="1">
-                <a:solidFill>
-                  <a:srgbClr val="AFC9D5"/>
-                </a:solidFill>
-                <a:latin typeface="Aptos" pitchFamily="34" charset="0"/>
-                <a:ea typeface="Aptos" pitchFamily="34" charset="-122"/>
-                <a:cs typeface="Aptos" pitchFamily="34" charset="-120"/>
-              </a:rPr>
-              <a:t>Boot</a:t>
-            </a:r>
-            <a:r>
-              <a:rPr lang="pl-PL" sz="1300" dirty="0">
-                <a:solidFill>
-                  <a:srgbClr val="AFC9D5"/>
-                </a:solidFill>
-                <a:latin typeface="Aptos" pitchFamily="34" charset="0"/>
-                <a:ea typeface="Aptos" pitchFamily="34" charset="-122"/>
-                <a:cs typeface="Aptos" pitchFamily="34" charset="-120"/>
-              </a:rPr>
-              <a:t>, </a:t>
-            </a:r>
-            <a:r>
-              <a:rPr lang="en-US" sz="1300" dirty="0">
-                <a:solidFill>
-                  <a:srgbClr val="AFC9D5"/>
-                </a:solidFill>
-                <a:latin typeface="Aptos" pitchFamily="34" charset="0"/>
-                <a:ea typeface="Aptos" pitchFamily="34" charset="-122"/>
-                <a:cs typeface="Aptos" pitchFamily="34" charset="-120"/>
-              </a:rPr>
-              <a:t>embedding</a:t>
-            </a:r>
-            <a:r>
-              <a:rPr lang="pl-PL" sz="1300" dirty="0">
-                <a:solidFill>
-                  <a:srgbClr val="AFC9D5"/>
-                </a:solidFill>
-                <a:latin typeface="Aptos" pitchFamily="34" charset="0"/>
-                <a:ea typeface="Aptos" pitchFamily="34" charset="-122"/>
-                <a:cs typeface="Aptos" pitchFamily="34" charset="-120"/>
-              </a:rPr>
-              <a:t>,</a:t>
-            </a:r>
-            <a:r>
-              <a:rPr lang="en-US" sz="1300" dirty="0">
-                <a:solidFill>
-                  <a:srgbClr val="AFC9D5"/>
-                </a:solidFill>
-                <a:latin typeface="Aptos" pitchFamily="34" charset="0"/>
-                <a:ea typeface="Aptos" pitchFamily="34" charset="-122"/>
-                <a:cs typeface="Aptos" pitchFamily="34" charset="-120"/>
-              </a:rPr>
-              <a:t> </a:t>
-            </a:r>
-            <a:r>
-              <a:rPr lang="en-US" sz="1300" dirty="0" err="1">
-                <a:solidFill>
-                  <a:srgbClr val="AFC9D5"/>
-                </a:solidFill>
-                <a:latin typeface="Aptos" pitchFamily="34" charset="0"/>
-                <a:ea typeface="Aptos" pitchFamily="34" charset="-122"/>
-                <a:cs typeface="Aptos" pitchFamily="34" charset="-120"/>
-              </a:rPr>
-              <a:t>wyszukiwanie</a:t>
-            </a:r>
-            <a:r>
-              <a:rPr lang="en-US" sz="1300" dirty="0">
-                <a:solidFill>
-                  <a:srgbClr val="AFC9D5"/>
-                </a:solidFill>
-                <a:latin typeface="Aptos" pitchFamily="34" charset="0"/>
-                <a:ea typeface="Aptos" pitchFamily="34" charset="-122"/>
-                <a:cs typeface="Aptos" pitchFamily="34" charset="-120"/>
-              </a:rPr>
-              <a:t> po znaczeniu</a:t>
-            </a:r>
-            <a:endParaRPr lang="en-US" sz="1300" dirty="0"/>
-          </a:p>
-        </p:txBody>
-      </p:sp>
-      <p:sp>
-        <p:nvSpPr>
-          <p:cNvPr id="10" name="Text 8"/>
-          <p:cNvSpPr/>
-          <p:nvPr/>
-        </p:nvSpPr>
-        <p:spPr>
-          <a:xfrm>
-            <a:off x="896112" y="5989320"/>
-            <a:ext cx="5303520" cy="201168"/>
-          </a:xfrm>
-          <a:prstGeom prst="rect">
-            <a:avLst/>
-          </a:prstGeom>
-          <a:noFill/>
-          <a:ln/>
-        </p:spPr>
-        <p:txBody>
-          <a:bodyPr wrap="square" lIns="508" tIns="508" rIns="508" bIns="508" rtlCol="0" anchor="ctr">
-            <a:noAutofit/>
-          </a:bodyPr>
-          <a:lstStyle/>
-          <a:p>
-            <a:pPr marL="0" indent="0" algn="l">
-              <a:buNone/>
-            </a:pPr>
-            <a:r>
-              <a:rPr lang="pl-PL" sz="1400" dirty="0">
-                <a:solidFill>
-                  <a:srgbClr val="AFC9D5"/>
-                </a:solidFill>
-                <a:latin typeface="Aptos" pitchFamily="34" charset="0"/>
-                <a:ea typeface="Aptos" pitchFamily="34" charset="-122"/>
-                <a:cs typeface="Aptos" pitchFamily="34" charset="-120"/>
-              </a:rPr>
               <a:t>Krzysztof Kozłowski</a:t>
             </a:r>
-            <a:endParaRPr lang="en-US" sz="1400" dirty="0"/>
+            <a:endParaRPr lang="en-US" dirty="0"/>
           </a:p>
         </p:txBody>
       </p:sp>
@@ -2708,6 +2617,680 @@
 </file>
 
 <file path=ppt/slides/slide10.xml><?xml version="1.0" encoding="utf-8"?>
+<p:sld xmlns:a="http://schemas.openxmlformats.org/drawingml/2006/main" xmlns:r="http://schemas.openxmlformats.org/officeDocument/2006/relationships" xmlns:p="http://schemas.openxmlformats.org/presentationml/2006/main">
+  <p:cSld name="Slide 9">
+    <p:bg>
+      <p:bgPr>
+        <a:solidFill>
+          <a:srgbClr val="FFFFFF"/>
+        </a:solidFill>
+        <a:effectLst/>
+      </p:bgPr>
+    </p:bg>
+    <p:spTree>
+      <p:nvGrpSpPr>
+        <p:cNvPr id="1" name=""/>
+        <p:cNvGrpSpPr/>
+        <p:nvPr/>
+      </p:nvGrpSpPr>
+      <p:grpSpPr>
+        <a:xfrm>
+          <a:off x="0" y="0"/>
+          <a:ext cx="0" cy="0"/>
+          <a:chOff x="0" y="0"/>
+          <a:chExt cx="0" cy="0"/>
+        </a:xfrm>
+      </p:grpSpPr>
+      <p:sp>
+        <p:nvSpPr>
+          <p:cNvPr id="2" name="Text 0"/>
+          <p:cNvSpPr/>
+          <p:nvPr/>
+        </p:nvSpPr>
+        <p:spPr>
+          <a:xfrm>
+            <a:off x="548640" y="320040"/>
+            <a:ext cx="3291840" cy="201168"/>
+          </a:xfrm>
+          <a:prstGeom prst="rect">
+            <a:avLst/>
+          </a:prstGeom>
+          <a:noFill/>
+          <a:ln/>
+        </p:spPr>
+        <p:txBody>
+          <a:bodyPr wrap="square" lIns="0" tIns="0" rIns="0" bIns="0" rtlCol="0" anchor="ctr"/>
+          <a:lstStyle/>
+          <a:p>
+            <a:pPr marL="0" indent="0">
+              <a:buNone/>
+            </a:pPr>
+            <a:r>
+              <a:rPr lang="en-US" sz="800" b="1" kern="0" spc="120" dirty="0">
+                <a:solidFill>
+                  <a:srgbClr val="E97132"/>
+                </a:solidFill>
+                <a:latin typeface="Aptos" pitchFamily="34" charset="0"/>
+                <a:ea typeface="Aptos" pitchFamily="34" charset="-122"/>
+                <a:cs typeface="Aptos" pitchFamily="34" charset="-120"/>
+              </a:rPr>
+              <a:t>JEDNO ZAPYTANIE, DWA SPOSOBY SZUKANIA</a:t>
+            </a:r>
+            <a:endParaRPr lang="en-US" sz="800" dirty="0"/>
+          </a:p>
+        </p:txBody>
+      </p:sp>
+      <p:sp>
+        <p:nvSpPr>
+          <p:cNvPr id="3" name="Text 1"/>
+          <p:cNvSpPr/>
+          <p:nvPr/>
+        </p:nvSpPr>
+        <p:spPr>
+          <a:xfrm>
+            <a:off x="548640" y="612648"/>
+            <a:ext cx="10972800" cy="438912"/>
+          </a:xfrm>
+          <a:prstGeom prst="rect">
+            <a:avLst/>
+          </a:prstGeom>
+          <a:noFill/>
+          <a:ln/>
+        </p:spPr>
+        <p:txBody>
+          <a:bodyPr wrap="square" lIns="0" tIns="0" rIns="0" bIns="0" rtlCol="0" anchor="ctr">
+            <a:normAutofit/>
+          </a:bodyPr>
+          <a:lstStyle/>
+          <a:p>
+            <a:pPr marL="0" indent="0">
+              <a:buNone/>
+            </a:pPr>
+            <a:r>
+              <a:rPr lang="en-US" sz="2600" b="1" dirty="0">
+                <a:solidFill>
+                  <a:srgbClr val="0E2841"/>
+                </a:solidFill>
+                <a:latin typeface="Aptos Display" pitchFamily="34" charset="0"/>
+                <a:ea typeface="Aptos Display" pitchFamily="34" charset="-122"/>
+                <a:cs typeface="Aptos Display" pitchFamily="34" charset="-120"/>
+              </a:rPr>
+              <a:t>Praktyczny przykład</a:t>
+            </a:r>
+            <a:endParaRPr lang="en-US" sz="2600" dirty="0"/>
+          </a:p>
+        </p:txBody>
+      </p:sp>
+      <p:sp>
+        <p:nvSpPr>
+          <p:cNvPr id="4" name="Text 2"/>
+          <p:cNvSpPr/>
+          <p:nvPr/>
+        </p:nvSpPr>
+        <p:spPr>
+          <a:xfrm>
+            <a:off x="640080" y="1143000"/>
+            <a:ext cx="9601200" cy="365760"/>
+          </a:xfrm>
+          <a:prstGeom prst="rect">
+            <a:avLst/>
+          </a:prstGeom>
+          <a:noFill/>
+          <a:ln/>
+        </p:spPr>
+        <p:txBody>
+          <a:bodyPr wrap="square" lIns="508" tIns="508" rIns="508" bIns="508" rtlCol="0" anchor="ctr">
+            <a:normAutofit/>
+          </a:bodyPr>
+          <a:lstStyle/>
+          <a:p>
+            <a:pPr marL="0" indent="0" algn="l">
+              <a:buNone/>
+            </a:pPr>
+            <a:r>
+              <a:rPr lang="en-US" sz="2000" b="1" dirty="0">
+                <a:solidFill>
+                  <a:srgbClr val="0E2841"/>
+                </a:solidFill>
+                <a:latin typeface="Aptos" pitchFamily="34" charset="0"/>
+                <a:ea typeface="Aptos" pitchFamily="34" charset="-122"/>
+                <a:cs typeface="Aptos" pitchFamily="34" charset="-120"/>
+              </a:rPr>
+              <a:t>Zapytanie: „aplikacja ma za mało połączeń do bazy”</a:t>
+            </a:r>
+            <a:endParaRPr lang="en-US" sz="2000" dirty="0"/>
+          </a:p>
+        </p:txBody>
+      </p:sp>
+      <p:sp>
+        <p:nvSpPr>
+          <p:cNvPr id="5" name="Shape 3"/>
+          <p:cNvSpPr/>
+          <p:nvPr/>
+        </p:nvSpPr>
+        <p:spPr>
+          <a:xfrm>
+            <a:off x="685800" y="1828800"/>
+            <a:ext cx="5074920" cy="2560320"/>
+          </a:xfrm>
+          <a:prstGeom prst="roundRect">
+            <a:avLst>
+              <a:gd name="adj" fmla="val 4286"/>
+            </a:avLst>
+          </a:prstGeom>
+          <a:solidFill>
+            <a:srgbClr val="F7F9FB"/>
+          </a:solidFill>
+          <a:ln w="12700">
+            <a:solidFill>
+              <a:srgbClr val="D9E2F3"/>
+            </a:solidFill>
+            <a:prstDash val="solid"/>
+          </a:ln>
+        </p:spPr>
+        <p:txBody>
+          <a:bodyPr/>
+          <a:lstStyle/>
+          <a:p>
+            <a:endParaRPr lang="en-US"/>
+          </a:p>
+        </p:txBody>
+      </p:sp>
+      <p:sp>
+        <p:nvSpPr>
+          <p:cNvPr id="6" name="Text 4"/>
+          <p:cNvSpPr/>
+          <p:nvPr/>
+        </p:nvSpPr>
+        <p:spPr>
+          <a:xfrm>
+            <a:off x="960120" y="2103120"/>
+            <a:ext cx="2194560" cy="228600"/>
+          </a:xfrm>
+          <a:prstGeom prst="rect">
+            <a:avLst/>
+          </a:prstGeom>
+          <a:noFill/>
+          <a:ln/>
+        </p:spPr>
+        <p:txBody>
+          <a:bodyPr wrap="square" lIns="508" tIns="508" rIns="508" bIns="508" rtlCol="0" anchor="ctr">
+            <a:normAutofit/>
+          </a:bodyPr>
+          <a:lstStyle/>
+          <a:p>
+            <a:pPr marL="0" indent="0" algn="l">
+              <a:buNone/>
+            </a:pPr>
+            <a:r>
+              <a:rPr lang="en-US" sz="1100" b="1" dirty="0">
+                <a:solidFill>
+                  <a:srgbClr val="E97132"/>
+                </a:solidFill>
+                <a:latin typeface="Aptos" pitchFamily="34" charset="0"/>
+                <a:ea typeface="Aptos" pitchFamily="34" charset="-122"/>
+                <a:cs typeface="Aptos" pitchFamily="34" charset="-120"/>
+              </a:rPr>
+              <a:t>Keyword / ILIKE</a:t>
+            </a:r>
+            <a:endParaRPr lang="en-US" sz="1100" dirty="0"/>
+          </a:p>
+        </p:txBody>
+      </p:sp>
+      <p:sp>
+        <p:nvSpPr>
+          <p:cNvPr id="7" name="Shape 5"/>
+          <p:cNvSpPr/>
+          <p:nvPr/>
+        </p:nvSpPr>
+        <p:spPr>
+          <a:xfrm>
+            <a:off x="960120" y="2542032"/>
+            <a:ext cx="4297680" cy="731520"/>
+          </a:xfrm>
+          <a:prstGeom prst="roundRect">
+            <a:avLst>
+              <a:gd name="adj" fmla="val 10000"/>
+            </a:avLst>
+          </a:prstGeom>
+          <a:solidFill>
+            <a:srgbClr val="0E2841"/>
+          </a:solidFill>
+          <a:ln w="12700">
+            <a:solidFill>
+              <a:srgbClr val="0E2841"/>
+            </a:solidFill>
+            <a:prstDash val="solid"/>
+          </a:ln>
+        </p:spPr>
+        <p:txBody>
+          <a:bodyPr/>
+          <a:lstStyle/>
+          <a:p>
+            <a:endParaRPr lang="en-US"/>
+          </a:p>
+        </p:txBody>
+      </p:sp>
+      <p:sp>
+        <p:nvSpPr>
+          <p:cNvPr id="8" name="Text 6"/>
+          <p:cNvSpPr/>
+          <p:nvPr/>
+        </p:nvSpPr>
+        <p:spPr>
+          <a:xfrm>
+            <a:off x="1106424" y="2651760"/>
+            <a:ext cx="4023360" cy="548640"/>
+          </a:xfrm>
+          <a:prstGeom prst="rect">
+            <a:avLst/>
+          </a:prstGeom>
+          <a:noFill/>
+          <a:ln/>
+        </p:spPr>
+        <p:txBody>
+          <a:bodyPr wrap="square" lIns="0" tIns="0" rIns="0" bIns="0" rtlCol="0" anchor="t">
+            <a:normAutofit/>
+          </a:bodyPr>
+          <a:lstStyle/>
+          <a:p>
+            <a:pPr marL="0" indent="0">
+              <a:buNone/>
+            </a:pPr>
+            <a:r>
+              <a:rPr lang="en-US" sz="1200" dirty="0">
+                <a:solidFill>
+                  <a:srgbClr val="F4F7FA"/>
+                </a:solidFill>
+                <a:latin typeface="Consolas" pitchFamily="34" charset="0"/>
+                <a:ea typeface="Consolas" pitchFamily="34" charset="-122"/>
+                <a:cs typeface="Consolas" pitchFamily="34" charset="-120"/>
+              </a:rPr>
+              <a:t>WHERE content ILIKE '%połączeń do bazy%'</a:t>
+            </a:r>
+            <a:endParaRPr lang="en-US" sz="1200" dirty="0"/>
+          </a:p>
+        </p:txBody>
+      </p:sp>
+      <p:sp>
+        <p:nvSpPr>
+          <p:cNvPr id="9" name="Text 7"/>
+          <p:cNvSpPr/>
+          <p:nvPr/>
+        </p:nvSpPr>
+        <p:spPr>
+          <a:xfrm>
+            <a:off x="960120" y="3703320"/>
+            <a:ext cx="4297680" cy="256032"/>
+          </a:xfrm>
+          <a:prstGeom prst="rect">
+            <a:avLst/>
+          </a:prstGeom>
+          <a:noFill/>
+          <a:ln/>
+        </p:spPr>
+        <p:txBody>
+          <a:bodyPr wrap="square" lIns="508" tIns="508" rIns="508" bIns="508" rtlCol="0" anchor="ctr">
+            <a:normAutofit/>
+          </a:bodyPr>
+          <a:lstStyle/>
+          <a:p>
+            <a:pPr marL="0" indent="0" algn="l">
+              <a:buNone/>
+            </a:pPr>
+            <a:r>
+              <a:rPr lang="en-US" sz="1400" dirty="0">
+                <a:solidFill>
+                  <a:srgbClr val="607080"/>
+                </a:solidFill>
+                <a:latin typeface="Aptos" pitchFamily="34" charset="0"/>
+                <a:ea typeface="Aptos" pitchFamily="34" charset="-122"/>
+                <a:cs typeface="Aptos" pitchFamily="34" charset="-120"/>
+              </a:rPr>
+              <a:t>wynik zależy od dokładnych słów</a:t>
+            </a:r>
+            <a:endParaRPr lang="en-US" sz="1400" dirty="0"/>
+          </a:p>
+        </p:txBody>
+      </p:sp>
+      <p:sp>
+        <p:nvSpPr>
+          <p:cNvPr id="10" name="Shape 8"/>
+          <p:cNvSpPr/>
+          <p:nvPr/>
+        </p:nvSpPr>
+        <p:spPr>
+          <a:xfrm>
+            <a:off x="6400800" y="1828800"/>
+            <a:ext cx="5074920" cy="2560320"/>
+          </a:xfrm>
+          <a:prstGeom prst="roundRect">
+            <a:avLst>
+              <a:gd name="adj" fmla="val 4286"/>
+            </a:avLst>
+          </a:prstGeom>
+          <a:solidFill>
+            <a:srgbClr val="F7F9FB"/>
+          </a:solidFill>
+          <a:ln w="12700">
+            <a:solidFill>
+              <a:srgbClr val="D9E2F3"/>
+            </a:solidFill>
+            <a:prstDash val="solid"/>
+          </a:ln>
+        </p:spPr>
+        <p:txBody>
+          <a:bodyPr/>
+          <a:lstStyle/>
+          <a:p>
+            <a:endParaRPr lang="en-US"/>
+          </a:p>
+        </p:txBody>
+      </p:sp>
+      <p:sp>
+        <p:nvSpPr>
+          <p:cNvPr id="11" name="Text 9"/>
+          <p:cNvSpPr/>
+          <p:nvPr/>
+        </p:nvSpPr>
+        <p:spPr>
+          <a:xfrm>
+            <a:off x="6675120" y="2103120"/>
+            <a:ext cx="2194560" cy="228600"/>
+          </a:xfrm>
+          <a:prstGeom prst="rect">
+            <a:avLst/>
+          </a:prstGeom>
+          <a:noFill/>
+          <a:ln/>
+        </p:spPr>
+        <p:txBody>
+          <a:bodyPr wrap="square" lIns="508" tIns="508" rIns="508" bIns="508" rtlCol="0" anchor="ctr">
+            <a:normAutofit/>
+          </a:bodyPr>
+          <a:lstStyle/>
+          <a:p>
+            <a:pPr marL="0" indent="0" algn="l">
+              <a:buNone/>
+            </a:pPr>
+            <a:r>
+              <a:rPr lang="en-US" sz="1100" b="1" dirty="0">
+                <a:solidFill>
+                  <a:srgbClr val="156082"/>
+                </a:solidFill>
+                <a:latin typeface="Aptos" pitchFamily="34" charset="0"/>
+                <a:ea typeface="Aptos" pitchFamily="34" charset="-122"/>
+                <a:cs typeface="Aptos" pitchFamily="34" charset="-120"/>
+              </a:rPr>
+              <a:t>Semantic search</a:t>
+            </a:r>
+            <a:endParaRPr lang="en-US" sz="1100" dirty="0"/>
+          </a:p>
+        </p:txBody>
+      </p:sp>
+      <p:sp>
+        <p:nvSpPr>
+          <p:cNvPr id="12" name="Shape 10"/>
+          <p:cNvSpPr/>
+          <p:nvPr/>
+        </p:nvSpPr>
+        <p:spPr>
+          <a:xfrm>
+            <a:off x="6675120" y="2542032"/>
+            <a:ext cx="4297680" cy="731520"/>
+          </a:xfrm>
+          <a:prstGeom prst="roundRect">
+            <a:avLst>
+              <a:gd name="adj" fmla="val 10000"/>
+            </a:avLst>
+          </a:prstGeom>
+          <a:solidFill>
+            <a:srgbClr val="0E2841"/>
+          </a:solidFill>
+          <a:ln w="12700">
+            <a:solidFill>
+              <a:srgbClr val="0E2841"/>
+            </a:solidFill>
+            <a:prstDash val="solid"/>
+          </a:ln>
+        </p:spPr>
+        <p:txBody>
+          <a:bodyPr/>
+          <a:lstStyle/>
+          <a:p>
+            <a:endParaRPr lang="en-US"/>
+          </a:p>
+        </p:txBody>
+      </p:sp>
+      <p:sp>
+        <p:nvSpPr>
+          <p:cNvPr id="13" name="Text 11"/>
+          <p:cNvSpPr/>
+          <p:nvPr/>
+        </p:nvSpPr>
+        <p:spPr>
+          <a:xfrm>
+            <a:off x="6821424" y="2651760"/>
+            <a:ext cx="4023360" cy="548640"/>
+          </a:xfrm>
+          <a:prstGeom prst="rect">
+            <a:avLst/>
+          </a:prstGeom>
+          <a:noFill/>
+          <a:ln/>
+        </p:spPr>
+        <p:txBody>
+          <a:bodyPr wrap="square" lIns="0" tIns="0" rIns="0" bIns="0" rtlCol="0" anchor="t">
+            <a:normAutofit/>
+          </a:bodyPr>
+          <a:lstStyle/>
+          <a:p>
+            <a:pPr marL="0" indent="0">
+              <a:buNone/>
+            </a:pPr>
+            <a:r>
+              <a:rPr lang="en-US" sz="1200" dirty="0">
+                <a:solidFill>
+                  <a:srgbClr val="F4F7FA"/>
+                </a:solidFill>
+                <a:latin typeface="Consolas" pitchFamily="34" charset="0"/>
+                <a:ea typeface="Consolas" pitchFamily="34" charset="-122"/>
+                <a:cs typeface="Consolas" pitchFamily="34" charset="-120"/>
+              </a:rPr>
+              <a:t>ORDER BY embedding &lt;=&gt; :q</a:t>
+            </a:r>
+            <a:endParaRPr lang="en-US" sz="1200" dirty="0"/>
+          </a:p>
+          <a:p>
+            <a:pPr marL="0" indent="0">
+              <a:buNone/>
+            </a:pPr>
+            <a:r>
+              <a:rPr lang="en-US" sz="1200" dirty="0">
+                <a:solidFill>
+                  <a:srgbClr val="F4F7FA"/>
+                </a:solidFill>
+                <a:latin typeface="Consolas" pitchFamily="34" charset="0"/>
+                <a:ea typeface="Consolas" pitchFamily="34" charset="-122"/>
+                <a:cs typeface="Consolas" pitchFamily="34" charset="-120"/>
+              </a:rPr>
+              <a:t>LIMIT 5</a:t>
+            </a:r>
+            <a:endParaRPr lang="en-US" sz="1200" dirty="0"/>
+          </a:p>
+        </p:txBody>
+      </p:sp>
+      <p:sp>
+        <p:nvSpPr>
+          <p:cNvPr id="14" name="Text 12"/>
+          <p:cNvSpPr/>
+          <p:nvPr/>
+        </p:nvSpPr>
+        <p:spPr>
+          <a:xfrm>
+            <a:off x="6675120" y="3703320"/>
+            <a:ext cx="4297680" cy="256032"/>
+          </a:xfrm>
+          <a:prstGeom prst="rect">
+            <a:avLst/>
+          </a:prstGeom>
+          <a:noFill/>
+          <a:ln/>
+        </p:spPr>
+        <p:txBody>
+          <a:bodyPr wrap="square" lIns="508" tIns="508" rIns="508" bIns="508" rtlCol="0" anchor="ctr">
+            <a:normAutofit/>
+          </a:bodyPr>
+          <a:lstStyle/>
+          <a:p>
+            <a:pPr marL="0" indent="0" algn="l">
+              <a:buNone/>
+            </a:pPr>
+            <a:r>
+              <a:rPr lang="en-US" sz="1400" dirty="0">
+                <a:solidFill>
+                  <a:srgbClr val="607080"/>
+                </a:solidFill>
+                <a:latin typeface="Aptos" pitchFamily="34" charset="0"/>
+                <a:ea typeface="Aptos" pitchFamily="34" charset="-122"/>
+                <a:cs typeface="Aptos" pitchFamily="34" charset="-120"/>
+              </a:rPr>
+              <a:t>może zwrócić „Konfiguracja HikariCP”</a:t>
+            </a:r>
+            <a:endParaRPr lang="en-US" sz="1400" dirty="0"/>
+          </a:p>
+        </p:txBody>
+      </p:sp>
+      <p:sp>
+        <p:nvSpPr>
+          <p:cNvPr id="15" name="Shape 13"/>
+          <p:cNvSpPr/>
+          <p:nvPr/>
+        </p:nvSpPr>
+        <p:spPr>
+          <a:xfrm>
+            <a:off x="5852160" y="3063240"/>
+            <a:ext cx="457200" cy="0"/>
+          </a:xfrm>
+          <a:prstGeom prst="line">
+            <a:avLst/>
+          </a:prstGeom>
+          <a:noFill/>
+          <a:ln w="27940">
+            <a:solidFill>
+              <a:srgbClr val="E97132"/>
+            </a:solidFill>
+            <a:prstDash val="solid"/>
+            <a:headEnd type="none"/>
+            <a:tailEnd type="triangle"/>
+          </a:ln>
+        </p:spPr>
+        <p:txBody>
+          <a:bodyPr/>
+          <a:lstStyle/>
+          <a:p>
+            <a:endParaRPr lang="en-US"/>
+          </a:p>
+        </p:txBody>
+      </p:sp>
+      <p:sp>
+        <p:nvSpPr>
+          <p:cNvPr id="16" name="Text 14"/>
+          <p:cNvSpPr/>
+          <p:nvPr/>
+        </p:nvSpPr>
+        <p:spPr>
+          <a:xfrm>
+            <a:off x="5349240" y="3401568"/>
+            <a:ext cx="1554480" cy="182880"/>
+          </a:xfrm>
+          <a:prstGeom prst="rect">
+            <a:avLst/>
+          </a:prstGeom>
+          <a:noFill/>
+          <a:ln/>
+        </p:spPr>
+        <p:txBody>
+          <a:bodyPr wrap="square" lIns="508" tIns="508" rIns="508" bIns="508" rtlCol="0" anchor="ctr">
+            <a:normAutofit/>
+          </a:bodyPr>
+          <a:lstStyle/>
+          <a:p>
+            <a:pPr marL="0" indent="0" algn="ctr">
+              <a:buNone/>
+            </a:pPr>
+            <a:r>
+              <a:rPr lang="en-US" sz="900" b="1" dirty="0">
+                <a:solidFill>
+                  <a:srgbClr val="E97132"/>
+                </a:solidFill>
+                <a:latin typeface="Aptos" pitchFamily="34" charset="0"/>
+                <a:ea typeface="Aptos" pitchFamily="34" charset="-122"/>
+                <a:cs typeface="Aptos" pitchFamily="34" charset="-120"/>
+              </a:rPr>
+              <a:t>znaczenie</a:t>
+            </a:r>
+            <a:endParaRPr lang="en-US" sz="900" dirty="0"/>
+          </a:p>
+        </p:txBody>
+      </p:sp>
+      <p:sp>
+        <p:nvSpPr>
+          <p:cNvPr id="25" name="Slide Number Placeholder 0"/>
+          <p:cNvSpPr>
+            <a:spLocks noGrp="1"/>
+          </p:cNvSpPr>
+          <p:nvPr>
+            <p:ph type="sldNum" sz="quarter" idx="4294967295"/>
+          </p:nvPr>
+        </p:nvSpPr>
+        <p:spPr>
+          <a:xfrm>
+            <a:off x="11391900" y="6473825"/>
+            <a:ext cx="800100" cy="300038"/>
+          </a:xfrm>
+          <a:prstGeom prst="rect">
+            <a:avLst/>
+          </a:prstGeom>
+          <a:extLst>
+            <a:ext uri="{C572A759-6A51-4108-AA02-DFA0A04FC94B}">
+              <ma14:wrappingTextBoxFlag xmlns="" xmlns:ma14="http://schemas.microsoft.com/office/mac/drawingml/2011/main" val="0"/>
+            </a:ext>
+          </a:extLst>
+        </p:spPr>
+        <p:txBody>
+          <a:bodyPr/>
+          <a:lstStyle>
+            <a:lvl1pPr>
+              <a:defRPr sz="700">
+                <a:solidFill>
+                  <a:srgbClr val="7F8C99"/>
+                </a:solidFill>
+                <a:latin typeface="Aptos"/>
+                <a:ea typeface="Aptos"/>
+                <a:cs typeface="Aptos"/>
+              </a:defRPr>
+            </a:lvl1pPr>
+          </a:lstStyle>
+          <a:p>
+            <a:pPr algn="l"/>
+            <a:fld id="{F7021451-1387-4CA6-816F-3879F97B5CBC}" type="slidenum">
+              <a:rPr lang="en-US" b="0"/>
+              <a:t>10</a:t>
+            </a:fld>
+            <a:endParaRPr lang="en-US"/>
+          </a:p>
+        </p:txBody>
+      </p:sp>
+    </p:spTree>
+  </p:cSld>
+  <p:clrMapOvr>
+    <a:masterClrMapping/>
+  </p:clrMapOvr>
+</p:sld>
+</file>
+
+<file path=ppt/slides/slide11.xml><?xml version="1.0" encoding="utf-8"?>
 <p:sld xmlns:a="http://schemas.openxmlformats.org/drawingml/2006/main" xmlns:r="http://schemas.openxmlformats.org/officeDocument/2006/relationships" xmlns:p="http://schemas.openxmlformats.org/presentationml/2006/main">
   <p:cSld name="Slide 10">
     <p:bg>
@@ -3602,122 +4185,165 @@
           </a:p>
         </p:txBody>
       </p:sp>
-      <p:sp>
-        <p:nvSpPr>
-          <p:cNvPr id="27" name="Shape 25"/>
-          <p:cNvSpPr/>
-          <p:nvPr/>
-        </p:nvSpPr>
-        <p:spPr>
-          <a:xfrm>
-            <a:off x="868680" y="3977640"/>
-            <a:ext cx="10515600" cy="1097280"/>
-          </a:xfrm>
-          <a:prstGeom prst="roundRect">
-            <a:avLst>
-              <a:gd name="adj" fmla="val 10000"/>
-            </a:avLst>
-          </a:prstGeom>
-          <a:solidFill>
-            <a:srgbClr val="FFF1E8"/>
-          </a:solidFill>
-          <a:ln w="12700">
+      <p:grpSp>
+        <p:nvGrpSpPr>
+          <p:cNvPr id="31" name="Grupa 30">
+            <a:extLst>
+              <a:ext uri="{FF2B5EF4-FFF2-40B4-BE49-F238E27FC236}">
+                <a16:creationId xmlns:a16="http://schemas.microsoft.com/office/drawing/2014/main" id="{09004ECF-1951-30B3-E1A5-EDB426EBCDDA}"/>
+              </a:ext>
+            </a:extLst>
+          </p:cNvPr>
+          <p:cNvGrpSpPr/>
+          <p:nvPr/>
+        </p:nvGrpSpPr>
+        <p:grpSpPr>
+          <a:xfrm>
+            <a:off x="777240" y="3493008"/>
+            <a:ext cx="10515600" cy="822959"/>
+            <a:chOff x="868680" y="3977640"/>
+            <a:chExt cx="10515600" cy="822959"/>
+          </a:xfrm>
+        </p:grpSpPr>
+        <p:sp>
+          <p:nvSpPr>
+            <p:cNvPr id="27" name="Shape 25"/>
+            <p:cNvSpPr/>
+            <p:nvPr/>
+          </p:nvSpPr>
+          <p:spPr>
+            <a:xfrm>
+              <a:off x="868680" y="3977640"/>
+              <a:ext cx="10515600" cy="822959"/>
+            </a:xfrm>
+            <a:prstGeom prst="roundRect">
+              <a:avLst>
+                <a:gd name="adj" fmla="val 10000"/>
+              </a:avLst>
+            </a:prstGeom>
             <a:solidFill>
-              <a:srgbClr val="E97132"/>
+              <a:srgbClr val="FFF1E8"/>
             </a:solidFill>
-            <a:prstDash val="solid"/>
-          </a:ln>
-        </p:spPr>
-        <p:txBody>
-          <a:bodyPr/>
-          <a:lstStyle/>
-          <a:p>
-            <a:endParaRPr lang="en-US"/>
-          </a:p>
-        </p:txBody>
-      </p:sp>
-      <p:sp>
-        <p:nvSpPr>
-          <p:cNvPr id="28" name="Text 26"/>
-          <p:cNvSpPr/>
-          <p:nvPr/>
-        </p:nvSpPr>
-        <p:spPr>
-          <a:xfrm>
-            <a:off x="1143000" y="4279392"/>
-            <a:ext cx="5669280" cy="256032"/>
-          </a:xfrm>
-          <a:prstGeom prst="rect">
-            <a:avLst/>
-          </a:prstGeom>
-          <a:noFill/>
-          <a:ln/>
-        </p:spPr>
-        <p:txBody>
-          <a:bodyPr wrap="square" lIns="508" tIns="508" rIns="508" bIns="508" rtlCol="0" anchor="ctr">
-            <a:normAutofit fontScale="92500" lnSpcReduction="10000"/>
-          </a:bodyPr>
-          <a:lstStyle/>
-          <a:p>
-            <a:pPr marL="0" indent="0" algn="l">
-              <a:buNone/>
-            </a:pPr>
-            <a:r>
-              <a:rPr lang="en-US" sz="1900" b="1" dirty="0">
-                <a:solidFill>
-                  <a:srgbClr val="E97132"/>
-                </a:solidFill>
-                <a:latin typeface="Aptos" pitchFamily="34" charset="0"/>
-                <a:ea typeface="Aptos" pitchFamily="34" charset="-122"/>
-                <a:cs typeface="Aptos" pitchFamily="34" charset="-120"/>
-              </a:rPr>
-              <a:t>HNSW = Hierarchical Navigable Small World</a:t>
-            </a:r>
-            <a:endParaRPr lang="en-US" sz="1900" dirty="0"/>
-          </a:p>
-        </p:txBody>
-      </p:sp>
-      <p:sp>
-        <p:nvSpPr>
-          <p:cNvPr id="29" name="Text 27"/>
-          <p:cNvSpPr/>
-          <p:nvPr/>
-        </p:nvSpPr>
-        <p:spPr>
-          <a:xfrm>
-            <a:off x="6583680" y="4297680"/>
-            <a:ext cx="4023360" cy="237744"/>
-          </a:xfrm>
-          <a:prstGeom prst="rect">
-            <a:avLst/>
-          </a:prstGeom>
-          <a:noFill/>
-          <a:ln/>
-        </p:spPr>
-        <p:txBody>
-          <a:bodyPr wrap="square" lIns="508" tIns="508" rIns="508" bIns="508" rtlCol="0" anchor="ctr">
-            <a:normAutofit lnSpcReduction="10000"/>
-          </a:bodyPr>
-          <a:lstStyle/>
-          <a:p>
-            <a:pPr marL="0" indent="0" algn="r">
-              <a:buNone/>
-            </a:pPr>
-            <a:r>
-              <a:rPr lang="en-US" sz="1600" b="1" dirty="0">
-                <a:solidFill>
-                  <a:srgbClr val="0E2841"/>
-                </a:solidFill>
-                <a:latin typeface="Aptos" pitchFamily="34" charset="0"/>
-                <a:ea typeface="Aptos" pitchFamily="34" charset="-122"/>
-                <a:cs typeface="Aptos" pitchFamily="34" charset="-120"/>
-              </a:rPr>
-              <a:t>ANN: szybciej, ale wynik jest przybliżony</a:t>
-            </a:r>
-            <a:endParaRPr lang="en-US" sz="1600" dirty="0"/>
-          </a:p>
-        </p:txBody>
-      </p:sp>
+            <a:ln w="12700">
+              <a:solidFill>
+                <a:srgbClr val="E97132"/>
+              </a:solidFill>
+              <a:prstDash val="solid"/>
+            </a:ln>
+          </p:spPr>
+          <p:txBody>
+            <a:bodyPr/>
+            <a:lstStyle/>
+            <a:p>
+              <a:endParaRPr lang="en-US" dirty="0"/>
+            </a:p>
+          </p:txBody>
+        </p:sp>
+        <p:sp>
+          <p:nvSpPr>
+            <p:cNvPr id="28" name="Text 26"/>
+            <p:cNvSpPr/>
+            <p:nvPr/>
+          </p:nvSpPr>
+          <p:spPr>
+            <a:xfrm>
+              <a:off x="1143000" y="4279392"/>
+              <a:ext cx="5669280" cy="256032"/>
+            </a:xfrm>
+            <a:prstGeom prst="rect">
+              <a:avLst/>
+            </a:prstGeom>
+            <a:noFill/>
+            <a:ln/>
+          </p:spPr>
+          <p:txBody>
+            <a:bodyPr wrap="square" lIns="508" tIns="508" rIns="508" bIns="508" rtlCol="0" anchor="ctr">
+              <a:normAutofit fontScale="92500" lnSpcReduction="10000"/>
+            </a:bodyPr>
+            <a:lstStyle/>
+            <a:p>
+              <a:pPr marL="0" indent="0" algn="l">
+                <a:buNone/>
+              </a:pPr>
+              <a:r>
+                <a:rPr lang="en-US" sz="1900" b="1" dirty="0">
+                  <a:solidFill>
+                    <a:srgbClr val="E97132"/>
+                  </a:solidFill>
+                  <a:latin typeface="Aptos" pitchFamily="34" charset="0"/>
+                  <a:ea typeface="Aptos" pitchFamily="34" charset="-122"/>
+                  <a:cs typeface="Aptos" pitchFamily="34" charset="-120"/>
+                </a:rPr>
+                <a:t>HNSW = Hierarchical Navigable Small World</a:t>
+              </a:r>
+              <a:endParaRPr lang="en-US" sz="1900" dirty="0"/>
+            </a:p>
+          </p:txBody>
+        </p:sp>
+        <p:sp>
+          <p:nvSpPr>
+            <p:cNvPr id="29" name="Text 27"/>
+            <p:cNvSpPr/>
+            <p:nvPr/>
+          </p:nvSpPr>
+          <p:spPr>
+            <a:xfrm>
+              <a:off x="6583680" y="4297680"/>
+              <a:ext cx="4023360" cy="237744"/>
+            </a:xfrm>
+            <a:prstGeom prst="rect">
+              <a:avLst/>
+            </a:prstGeom>
+            <a:noFill/>
+            <a:ln/>
+          </p:spPr>
+          <p:txBody>
+            <a:bodyPr wrap="square" lIns="508" tIns="508" rIns="508" bIns="508" rtlCol="0" anchor="ctr">
+              <a:normAutofit lnSpcReduction="10000"/>
+            </a:bodyPr>
+            <a:lstStyle/>
+            <a:p>
+              <a:pPr marL="0" indent="0" algn="r">
+                <a:buNone/>
+              </a:pPr>
+              <a:r>
+                <a:rPr lang="en-US" sz="1600" b="1" dirty="0">
+                  <a:solidFill>
+                    <a:srgbClr val="0E2841"/>
+                  </a:solidFill>
+                  <a:latin typeface="Aptos" pitchFamily="34" charset="0"/>
+                  <a:ea typeface="Aptos" pitchFamily="34" charset="-122"/>
+                  <a:cs typeface="Aptos" pitchFamily="34" charset="-120"/>
+                </a:rPr>
+                <a:t>ANN: </a:t>
+              </a:r>
+              <a:r>
+                <a:rPr lang="en-US" sz="1600" b="1" dirty="0" err="1">
+                  <a:solidFill>
+                    <a:srgbClr val="0E2841"/>
+                  </a:solidFill>
+                  <a:latin typeface="Aptos" pitchFamily="34" charset="0"/>
+                  <a:ea typeface="Aptos" pitchFamily="34" charset="-122"/>
+                  <a:cs typeface="Aptos" pitchFamily="34" charset="-120"/>
+                </a:rPr>
+                <a:t>szybciej</a:t>
+              </a:r>
+              <a:r>
+                <a:rPr lang="en-US" sz="1600" b="1" dirty="0">
+                  <a:solidFill>
+                    <a:srgbClr val="0E2841"/>
+                  </a:solidFill>
+                  <a:latin typeface="Aptos" pitchFamily="34" charset="0"/>
+                  <a:ea typeface="Aptos" pitchFamily="34" charset="-122"/>
+                  <a:cs typeface="Aptos" pitchFamily="34" charset="-120"/>
+                </a:rPr>
+                <a:t>, ale wynik jest przybliżony</a:t>
+              </a:r>
+              <a:endParaRPr lang="en-US" sz="1600" dirty="0"/>
+            </a:p>
+          </p:txBody>
+        </p:sp>
+      </p:grpSp>
       <p:sp>
         <p:nvSpPr>
           <p:cNvPr id="30" name="Slide Number Placeholder 0"/>
@@ -3738,7 +4364,7 @@
           </a:prstGeom>
           <a:extLst>
             <a:ext uri="{C572A759-6A51-4108-AA02-DFA0A04FC94B}">
-              <ma14:wrappingTextBoxFlag xmlns:ma14="http://schemas.microsoft.com/office/mac/drawingml/2011/main" xmlns="" val="0"/>
+              <ma14:wrappingTextBoxFlag xmlns="" xmlns:ma14="http://schemas.microsoft.com/office/mac/drawingml/2011/main" val="0"/>
             </a:ext>
           </a:extLst>
         </p:spPr>
@@ -3760,9 +4386,656 @@
             <a:pPr algn="l"/>
             <a:fld id="{F7021451-1387-4CA6-816F-3879F97B5CBC}" type="slidenum">
               <a:rPr lang="en-US" b="0"/>
-              <a:t>10</a:t>
+              <a:t>11</a:t>
             </a:fld>
             <a:endParaRPr lang="en-US"/>
+          </a:p>
+        </p:txBody>
+      </p:sp>
+      <p:sp>
+        <p:nvSpPr>
+          <p:cNvPr id="32" name="Dymek mowy: prostokąt z zaokrąglonymi rogami 31">
+            <a:extLst>
+              <a:ext uri="{FF2B5EF4-FFF2-40B4-BE49-F238E27FC236}">
+                <a16:creationId xmlns:a16="http://schemas.microsoft.com/office/drawing/2014/main" id="{992BB57D-EB31-059D-4B3B-21C1BF9AFA5C}"/>
+              </a:ext>
+            </a:extLst>
+          </p:cNvPr>
+          <p:cNvSpPr/>
+          <p:nvPr/>
+        </p:nvSpPr>
+        <p:spPr>
+          <a:xfrm>
+            <a:off x="1097280" y="4609321"/>
+            <a:ext cx="3749040" cy="2015413"/>
+          </a:xfrm>
+          <a:prstGeom prst="wedgeRoundRectCallout">
+            <a:avLst>
+              <a:gd name="adj1" fmla="val -39903"/>
+              <a:gd name="adj2" fmla="val -62151"/>
+              <a:gd name="adj3" fmla="val 16667"/>
+            </a:avLst>
+          </a:prstGeom>
+        </p:spPr>
+        <p:style>
+          <a:lnRef idx="2">
+            <a:schemeClr val="accent6"/>
+          </a:lnRef>
+          <a:fillRef idx="1">
+            <a:schemeClr val="lt1"/>
+          </a:fillRef>
+          <a:effectRef idx="0">
+            <a:schemeClr val="accent6"/>
+          </a:effectRef>
+          <a:fontRef idx="minor">
+            <a:schemeClr val="dk1"/>
+          </a:fontRef>
+        </p:style>
+        <p:txBody>
+          <a:bodyPr rtlCol="0" anchor="ctr"/>
+          <a:lstStyle/>
+          <a:p>
+            <a:r>
+              <a:rPr lang="pl-PL" sz="1200" dirty="0"/>
+              <a:t>Z</a:t>
+            </a:r>
+            <a:r>
+              <a:rPr lang="en-US" sz="1200" dirty="0" err="1"/>
+              <a:t>amiast</a:t>
+            </a:r>
+            <a:r>
+              <a:rPr lang="en-US" sz="1200" dirty="0"/>
+              <a:t> </a:t>
+            </a:r>
+            <a:r>
+              <a:rPr lang="en-US" sz="1200" dirty="0" err="1"/>
+              <a:t>porównywać</a:t>
+            </a:r>
+            <a:r>
+              <a:rPr lang="en-US" sz="1200" dirty="0"/>
+              <a:t> embedding </a:t>
+            </a:r>
+            <a:r>
+              <a:rPr lang="en-US" sz="1200" dirty="0" err="1"/>
+              <a:t>zapytania</a:t>
+            </a:r>
+            <a:r>
+              <a:rPr lang="en-US" sz="1200" dirty="0"/>
+              <a:t> ze </a:t>
+            </a:r>
+            <a:r>
+              <a:rPr lang="en-US" sz="1200" b="1" dirty="0" err="1"/>
+              <a:t>wszystkimi</a:t>
+            </a:r>
+            <a:r>
+              <a:rPr lang="en-US" sz="1200" dirty="0"/>
+              <a:t> </a:t>
+            </a:r>
+            <a:r>
+              <a:rPr lang="en-US" sz="1200" dirty="0" err="1"/>
+              <a:t>embeddingami</a:t>
+            </a:r>
+            <a:r>
+              <a:rPr lang="en-US" sz="1200" dirty="0"/>
+              <a:t> w </a:t>
+            </a:r>
+            <a:r>
+              <a:rPr lang="en-US" sz="1200" dirty="0" err="1"/>
+              <a:t>bazie</a:t>
+            </a:r>
+            <a:r>
+              <a:rPr lang="en-US" sz="1200" dirty="0"/>
+              <a:t>, HNSW </a:t>
+            </a:r>
+            <a:r>
+              <a:rPr lang="en-US" sz="1200" dirty="0" err="1"/>
+              <a:t>buduje</a:t>
+            </a:r>
+            <a:r>
+              <a:rPr lang="en-US" sz="1200" dirty="0"/>
+              <a:t> </a:t>
+            </a:r>
+            <a:r>
+              <a:rPr lang="en-US" sz="1200" dirty="0" err="1"/>
+              <a:t>graf</a:t>
+            </a:r>
+            <a:r>
+              <a:rPr lang="en-US" sz="1200" dirty="0"/>
+              <a:t>, po </a:t>
+            </a:r>
+            <a:r>
+              <a:rPr lang="en-US" sz="1200" dirty="0" err="1"/>
+              <a:t>którym</a:t>
+            </a:r>
+            <a:r>
+              <a:rPr lang="en-US" sz="1200" dirty="0"/>
+              <a:t> </a:t>
+            </a:r>
+            <a:r>
+              <a:rPr lang="en-US" sz="1200" dirty="0" err="1"/>
+              <a:t>można</a:t>
+            </a:r>
+            <a:r>
+              <a:rPr lang="en-US" sz="1200" dirty="0"/>
+              <a:t> </a:t>
+            </a:r>
+            <a:r>
+              <a:rPr lang="en-US" sz="1200" dirty="0" err="1"/>
+              <a:t>szybko</a:t>
+            </a:r>
+            <a:r>
+              <a:rPr lang="en-US" sz="1200" dirty="0"/>
+              <a:t> „</a:t>
+            </a:r>
+            <a:r>
+              <a:rPr lang="en-US" sz="1200" dirty="0" err="1"/>
+              <a:t>nawigować</a:t>
+            </a:r>
+            <a:r>
+              <a:rPr lang="en-US" sz="1200" dirty="0"/>
+              <a:t>” w </a:t>
+            </a:r>
+            <a:r>
+              <a:rPr lang="en-US" sz="1200" dirty="0" err="1"/>
+              <a:t>stronę</a:t>
+            </a:r>
+            <a:r>
+              <a:rPr lang="en-US" sz="1200" dirty="0"/>
+              <a:t> </a:t>
+            </a:r>
+            <a:r>
+              <a:rPr lang="en-US" sz="1200" dirty="0" err="1"/>
+              <a:t>najbardziej</a:t>
+            </a:r>
+            <a:r>
+              <a:rPr lang="en-US" sz="1200" dirty="0"/>
+              <a:t> </a:t>
+            </a:r>
+            <a:r>
+              <a:rPr lang="en-US" sz="1200" dirty="0" err="1"/>
+              <a:t>podobnych</a:t>
+            </a:r>
+            <a:r>
+              <a:rPr lang="en-US" sz="1200" dirty="0"/>
+              <a:t> </a:t>
+            </a:r>
+            <a:r>
+              <a:rPr lang="en-US" sz="1200" dirty="0" err="1"/>
+              <a:t>wektorów</a:t>
+            </a:r>
+            <a:r>
+              <a:rPr lang="en-US" sz="1200" dirty="0"/>
+              <a:t>.</a:t>
+            </a:r>
+            <a:endParaRPr lang="pl-PL" sz="1200" dirty="0"/>
+          </a:p>
+          <a:p>
+            <a:endParaRPr lang="pl-PL" sz="1200" dirty="0"/>
+          </a:p>
+          <a:p>
+            <a:r>
+              <a:rPr lang="en-US" sz="1200" dirty="0" err="1"/>
+              <a:t>Można</a:t>
+            </a:r>
+            <a:r>
+              <a:rPr lang="en-US" sz="1200" dirty="0"/>
+              <a:t> to </a:t>
+            </a:r>
+            <a:r>
+              <a:rPr lang="en-US" sz="1200" dirty="0" err="1"/>
+              <a:t>porównać</a:t>
+            </a:r>
+            <a:r>
+              <a:rPr lang="en-US" sz="1200" dirty="0"/>
+              <a:t> do </a:t>
+            </a:r>
+            <a:r>
+              <a:rPr lang="en-US" sz="1200" dirty="0" err="1"/>
+              <a:t>szukania</a:t>
+            </a:r>
+            <a:r>
+              <a:rPr lang="en-US" sz="1200" dirty="0"/>
+              <a:t> </a:t>
+            </a:r>
+            <a:r>
+              <a:rPr lang="en-US" sz="1200" dirty="0" err="1"/>
+              <a:t>adresu</a:t>
+            </a:r>
+            <a:r>
+              <a:rPr lang="en-US" sz="1200" dirty="0"/>
+              <a:t>:</a:t>
+            </a:r>
+          </a:p>
+          <a:p>
+            <a:r>
+              <a:rPr lang="en-US" sz="1200" b="1" dirty="0" err="1"/>
+              <a:t>kraj</a:t>
+            </a:r>
+            <a:r>
+              <a:rPr lang="en-US" sz="1200" b="1" dirty="0"/>
+              <a:t> → </a:t>
+            </a:r>
+            <a:r>
+              <a:rPr lang="en-US" sz="1200" b="1" dirty="0" err="1"/>
+              <a:t>miasto</a:t>
+            </a:r>
+            <a:r>
+              <a:rPr lang="en-US" sz="1200" b="1" dirty="0"/>
+              <a:t> → </a:t>
+            </a:r>
+            <a:r>
+              <a:rPr lang="en-US" sz="1200" b="1" dirty="0" err="1"/>
+              <a:t>dzielnica</a:t>
+            </a:r>
+            <a:r>
+              <a:rPr lang="en-US" sz="1200" b="1" dirty="0"/>
+              <a:t> → </a:t>
+            </a:r>
+            <a:r>
+              <a:rPr lang="en-US" sz="1200" b="1" dirty="0" err="1"/>
+              <a:t>ulica</a:t>
+            </a:r>
+            <a:r>
+              <a:rPr lang="en-US" sz="1200" b="1" dirty="0"/>
+              <a:t> → </a:t>
+            </a:r>
+            <a:r>
+              <a:rPr lang="en-US" sz="1200" b="1" dirty="0" err="1"/>
+              <a:t>budynek</a:t>
+            </a:r>
+            <a:endParaRPr lang="en-US" sz="1200" dirty="0"/>
+          </a:p>
+          <a:p>
+            <a:r>
+              <a:rPr lang="en-US" sz="1200" dirty="0" err="1"/>
+              <a:t>zamiast</a:t>
+            </a:r>
+            <a:r>
+              <a:rPr lang="en-US" sz="1200" dirty="0"/>
+              <a:t> </a:t>
+            </a:r>
+            <a:r>
+              <a:rPr lang="en-US" sz="1200" dirty="0" err="1"/>
+              <a:t>sprawdzania</a:t>
+            </a:r>
+            <a:r>
+              <a:rPr lang="en-US" sz="1200" dirty="0"/>
+              <a:t> </a:t>
+            </a:r>
+            <a:r>
+              <a:rPr lang="en-US" sz="1200" dirty="0" err="1"/>
+              <a:t>każdego</a:t>
+            </a:r>
+            <a:r>
+              <a:rPr lang="en-US" sz="1200" dirty="0"/>
+              <a:t> </a:t>
+            </a:r>
+            <a:r>
+              <a:rPr lang="en-US" sz="1200" dirty="0" err="1"/>
+              <a:t>budynku</a:t>
+            </a:r>
+            <a:r>
+              <a:rPr lang="en-US" sz="1200" dirty="0"/>
+              <a:t> w </a:t>
+            </a:r>
+            <a:r>
+              <a:rPr lang="en-US" sz="1200" dirty="0" err="1"/>
+              <a:t>Polsce</a:t>
+            </a:r>
+            <a:r>
+              <a:rPr lang="en-US" sz="1200" dirty="0"/>
+              <a:t>.</a:t>
+            </a:r>
+          </a:p>
+          <a:p>
+            <a:endParaRPr lang="en-US" sz="1200" dirty="0"/>
+          </a:p>
+        </p:txBody>
+      </p:sp>
+      <p:sp>
+        <p:nvSpPr>
+          <p:cNvPr id="33" name="Dymek mowy: prostokąt z zaokrąglonymi rogami 32">
+            <a:extLst>
+              <a:ext uri="{FF2B5EF4-FFF2-40B4-BE49-F238E27FC236}">
+                <a16:creationId xmlns:a16="http://schemas.microsoft.com/office/drawing/2014/main" id="{BACE2C7C-EBDA-15DA-B8EE-F011EAA14E28}"/>
+              </a:ext>
+            </a:extLst>
+          </p:cNvPr>
+          <p:cNvSpPr/>
+          <p:nvPr/>
+        </p:nvSpPr>
+        <p:spPr>
+          <a:xfrm>
+            <a:off x="6848669" y="4609321"/>
+            <a:ext cx="4444171" cy="2015414"/>
+          </a:xfrm>
+          <a:prstGeom prst="wedgeRoundRectCallout">
+            <a:avLst>
+              <a:gd name="adj1" fmla="val 1984"/>
+              <a:gd name="adj2" fmla="val -60607"/>
+              <a:gd name="adj3" fmla="val 16667"/>
+            </a:avLst>
+          </a:prstGeom>
+        </p:spPr>
+        <p:style>
+          <a:lnRef idx="2">
+            <a:schemeClr val="accent6"/>
+          </a:lnRef>
+          <a:fillRef idx="1">
+            <a:schemeClr val="lt1"/>
+          </a:fillRef>
+          <a:effectRef idx="0">
+            <a:schemeClr val="accent6"/>
+          </a:effectRef>
+          <a:fontRef idx="minor">
+            <a:schemeClr val="dk1"/>
+          </a:fontRef>
+        </p:style>
+        <p:txBody>
+          <a:bodyPr rtlCol="0" anchor="ctr"/>
+          <a:lstStyle/>
+          <a:p>
+            <a:r>
+              <a:rPr lang="en-US" sz="1200" dirty="0"/>
+              <a:t>ANN </a:t>
+            </a:r>
+            <a:r>
+              <a:rPr lang="pl-PL" sz="1200" dirty="0"/>
+              <a:t>(</a:t>
+            </a:r>
+            <a:r>
+              <a:rPr lang="en-US" sz="1200" dirty="0"/>
+              <a:t>Approximate Nearest Neighbor</a:t>
+            </a:r>
+            <a:r>
+              <a:rPr lang="pl-PL" sz="1200" dirty="0"/>
+              <a:t>) </a:t>
+            </a:r>
+            <a:r>
+              <a:rPr lang="en-US" sz="1200" dirty="0" err="1"/>
+              <a:t>poświęca</a:t>
+            </a:r>
+            <a:r>
+              <a:rPr lang="en-US" sz="1200" dirty="0"/>
+              <a:t> </a:t>
+            </a:r>
+            <a:r>
+              <a:rPr lang="en-US" sz="1200" dirty="0" err="1"/>
+              <a:t>gwarancję</a:t>
+            </a:r>
+            <a:r>
+              <a:rPr lang="en-US" sz="1200" dirty="0"/>
+              <a:t> </a:t>
+            </a:r>
+            <a:r>
+              <a:rPr lang="en-US" sz="1200" dirty="0" err="1"/>
+              <a:t>znalezienia</a:t>
+            </a:r>
+            <a:r>
+              <a:rPr lang="en-US" sz="1200" dirty="0"/>
+              <a:t> </a:t>
+            </a:r>
+            <a:r>
+              <a:rPr lang="en-US" sz="1200" dirty="0" err="1"/>
+              <a:t>idealnego</a:t>
+            </a:r>
+            <a:r>
+              <a:rPr lang="en-US" sz="1200" dirty="0"/>
+              <a:t> </a:t>
+            </a:r>
+            <a:r>
+              <a:rPr lang="en-US" sz="1200" dirty="0" err="1"/>
+              <a:t>zestawu</a:t>
+            </a:r>
+            <a:r>
+              <a:rPr lang="en-US" sz="1200" dirty="0"/>
+              <a:t> </a:t>
+            </a:r>
+            <a:r>
+              <a:rPr lang="en-US" sz="1200" dirty="0" err="1"/>
+              <a:t>najbliższych</a:t>
+            </a:r>
+            <a:r>
+              <a:rPr lang="en-US" sz="1200" dirty="0"/>
+              <a:t> </a:t>
+            </a:r>
+            <a:r>
+              <a:rPr lang="en-US" sz="1200" dirty="0" err="1"/>
+              <a:t>wektorów</a:t>
+            </a:r>
+            <a:r>
+              <a:rPr lang="en-US" sz="1200" dirty="0"/>
+              <a:t> w </a:t>
+            </a:r>
+            <a:r>
+              <a:rPr lang="en-US" sz="1200" dirty="0" err="1"/>
+              <a:t>zamian</a:t>
+            </a:r>
+            <a:r>
+              <a:rPr lang="en-US" sz="1200" dirty="0"/>
+              <a:t> za </a:t>
+            </a:r>
+            <a:r>
+              <a:rPr lang="en-US" sz="1200" dirty="0" err="1"/>
+              <a:t>znacznie</a:t>
+            </a:r>
+            <a:r>
+              <a:rPr lang="en-US" sz="1200" dirty="0"/>
+              <a:t> </a:t>
+            </a:r>
+            <a:r>
+              <a:rPr lang="en-US" sz="1200" dirty="0" err="1"/>
+              <a:t>szybsze</a:t>
+            </a:r>
+            <a:r>
+              <a:rPr lang="en-US" sz="1200" dirty="0"/>
+              <a:t> </a:t>
+            </a:r>
+            <a:r>
+              <a:rPr lang="en-US" sz="1200" dirty="0" err="1"/>
+              <a:t>wyszukiwanie</a:t>
+            </a:r>
+            <a:r>
+              <a:rPr lang="pl-PL" sz="1200" dirty="0"/>
+              <a:t>.</a:t>
+            </a:r>
+          </a:p>
+          <a:p>
+            <a:endParaRPr lang="pl-PL" sz="1200" dirty="0"/>
+          </a:p>
+          <a:p>
+            <a:r>
+              <a:rPr lang="en-US" sz="1200" dirty="0" err="1"/>
+              <a:t>Dlatego</a:t>
+            </a:r>
+            <a:r>
+              <a:rPr lang="en-US" sz="1200" dirty="0"/>
+              <a:t> „</a:t>
+            </a:r>
+            <a:r>
+              <a:rPr lang="en-US" sz="1200" dirty="0" err="1"/>
+              <a:t>przybliżony</a:t>
+            </a:r>
+            <a:r>
+              <a:rPr lang="en-US" sz="1200" dirty="0"/>
+              <a:t>” </a:t>
+            </a:r>
+            <a:r>
+              <a:rPr lang="en-US" sz="1200" b="1" dirty="0" err="1"/>
+              <a:t>nie</a:t>
+            </a:r>
+            <a:r>
+              <a:rPr lang="en-US" sz="1200" b="1" dirty="0"/>
+              <a:t> </a:t>
+            </a:r>
+            <a:r>
+              <a:rPr lang="en-US" sz="1200" b="1" dirty="0" err="1"/>
+              <a:t>oznacza</a:t>
+            </a:r>
+            <a:r>
+              <a:rPr lang="en-US" sz="1200" b="1" dirty="0"/>
+              <a:t>, </a:t>
+            </a:r>
+            <a:r>
+              <a:rPr lang="en-US" sz="1200" b="1" dirty="0" err="1"/>
+              <a:t>że</a:t>
+            </a:r>
+            <a:r>
+              <a:rPr lang="en-US" sz="1200" b="1" dirty="0"/>
+              <a:t> </a:t>
+            </a:r>
+            <a:r>
+              <a:rPr lang="en-US" sz="1200" b="1" dirty="0" err="1"/>
+              <a:t>pgvector</a:t>
+            </a:r>
+            <a:r>
+              <a:rPr lang="en-US" sz="1200" b="1" dirty="0"/>
+              <a:t> </a:t>
+            </a:r>
+            <a:r>
+              <a:rPr lang="en-US" sz="1200" b="1" dirty="0" err="1"/>
+              <a:t>zwraca</a:t>
+            </a:r>
+            <a:r>
+              <a:rPr lang="en-US" sz="1200" b="1" dirty="0"/>
+              <a:t> </a:t>
+            </a:r>
+            <a:r>
+              <a:rPr lang="en-US" sz="1200" b="1" dirty="0" err="1"/>
+              <a:t>przybliżoną</a:t>
+            </a:r>
+            <a:r>
+              <a:rPr lang="en-US" sz="1200" b="1" dirty="0"/>
+              <a:t> </a:t>
+            </a:r>
+            <a:r>
+              <a:rPr lang="en-US" sz="1200" b="1" dirty="0" err="1"/>
+              <a:t>wartość</a:t>
+            </a:r>
+            <a:r>
+              <a:rPr lang="en-US" sz="1200" b="1" dirty="0"/>
+              <a:t> </a:t>
+            </a:r>
+            <a:r>
+              <a:rPr lang="en-US" sz="1200" b="1" dirty="0" err="1"/>
+              <a:t>embeddingu</a:t>
+            </a:r>
+            <a:r>
+              <a:rPr lang="en-US" sz="1200" b="1" dirty="0"/>
+              <a:t> </a:t>
+            </a:r>
+            <a:r>
+              <a:rPr lang="en-US" sz="1200" b="1" dirty="0" err="1"/>
+              <a:t>czy</a:t>
+            </a:r>
+            <a:r>
+              <a:rPr lang="en-US" sz="1200" b="1" dirty="0"/>
+              <a:t> </a:t>
+            </a:r>
+            <a:r>
+              <a:rPr lang="en-US" sz="1200" b="1" dirty="0" err="1"/>
+              <a:t>odległości</a:t>
+            </a:r>
+            <a:r>
+              <a:rPr lang="en-US" sz="1200" dirty="0"/>
+              <a:t>. </a:t>
+            </a:r>
+            <a:r>
+              <a:rPr lang="en-US" sz="1200" dirty="0" err="1"/>
+              <a:t>Przybliżony</a:t>
+            </a:r>
+            <a:r>
+              <a:rPr lang="en-US" sz="1200" dirty="0"/>
+              <a:t> jest </a:t>
+            </a:r>
+            <a:r>
+              <a:rPr lang="en-US" sz="1200" b="1" dirty="0" err="1"/>
+              <a:t>proces</a:t>
+            </a:r>
+            <a:r>
+              <a:rPr lang="en-US" sz="1200" b="1" dirty="0"/>
+              <a:t> </a:t>
+            </a:r>
+            <a:r>
+              <a:rPr lang="en-US" sz="1200" b="1" dirty="0" err="1"/>
+              <a:t>wyboru</a:t>
+            </a:r>
+            <a:r>
+              <a:rPr lang="en-US" sz="1200" b="1" dirty="0"/>
+              <a:t> </a:t>
+            </a:r>
+            <a:r>
+              <a:rPr lang="en-US" sz="1200" b="1" dirty="0" err="1"/>
+              <a:t>kandydatów</a:t>
+            </a:r>
+            <a:r>
+              <a:rPr lang="en-US" sz="1200" dirty="0"/>
+              <a:t> — </a:t>
+            </a:r>
+            <a:r>
+              <a:rPr lang="en-US" sz="1200" dirty="0" err="1"/>
+              <a:t>algorytm</a:t>
+            </a:r>
+            <a:r>
+              <a:rPr lang="en-US" sz="1200" dirty="0"/>
+              <a:t> </a:t>
+            </a:r>
+            <a:r>
+              <a:rPr lang="en-US" sz="1200" dirty="0" err="1"/>
+              <a:t>może</a:t>
+            </a:r>
+            <a:r>
+              <a:rPr lang="en-US" sz="1200" dirty="0"/>
+              <a:t> </a:t>
+            </a:r>
+            <a:r>
+              <a:rPr lang="en-US" sz="1200" dirty="0" err="1"/>
+              <a:t>nie</a:t>
+            </a:r>
+            <a:r>
+              <a:rPr lang="en-US" sz="1200" dirty="0"/>
+              <a:t> </a:t>
+            </a:r>
+            <a:r>
+              <a:rPr lang="en-US" sz="1200" dirty="0" err="1"/>
+              <a:t>znaleźć</a:t>
+            </a:r>
+            <a:r>
+              <a:rPr lang="en-US" sz="1200" dirty="0"/>
+              <a:t> </a:t>
+            </a:r>
+            <a:r>
+              <a:rPr lang="en-US" sz="1200" dirty="0" err="1"/>
+              <a:t>wszystkich</a:t>
+            </a:r>
+            <a:r>
+              <a:rPr lang="en-US" sz="1200" dirty="0"/>
+              <a:t> </a:t>
+            </a:r>
+            <a:r>
+              <a:rPr lang="en-US" sz="1200" dirty="0" err="1"/>
+              <a:t>rzeczywiście</a:t>
+            </a:r>
+            <a:r>
+              <a:rPr lang="en-US" sz="1200" dirty="0"/>
+              <a:t> </a:t>
+            </a:r>
+            <a:r>
+              <a:rPr lang="en-US" sz="1200" dirty="0" err="1"/>
+              <a:t>najbliższych</a:t>
+            </a:r>
+            <a:r>
+              <a:rPr lang="en-US" sz="1200" dirty="0"/>
+              <a:t> </a:t>
+            </a:r>
+            <a:r>
+              <a:rPr lang="en-US" sz="1200" dirty="0" err="1"/>
+              <a:t>sąsiadów</a:t>
+            </a:r>
+            <a:r>
+              <a:rPr lang="en-US" sz="1200" dirty="0"/>
+              <a:t>.</a:t>
+            </a:r>
           </a:p>
         </p:txBody>
       </p:sp>
@@ -3774,7 +5047,7 @@
 </p:sld>
 </file>
 
-<file path=ppt/slides/slide11.xml><?xml version="1.0" encoding="utf-8"?>
+<file path=ppt/slides/slide12.xml><?xml version="1.0" encoding="utf-8"?>
 <p:sld xmlns:a="http://schemas.openxmlformats.org/drawingml/2006/main" xmlns:r="http://schemas.openxmlformats.org/officeDocument/2006/relationships" xmlns:p="http://schemas.openxmlformats.org/presentationml/2006/main">
   <p:cSld name="Slide 11">
     <p:bg>
@@ -4583,7 +5856,18 @@
                 <a:ea typeface="Aptos" pitchFamily="34" charset="-122"/>
                 <a:cs typeface="Aptos" pitchFamily="34" charset="-120"/>
               </a:rPr>
-              <a:t>szybkość &gt; exactness</a:t>
+              <a:t>szybkość &gt; </a:t>
+            </a:r>
+            <a:r>
+              <a:rPr lang="pl-PL" sz="1400" dirty="0">
+                <a:solidFill>
+                  <a:srgbClr val="22313F"/>
+                </a:solidFill>
+                <a:latin typeface="Aptos" pitchFamily="34" charset="0"/>
+                <a:ea typeface="Aptos" pitchFamily="34" charset="-122"/>
+                <a:cs typeface="Aptos" pitchFamily="34" charset="-120"/>
+              </a:rPr>
+              <a:t>dokładność</a:t>
             </a:r>
             <a:endParaRPr lang="en-US" sz="1400" dirty="0"/>
           </a:p>
@@ -4682,7 +5966,7 @@
           </a:prstGeom>
           <a:extLst>
             <a:ext uri="{C572A759-6A51-4108-AA02-DFA0A04FC94B}">
-              <ma14:wrappingTextBoxFlag xmlns:ma14="http://schemas.microsoft.com/office/mac/drawingml/2011/main" xmlns="" val="0"/>
+              <ma14:wrappingTextBoxFlag xmlns="" xmlns:ma14="http://schemas.microsoft.com/office/mac/drawingml/2011/main" val="0"/>
             </a:ext>
           </a:extLst>
         </p:spPr>
@@ -4704,7 +5988,7 @@
             <a:pPr algn="l"/>
             <a:fld id="{F7021451-1387-4CA6-816F-3879F97B5CBC}" type="slidenum">
               <a:rPr lang="en-US" b="0"/>
-              <a:t>11</a:t>
+              <a:t>12</a:t>
             </a:fld>
             <a:endParaRPr lang="en-US"/>
           </a:p>
@@ -4718,7 +6002,7 @@
 </p:sld>
 </file>
 
-<file path=ppt/slides/slide12.xml><?xml version="1.0" encoding="utf-8"?>
+<file path=ppt/slides/slide13.xml><?xml version="1.0" encoding="utf-8"?>
 <p:sld xmlns:a="http://schemas.openxmlformats.org/drawingml/2006/main" xmlns:r="http://schemas.openxmlformats.org/officeDocument/2006/relationships" xmlns:p="http://schemas.openxmlformats.org/presentationml/2006/main">
   <p:cSld name="Slide 12">
     <p:bg>
@@ -5443,7 +6727,7 @@
           </a:prstGeom>
           <a:extLst>
             <a:ext uri="{C572A759-6A51-4108-AA02-DFA0A04FC94B}">
-              <ma14:wrappingTextBoxFlag xmlns:ma14="http://schemas.microsoft.com/office/mac/drawingml/2011/main" xmlns="" val="0"/>
+              <ma14:wrappingTextBoxFlag xmlns="" xmlns:ma14="http://schemas.microsoft.com/office/mac/drawingml/2011/main" val="0"/>
             </a:ext>
           </a:extLst>
         </p:spPr>
@@ -5465,7 +6749,7 @@
             <a:pPr algn="l"/>
             <a:fld id="{F7021451-1387-4CA6-816F-3879F97B5CBC}" type="slidenum">
               <a:rPr lang="en-US" b="0"/>
-              <a:t>12</a:t>
+              <a:t>13</a:t>
             </a:fld>
             <a:endParaRPr lang="en-US"/>
           </a:p>
@@ -5479,7 +6763,7 @@
 </p:sld>
 </file>
 
-<file path=ppt/slides/slide13.xml><?xml version="1.0" encoding="utf-8"?>
+<file path=ppt/slides/slide14.xml><?xml version="1.0" encoding="utf-8"?>
 <p:sld xmlns:a="http://schemas.openxmlformats.org/drawingml/2006/main" xmlns:r="http://schemas.openxmlformats.org/officeDocument/2006/relationships" xmlns:p="http://schemas.openxmlformats.org/presentationml/2006/main">
   <p:cSld name="Slide 13">
     <p:bg>
@@ -6296,7 +7580,7 @@
           </a:prstGeom>
           <a:extLst>
             <a:ext uri="{C572A759-6A51-4108-AA02-DFA0A04FC94B}">
-              <ma14:wrappingTextBoxFlag xmlns:ma14="http://schemas.microsoft.com/office/mac/drawingml/2011/main" xmlns="" val="0"/>
+              <ma14:wrappingTextBoxFlag xmlns="" xmlns:ma14="http://schemas.microsoft.com/office/mac/drawingml/2011/main" val="0"/>
             </a:ext>
           </a:extLst>
         </p:spPr>
@@ -6318,7 +7602,7 @@
             <a:pPr algn="l"/>
             <a:fld id="{F7021451-1387-4CA6-816F-3879F97B5CBC}" type="slidenum">
               <a:rPr lang="en-US" b="0"/>
-              <a:t>13</a:t>
+              <a:t>14</a:t>
             </a:fld>
             <a:endParaRPr lang="en-US"/>
           </a:p>
@@ -6332,7 +7616,7 @@
 </p:sld>
 </file>
 
-<file path=ppt/slides/slide14.xml><?xml version="1.0" encoding="utf-8"?>
+<file path=ppt/slides/slide15.xml><?xml version="1.0" encoding="utf-8"?>
 <p:sld xmlns:a="http://schemas.openxmlformats.org/drawingml/2006/main" xmlns:r="http://schemas.openxmlformats.org/officeDocument/2006/relationships" xmlns:p="http://schemas.openxmlformats.org/presentationml/2006/main">
   <p:cSld name="Slide 14">
     <p:bg>
@@ -7342,7 +8626,7 @@
           </a:prstGeom>
           <a:extLst>
             <a:ext uri="{C572A759-6A51-4108-AA02-DFA0A04FC94B}">
-              <ma14:wrappingTextBoxFlag xmlns:ma14="http://schemas.microsoft.com/office/mac/drawingml/2011/main" xmlns="" val="0"/>
+              <ma14:wrappingTextBoxFlag xmlns="" xmlns:ma14="http://schemas.microsoft.com/office/mac/drawingml/2011/main" val="0"/>
             </a:ext>
           </a:extLst>
         </p:spPr>
@@ -7364,7 +8648,7 @@
             <a:pPr algn="l"/>
             <a:fld id="{F7021451-1387-4CA6-816F-3879F97B5CBC}" type="slidenum">
               <a:rPr lang="en-US" b="0"/>
-              <a:t>14</a:t>
+              <a:t>15</a:t>
             </a:fld>
             <a:endParaRPr lang="en-US"/>
           </a:p>
@@ -7378,7 +8662,7 @@
 </p:sld>
 </file>
 
-<file path=ppt/slides/slide15.xml><?xml version="1.0" encoding="utf-8"?>
+<file path=ppt/slides/slide16.xml><?xml version="1.0" encoding="utf-8"?>
 <p:sld xmlns:a="http://schemas.openxmlformats.org/drawingml/2006/main" xmlns:r="http://schemas.openxmlformats.org/officeDocument/2006/relationships" xmlns:p="http://schemas.openxmlformats.org/presentationml/2006/main">
   <p:cSld name="Slide 15">
     <p:bg>
@@ -7499,7 +8783,7 @@
         </p:nvGraphicFramePr>
         <p:xfrm>
           <a:off x="731520" y="1417320"/>
-          <a:ext cx="10698480" cy="2834640"/>
+          <a:ext cx="10698480" cy="2560320"/>
         </p:xfrm>
         <a:graphic>
           <a:graphicData uri="http://schemas.openxmlformats.org/drawingml/2006/table">
@@ -8263,7 +9547,7 @@
           </a:prstGeom>
           <a:extLst>
             <a:ext uri="{C572A759-6A51-4108-AA02-DFA0A04FC94B}">
-              <ma14:wrappingTextBoxFlag xmlns:ma14="http://schemas.microsoft.com/office/mac/drawingml/2011/main" xmlns="" val="0"/>
+              <ma14:wrappingTextBoxFlag xmlns="" xmlns:ma14="http://schemas.microsoft.com/office/mac/drawingml/2011/main" val="0"/>
             </a:ext>
           </a:extLst>
         </p:spPr>
@@ -8285,7 +9569,7 @@
             <a:pPr algn="l"/>
             <a:fld id="{F7021451-1387-4CA6-816F-3879F97B5CBC}" type="slidenum">
               <a:rPr lang="en-US" b="0"/>
-              <a:t>15</a:t>
+              <a:t>16</a:t>
             </a:fld>
             <a:endParaRPr lang="en-US"/>
           </a:p>
@@ -8299,13 +9583,16 @@
 </p:sld>
 </file>
 
-<file path=ppt/slides/slide16.xml><?xml version="1.0" encoding="utf-8"?>
+<file path=ppt/slides/slide17.xml><?xml version="1.0" encoding="utf-8"?>
 <p:sld xmlns:a="http://schemas.openxmlformats.org/drawingml/2006/main" xmlns:r="http://schemas.openxmlformats.org/officeDocument/2006/relationships" xmlns:p="http://schemas.openxmlformats.org/presentationml/2006/main">
-  <p:cSld name="Slide 16">
+  <p:cSld name="Slide 17">
     <p:bg>
       <p:bgPr>
         <a:solidFill>
-          <a:srgbClr val="FFFFFF"/>
+          <a:schemeClr val="tx1">
+            <a:lumMod val="65000"/>
+            <a:lumOff val="35000"/>
+          </a:schemeClr>
         </a:solidFill>
         <a:effectLst/>
       </p:bgPr>
@@ -8332,8 +9619,8 @@
         </p:nvSpPr>
         <p:spPr>
           <a:xfrm>
-            <a:off x="548640" y="320040"/>
-            <a:ext cx="3291840" cy="201168"/>
+            <a:off x="777240" y="777240"/>
+            <a:ext cx="2743200" cy="274320"/>
           </a:xfrm>
           <a:prstGeom prst="rect">
             <a:avLst/>
@@ -8342,24 +9629,26 @@
           <a:ln/>
         </p:spPr>
         <p:txBody>
-          <a:bodyPr wrap="square" lIns="0" tIns="0" rIns="0" bIns="0" rtlCol="0" anchor="ctr"/>
-          <a:lstStyle/>
-          <a:p>
-            <a:pPr marL="0" indent="0">
+          <a:bodyPr wrap="square" lIns="508" tIns="508" rIns="508" bIns="508" rtlCol="0" anchor="ctr">
+            <a:normAutofit/>
+          </a:bodyPr>
+          <a:lstStyle/>
+          <a:p>
+            <a:pPr marL="0" indent="0" algn="l">
               <a:buNone/>
             </a:pPr>
             <a:r>
-              <a:rPr lang="en-US" sz="800" b="1" kern="0" spc="120" dirty="0">
-                <a:solidFill>
-                  <a:srgbClr val="E97132"/>
+              <a:rPr lang="en-US" sz="1200" b="1" dirty="0">
+                <a:solidFill>
+                  <a:srgbClr val="9CC3D5"/>
                 </a:solidFill>
                 <a:latin typeface="Aptos" pitchFamily="34" charset="0"/>
                 <a:ea typeface="Aptos" pitchFamily="34" charset="-122"/>
                 <a:cs typeface="Aptos" pitchFamily="34" charset="-120"/>
               </a:rPr>
-              <a:t>CO POKAZAĆ NA ŻYWO</a:t>
-            </a:r>
-            <a:endParaRPr lang="en-US" sz="800" dirty="0"/>
+              <a:t>PODSUMOWANIE</a:t>
+            </a:r>
+            <a:endParaRPr lang="en-US" sz="1200" dirty="0"/>
           </a:p>
         </p:txBody>
       </p:sp>
@@ -8371,8 +9660,8 @@
         </p:nvSpPr>
         <p:spPr>
           <a:xfrm>
-            <a:off x="548640" y="612648"/>
-            <a:ext cx="10972800" cy="438912"/>
+            <a:off x="777240" y="1417320"/>
+            <a:ext cx="9784080" cy="594360"/>
           </a:xfrm>
           <a:prstGeom prst="rect">
             <a:avLst/>
@@ -8381,26 +9670,26 @@
           <a:ln/>
         </p:spPr>
         <p:txBody>
-          <a:bodyPr wrap="square" lIns="0" tIns="0" rIns="0" bIns="0" rtlCol="0" anchor="ctr">
+          <a:bodyPr wrap="square" lIns="508" tIns="508" rIns="508" bIns="508" rtlCol="0" anchor="ctr">
             <a:normAutofit/>
           </a:bodyPr>
           <a:lstStyle/>
           <a:p>
-            <a:pPr marL="0" indent="0">
+            <a:pPr marL="0" indent="0" algn="l">
               <a:buNone/>
             </a:pPr>
             <a:r>
-              <a:rPr lang="en-US" sz="2600" b="1" dirty="0">
-                <a:solidFill>
-                  <a:srgbClr val="0E2841"/>
+              <a:rPr lang="en-US" sz="2900" b="1" dirty="0">
+                <a:solidFill>
+                  <a:srgbClr val="FFFFFF"/>
                 </a:solidFill>
                 <a:latin typeface="Aptos Display" pitchFamily="34" charset="0"/>
                 <a:ea typeface="Aptos Display" pitchFamily="34" charset="-122"/>
                 <a:cs typeface="Aptos Display" pitchFamily="34" charset="-120"/>
               </a:rPr>
-              <a:t>Plan demo na 10 minut</a:t>
-            </a:r>
-            <a:endParaRPr lang="en-US" sz="2600" dirty="0"/>
+              <a:t>Semantic search może wyglądać jak zwykły SQL</a:t>
+            </a:r>
+            <a:endParaRPr lang="en-US" sz="2900" dirty="0"/>
           </a:p>
         </p:txBody>
       </p:sp>
@@ -8412,18 +9701,18 @@
         </p:nvSpPr>
         <p:spPr>
           <a:xfrm>
-            <a:off x="868680" y="1325880"/>
-            <a:ext cx="438912" cy="438912"/>
+            <a:off x="960120" y="2743200"/>
+            <a:ext cx="146304" cy="146304"/>
           </a:xfrm>
           <a:prstGeom prst="ellipse">
             <a:avLst/>
           </a:prstGeom>
           <a:solidFill>
-            <a:srgbClr val="0E2841"/>
+            <a:srgbClr val="0F9ED5"/>
           </a:solidFill>
           <a:ln w="12700">
             <a:solidFill>
-              <a:srgbClr val="0E2841"/>
+              <a:srgbClr val="0F9ED5"/>
             </a:solidFill>
             <a:prstDash val="solid"/>
           </a:ln>
@@ -8444,8 +9733,8 @@
         </p:nvSpPr>
         <p:spPr>
           <a:xfrm>
-            <a:off x="868680" y="1426464"/>
-            <a:ext cx="438912" cy="182880"/>
+            <a:off x="1298448" y="2633472"/>
+            <a:ext cx="7132320" cy="292608"/>
           </a:xfrm>
           <a:prstGeom prst="rect">
             <a:avLst/>
@@ -8459,34 +9748,66 @@
           </a:bodyPr>
           <a:lstStyle/>
           <a:p>
-            <a:pPr marL="0" indent="0" algn="ctr">
+            <a:pPr marL="0" indent="0" algn="l">
               <a:buNone/>
             </a:pPr>
             <a:r>
-              <a:rPr lang="en-US" sz="900" b="1" dirty="0">
-                <a:solidFill>
-                  <a:srgbClr val="FFFFFF"/>
+              <a:rPr lang="en-US" sz="1700" dirty="0">
+                <a:solidFill>
+                  <a:srgbClr val="E8F1F7"/>
                 </a:solidFill>
                 <a:latin typeface="Aptos" pitchFamily="34" charset="0"/>
                 <a:ea typeface="Aptos" pitchFamily="34" charset="-122"/>
                 <a:cs typeface="Aptos" pitchFamily="34" charset="-120"/>
               </a:rPr>
-              <a:t>01</a:t>
-            </a:r>
-            <a:endParaRPr lang="en-US" sz="900" dirty="0"/>
-          </a:p>
-        </p:txBody>
-      </p:sp>
-      <p:sp>
-        <p:nvSpPr>
-          <p:cNvPr id="6" name="Text 4"/>
-          <p:cNvSpPr/>
-          <p:nvPr/>
-        </p:nvSpPr>
-        <p:spPr>
-          <a:xfrm>
-            <a:off x="1600200" y="1380744"/>
-            <a:ext cx="5303520" cy="274320"/>
+              <a:t>model generuje embedding</a:t>
+            </a:r>
+            <a:endParaRPr lang="en-US" sz="1700" dirty="0"/>
+          </a:p>
+        </p:txBody>
+      </p:sp>
+      <p:sp>
+        <p:nvSpPr>
+          <p:cNvPr id="6" name="Shape 4"/>
+          <p:cNvSpPr/>
+          <p:nvPr/>
+        </p:nvSpPr>
+        <p:spPr>
+          <a:xfrm>
+            <a:off x="960120" y="3246120"/>
+            <a:ext cx="146304" cy="146304"/>
+          </a:xfrm>
+          <a:prstGeom prst="ellipse">
+            <a:avLst/>
+          </a:prstGeom>
+          <a:solidFill>
+            <a:srgbClr val="0F9ED5"/>
+          </a:solidFill>
+          <a:ln w="12700">
+            <a:solidFill>
+              <a:srgbClr val="0F9ED5"/>
+            </a:solidFill>
+            <a:prstDash val="solid"/>
+          </a:ln>
+        </p:spPr>
+        <p:txBody>
+          <a:bodyPr/>
+          <a:lstStyle/>
+          <a:p>
+            <a:endParaRPr lang="en-US"/>
+          </a:p>
+        </p:txBody>
+      </p:sp>
+      <p:sp>
+        <p:nvSpPr>
+          <p:cNvPr id="7" name="Text 5"/>
+          <p:cNvSpPr/>
+          <p:nvPr/>
+        </p:nvSpPr>
+        <p:spPr>
+          <a:xfrm>
+            <a:off x="1298448" y="3136392"/>
+            <a:ext cx="7132320" cy="292608"/>
           </a:xfrm>
           <a:prstGeom prst="rect">
             <a:avLst/>
@@ -8496,7 +9817,7 @@
         </p:spPr>
         <p:txBody>
           <a:bodyPr wrap="square" lIns="508" tIns="508" rIns="508" bIns="508" rtlCol="0" anchor="ctr">
-            <a:normAutofit lnSpcReduction="10000"/>
+            <a:normAutofit/>
           </a:bodyPr>
           <a:lstStyle/>
           <a:p>
@@ -8504,49 +9825,17 @@
               <a:buNone/>
             </a:pPr>
             <a:r>
-              <a:rPr lang="en-US" sz="1800" b="1" dirty="0">
-                <a:solidFill>
-                  <a:srgbClr val="0E2841"/>
+              <a:rPr lang="en-US" sz="1700" dirty="0">
+                <a:solidFill>
+                  <a:srgbClr val="E8F1F7"/>
                 </a:solidFill>
                 <a:latin typeface="Aptos" pitchFamily="34" charset="0"/>
                 <a:ea typeface="Aptos" pitchFamily="34" charset="-122"/>
                 <a:cs typeface="Aptos" pitchFamily="34" charset="-120"/>
               </a:rPr>
-              <a:t>CREATE EXTENSION + tabela</a:t>
-            </a:r>
-            <a:endParaRPr lang="en-US" sz="1800" dirty="0"/>
-          </a:p>
-        </p:txBody>
-      </p:sp>
-      <p:sp>
-        <p:nvSpPr>
-          <p:cNvPr id="7" name="Shape 5"/>
-          <p:cNvSpPr/>
-          <p:nvPr/>
-        </p:nvSpPr>
-        <p:spPr>
-          <a:xfrm>
-            <a:off x="1088136" y="1783080"/>
-            <a:ext cx="0" cy="329184"/>
-          </a:xfrm>
-          <a:prstGeom prst="line">
-            <a:avLst/>
-          </a:prstGeom>
-          <a:noFill/>
-          <a:ln w="19050">
-            <a:solidFill>
-              <a:srgbClr val="D9E2F3"/>
-            </a:solidFill>
-            <a:prstDash val="solid"/>
-            <a:headEnd type="none"/>
-            <a:tailEnd type="none"/>
-          </a:ln>
-        </p:spPr>
-        <p:txBody>
-          <a:bodyPr/>
-          <a:lstStyle/>
-          <a:p>
-            <a:endParaRPr lang="en-US"/>
+              <a:t>pgvector przechowuje i porównuje wektory</a:t>
+            </a:r>
+            <a:endParaRPr lang="en-US" sz="1700" dirty="0"/>
           </a:p>
         </p:txBody>
       </p:sp>
@@ -8558,154 +9847,8 @@
         </p:nvSpPr>
         <p:spPr>
           <a:xfrm>
-            <a:off x="868680" y="2112264"/>
-            <a:ext cx="438912" cy="438912"/>
-          </a:xfrm>
-          <a:prstGeom prst="ellipse">
-            <a:avLst/>
-          </a:prstGeom>
-          <a:solidFill>
-            <a:srgbClr val="0E2841"/>
-          </a:solidFill>
-          <a:ln w="12700">
-            <a:solidFill>
-              <a:srgbClr val="0E2841"/>
-            </a:solidFill>
-            <a:prstDash val="solid"/>
-          </a:ln>
-        </p:spPr>
-        <p:txBody>
-          <a:bodyPr/>
-          <a:lstStyle/>
-          <a:p>
-            <a:endParaRPr lang="en-US"/>
-          </a:p>
-        </p:txBody>
-      </p:sp>
-      <p:sp>
-        <p:nvSpPr>
-          <p:cNvPr id="9" name="Text 7"/>
-          <p:cNvSpPr/>
-          <p:nvPr/>
-        </p:nvSpPr>
-        <p:spPr>
-          <a:xfrm>
-            <a:off x="868680" y="2212848"/>
-            <a:ext cx="438912" cy="182880"/>
-          </a:xfrm>
-          <a:prstGeom prst="rect">
-            <a:avLst/>
-          </a:prstGeom>
-          <a:noFill/>
-          <a:ln/>
-        </p:spPr>
-        <p:txBody>
-          <a:bodyPr wrap="square" lIns="508" tIns="508" rIns="508" bIns="508" rtlCol="0" anchor="ctr">
-            <a:normAutofit/>
-          </a:bodyPr>
-          <a:lstStyle/>
-          <a:p>
-            <a:pPr marL="0" indent="0" algn="ctr">
-              <a:buNone/>
-            </a:pPr>
-            <a:r>
-              <a:rPr lang="en-US" sz="900" b="1" dirty="0">
-                <a:solidFill>
-                  <a:srgbClr val="FFFFFF"/>
-                </a:solidFill>
-                <a:latin typeface="Aptos" pitchFamily="34" charset="0"/>
-                <a:ea typeface="Aptos" pitchFamily="34" charset="-122"/>
-                <a:cs typeface="Aptos" pitchFamily="34" charset="-120"/>
-              </a:rPr>
-              <a:t>02</a:t>
-            </a:r>
-            <a:endParaRPr lang="en-US" sz="900" dirty="0"/>
-          </a:p>
-        </p:txBody>
-      </p:sp>
-      <p:sp>
-        <p:nvSpPr>
-          <p:cNvPr id="10" name="Text 8"/>
-          <p:cNvSpPr/>
-          <p:nvPr/>
-        </p:nvSpPr>
-        <p:spPr>
-          <a:xfrm>
-            <a:off x="1600200" y="2167128"/>
-            <a:ext cx="5303520" cy="274320"/>
-          </a:xfrm>
-          <a:prstGeom prst="rect">
-            <a:avLst/>
-          </a:prstGeom>
-          <a:noFill/>
-          <a:ln/>
-        </p:spPr>
-        <p:txBody>
-          <a:bodyPr wrap="square" lIns="508" tIns="508" rIns="508" bIns="508" rtlCol="0" anchor="ctr">
-            <a:normAutofit lnSpcReduction="10000"/>
-          </a:bodyPr>
-          <a:lstStyle/>
-          <a:p>
-            <a:pPr marL="0" indent="0" algn="l">
-              <a:buNone/>
-            </a:pPr>
-            <a:r>
-              <a:rPr lang="en-US" sz="1800" b="1" dirty="0">
-                <a:solidFill>
-                  <a:srgbClr val="0E2841"/>
-                </a:solidFill>
-                <a:latin typeface="Aptos" pitchFamily="34" charset="0"/>
-                <a:ea typeface="Aptos" pitchFamily="34" charset="-122"/>
-                <a:cs typeface="Aptos" pitchFamily="34" charset="-120"/>
-              </a:rPr>
-              <a:t>zapis artykułu i embeddingu</a:t>
-            </a:r>
-            <a:endParaRPr lang="en-US" sz="1800" dirty="0"/>
-          </a:p>
-        </p:txBody>
-      </p:sp>
-      <p:sp>
-        <p:nvSpPr>
-          <p:cNvPr id="11" name="Shape 9"/>
-          <p:cNvSpPr/>
-          <p:nvPr/>
-        </p:nvSpPr>
-        <p:spPr>
-          <a:xfrm>
-            <a:off x="1088136" y="2569464"/>
-            <a:ext cx="0" cy="329184"/>
-          </a:xfrm>
-          <a:prstGeom prst="line">
-            <a:avLst/>
-          </a:prstGeom>
-          <a:noFill/>
-          <a:ln w="19050">
-            <a:solidFill>
-              <a:srgbClr val="D9E2F3"/>
-            </a:solidFill>
-            <a:prstDash val="solid"/>
-            <a:headEnd type="none"/>
-            <a:tailEnd type="none"/>
-          </a:ln>
-        </p:spPr>
-        <p:txBody>
-          <a:bodyPr/>
-          <a:lstStyle/>
-          <a:p>
-            <a:endParaRPr lang="en-US"/>
-          </a:p>
-        </p:txBody>
-      </p:sp>
-      <p:sp>
-        <p:nvSpPr>
-          <p:cNvPr id="12" name="Shape 10"/>
-          <p:cNvSpPr/>
-          <p:nvPr/>
-        </p:nvSpPr>
-        <p:spPr>
-          <a:xfrm>
-            <a:off x="868680" y="2898648"/>
-            <a:ext cx="438912" cy="438912"/>
+            <a:off x="960120" y="3749040"/>
+            <a:ext cx="146304" cy="146304"/>
           </a:xfrm>
           <a:prstGeom prst="ellipse">
             <a:avLst/>
@@ -8730,14 +9873,14 @@
       </p:sp>
       <p:sp>
         <p:nvSpPr>
-          <p:cNvPr id="13" name="Text 11"/>
-          <p:cNvSpPr/>
-          <p:nvPr/>
-        </p:nvSpPr>
-        <p:spPr>
-          <a:xfrm>
-            <a:off x="868680" y="2999232"/>
-            <a:ext cx="438912" cy="182880"/>
+          <p:cNvPr id="9" name="Text 7"/>
+          <p:cNvSpPr/>
+          <p:nvPr/>
+        </p:nvSpPr>
+        <p:spPr>
+          <a:xfrm>
+            <a:off x="1298448" y="3639312"/>
+            <a:ext cx="7132320" cy="292608"/>
           </a:xfrm>
           <a:prstGeom prst="rect">
             <a:avLst/>
@@ -8751,761 +9894,33 @@
           </a:bodyPr>
           <a:lstStyle/>
           <a:p>
-            <a:pPr marL="0" indent="0" algn="ctr">
+            <a:pPr marL="0" indent="0" algn="l">
               <a:buNone/>
             </a:pPr>
             <a:r>
-              <a:rPr lang="en-US" sz="900" b="1" dirty="0">
-                <a:solidFill>
-                  <a:srgbClr val="FFFFFF"/>
+              <a:rPr lang="en-US" sz="1700" b="1" dirty="0">
+                <a:solidFill>
+                  <a:srgbClr val="E8F1F7"/>
                 </a:solidFill>
                 <a:latin typeface="Aptos" pitchFamily="34" charset="0"/>
                 <a:ea typeface="Aptos" pitchFamily="34" charset="-122"/>
                 <a:cs typeface="Aptos" pitchFamily="34" charset="-120"/>
               </a:rPr>
-              <a:t>03</a:t>
-            </a:r>
-            <a:endParaRPr lang="en-US" sz="900" dirty="0"/>
-          </a:p>
-        </p:txBody>
-      </p:sp>
-      <p:sp>
-        <p:nvSpPr>
-          <p:cNvPr id="14" name="Text 12"/>
-          <p:cNvSpPr/>
-          <p:nvPr/>
-        </p:nvSpPr>
-        <p:spPr>
-          <a:xfrm>
-            <a:off x="1600200" y="2953512"/>
-            <a:ext cx="5303520" cy="274320"/>
-          </a:xfrm>
-          <a:prstGeom prst="rect">
-            <a:avLst/>
-          </a:prstGeom>
-          <a:noFill/>
-          <a:ln/>
-        </p:spPr>
-        <p:txBody>
-          <a:bodyPr wrap="square" lIns="508" tIns="508" rIns="508" bIns="508" rtlCol="0" anchor="ctr">
-            <a:normAutofit lnSpcReduction="10000"/>
-          </a:bodyPr>
-          <a:lstStyle/>
-          <a:p>
-            <a:pPr marL="0" indent="0" algn="l">
-              <a:buNone/>
-            </a:pPr>
-            <a:r>
-              <a:rPr lang="en-US" sz="1800" b="1" dirty="0">
-                <a:solidFill>
-                  <a:srgbClr val="E97132"/>
-                </a:solidFill>
-                <a:latin typeface="Aptos" pitchFamily="34" charset="0"/>
-                <a:ea typeface="Aptos" pitchFamily="34" charset="-122"/>
-                <a:cs typeface="Aptos" pitchFamily="34" charset="-120"/>
-              </a:rPr>
-              <a:t>zapytanie semantyczne</a:t>
-            </a:r>
-            <a:endParaRPr lang="en-US" sz="1800" dirty="0"/>
-          </a:p>
-        </p:txBody>
-      </p:sp>
-      <p:sp>
-        <p:nvSpPr>
-          <p:cNvPr id="15" name="Shape 13"/>
-          <p:cNvSpPr/>
-          <p:nvPr/>
-        </p:nvSpPr>
-        <p:spPr>
-          <a:xfrm>
-            <a:off x="1088136" y="3355848"/>
-            <a:ext cx="0" cy="329184"/>
-          </a:xfrm>
-          <a:prstGeom prst="line">
-            <a:avLst/>
-          </a:prstGeom>
-          <a:noFill/>
-          <a:ln w="19050">
-            <a:solidFill>
-              <a:srgbClr val="D9E2F3"/>
-            </a:solidFill>
-            <a:prstDash val="solid"/>
-            <a:headEnd type="none"/>
-            <a:tailEnd type="none"/>
-          </a:ln>
-        </p:spPr>
-        <p:txBody>
-          <a:bodyPr/>
-          <a:lstStyle/>
-          <a:p>
-            <a:endParaRPr lang="en-US"/>
-          </a:p>
-        </p:txBody>
-      </p:sp>
-      <p:sp>
-        <p:nvSpPr>
-          <p:cNvPr id="16" name="Shape 14"/>
-          <p:cNvSpPr/>
-          <p:nvPr/>
-        </p:nvSpPr>
-        <p:spPr>
-          <a:xfrm>
-            <a:off x="868680" y="3685032"/>
-            <a:ext cx="438912" cy="438912"/>
-          </a:xfrm>
-          <a:prstGeom prst="ellipse">
-            <a:avLst/>
-          </a:prstGeom>
-          <a:solidFill>
-            <a:srgbClr val="0E2841"/>
-          </a:solidFill>
-          <a:ln w="12700">
-            <a:solidFill>
-              <a:srgbClr val="0E2841"/>
-            </a:solidFill>
-            <a:prstDash val="solid"/>
-          </a:ln>
-        </p:spPr>
-        <p:txBody>
-          <a:bodyPr/>
-          <a:lstStyle/>
-          <a:p>
-            <a:endParaRPr lang="en-US"/>
-          </a:p>
-        </p:txBody>
-      </p:sp>
-      <p:sp>
-        <p:nvSpPr>
-          <p:cNvPr id="17" name="Text 15"/>
-          <p:cNvSpPr/>
-          <p:nvPr/>
-        </p:nvSpPr>
-        <p:spPr>
-          <a:xfrm>
-            <a:off x="868680" y="3785616"/>
-            <a:ext cx="438912" cy="182880"/>
-          </a:xfrm>
-          <a:prstGeom prst="rect">
-            <a:avLst/>
-          </a:prstGeom>
-          <a:noFill/>
-          <a:ln/>
-        </p:spPr>
-        <p:txBody>
-          <a:bodyPr wrap="square" lIns="508" tIns="508" rIns="508" bIns="508" rtlCol="0" anchor="ctr">
-            <a:normAutofit/>
-          </a:bodyPr>
-          <a:lstStyle/>
-          <a:p>
-            <a:pPr marL="0" indent="0" algn="ctr">
-              <a:buNone/>
-            </a:pPr>
-            <a:r>
-              <a:rPr lang="en-US" sz="900" b="1" dirty="0">
-                <a:solidFill>
-                  <a:srgbClr val="FFFFFF"/>
-                </a:solidFill>
-                <a:latin typeface="Aptos" pitchFamily="34" charset="0"/>
-                <a:ea typeface="Aptos" pitchFamily="34" charset="-122"/>
-                <a:cs typeface="Aptos" pitchFamily="34" charset="-120"/>
-              </a:rPr>
-              <a:t>04</a:t>
-            </a:r>
-            <a:endParaRPr lang="en-US" sz="900" dirty="0"/>
-          </a:p>
-        </p:txBody>
-      </p:sp>
-      <p:sp>
-        <p:nvSpPr>
-          <p:cNvPr id="18" name="Text 16"/>
-          <p:cNvSpPr/>
-          <p:nvPr/>
-        </p:nvSpPr>
-        <p:spPr>
-          <a:xfrm>
-            <a:off x="1600200" y="3739896"/>
-            <a:ext cx="5303520" cy="274320"/>
-          </a:xfrm>
-          <a:prstGeom prst="rect">
-            <a:avLst/>
-          </a:prstGeom>
-          <a:noFill/>
-          <a:ln/>
-        </p:spPr>
-        <p:txBody>
-          <a:bodyPr wrap="square" lIns="508" tIns="508" rIns="508" bIns="508" rtlCol="0" anchor="ctr">
-            <a:normAutofit lnSpcReduction="10000"/>
-          </a:bodyPr>
-          <a:lstStyle/>
-          <a:p>
-            <a:pPr marL="0" indent="0" algn="l">
-              <a:buNone/>
-            </a:pPr>
-            <a:r>
-              <a:rPr lang="en-US" sz="1800" b="1" dirty="0">
-                <a:solidFill>
-                  <a:srgbClr val="0E2841"/>
-                </a:solidFill>
-                <a:latin typeface="Aptos" pitchFamily="34" charset="0"/>
-                <a:ea typeface="Aptos" pitchFamily="34" charset="-122"/>
-                <a:cs typeface="Aptos" pitchFamily="34" charset="-120"/>
-              </a:rPr>
-              <a:t>HNSW + EXPLAIN ANALYZE</a:t>
-            </a:r>
-            <a:endParaRPr lang="en-US" sz="1800" dirty="0"/>
-          </a:p>
-        </p:txBody>
-      </p:sp>
-      <p:sp>
-        <p:nvSpPr>
-          <p:cNvPr id="19" name="Shape 17"/>
-          <p:cNvSpPr/>
-          <p:nvPr/>
-        </p:nvSpPr>
-        <p:spPr>
-          <a:xfrm>
-            <a:off x="1088136" y="4142232"/>
-            <a:ext cx="0" cy="329184"/>
-          </a:xfrm>
-          <a:prstGeom prst="line">
-            <a:avLst/>
-          </a:prstGeom>
-          <a:noFill/>
-          <a:ln w="19050">
-            <a:solidFill>
-              <a:srgbClr val="D9E2F3"/>
-            </a:solidFill>
-            <a:prstDash val="solid"/>
-            <a:headEnd type="none"/>
-            <a:tailEnd type="none"/>
-          </a:ln>
-        </p:spPr>
-        <p:txBody>
-          <a:bodyPr/>
-          <a:lstStyle/>
-          <a:p>
-            <a:endParaRPr lang="en-US"/>
-          </a:p>
-        </p:txBody>
-      </p:sp>
-      <p:sp>
-        <p:nvSpPr>
-          <p:cNvPr id="20" name="Shape 18"/>
-          <p:cNvSpPr/>
-          <p:nvPr/>
-        </p:nvSpPr>
-        <p:spPr>
-          <a:xfrm>
-            <a:off x="868680" y="4471416"/>
-            <a:ext cx="438912" cy="438912"/>
-          </a:xfrm>
-          <a:prstGeom prst="ellipse">
-            <a:avLst/>
-          </a:prstGeom>
-          <a:solidFill>
-            <a:srgbClr val="0E2841"/>
-          </a:solidFill>
-          <a:ln w="12700">
-            <a:solidFill>
-              <a:srgbClr val="0E2841"/>
-            </a:solidFill>
-            <a:prstDash val="solid"/>
-          </a:ln>
-        </p:spPr>
-        <p:txBody>
-          <a:bodyPr/>
-          <a:lstStyle/>
-          <a:p>
-            <a:endParaRPr lang="en-US"/>
-          </a:p>
-        </p:txBody>
-      </p:sp>
-      <p:sp>
-        <p:nvSpPr>
-          <p:cNvPr id="21" name="Text 19"/>
-          <p:cNvSpPr/>
-          <p:nvPr/>
-        </p:nvSpPr>
-        <p:spPr>
-          <a:xfrm>
-            <a:off x="868680" y="4572000"/>
-            <a:ext cx="438912" cy="182880"/>
-          </a:xfrm>
-          <a:prstGeom prst="rect">
-            <a:avLst/>
-          </a:prstGeom>
-          <a:noFill/>
-          <a:ln/>
-        </p:spPr>
-        <p:txBody>
-          <a:bodyPr wrap="square" lIns="508" tIns="508" rIns="508" bIns="508" rtlCol="0" anchor="ctr">
-            <a:normAutofit/>
-          </a:bodyPr>
-          <a:lstStyle/>
-          <a:p>
-            <a:pPr marL="0" indent="0" algn="ctr">
-              <a:buNone/>
-            </a:pPr>
-            <a:r>
-              <a:rPr lang="en-US" sz="900" b="1" dirty="0">
-                <a:solidFill>
-                  <a:srgbClr val="FFFFFF"/>
-                </a:solidFill>
-                <a:latin typeface="Aptos" pitchFamily="34" charset="0"/>
-                <a:ea typeface="Aptos" pitchFamily="34" charset="-122"/>
-                <a:cs typeface="Aptos" pitchFamily="34" charset="-120"/>
-              </a:rPr>
-              <a:t>05</a:t>
-            </a:r>
-            <a:endParaRPr lang="en-US" sz="900" dirty="0"/>
-          </a:p>
-        </p:txBody>
-      </p:sp>
-      <p:sp>
-        <p:nvSpPr>
-          <p:cNvPr id="22" name="Text 20"/>
-          <p:cNvSpPr/>
-          <p:nvPr/>
-        </p:nvSpPr>
-        <p:spPr>
-          <a:xfrm>
-            <a:off x="1600200" y="4526280"/>
-            <a:ext cx="5303520" cy="274320"/>
-          </a:xfrm>
-          <a:prstGeom prst="rect">
-            <a:avLst/>
-          </a:prstGeom>
-          <a:noFill/>
-          <a:ln/>
-        </p:spPr>
-        <p:txBody>
-          <a:bodyPr wrap="square" lIns="508" tIns="508" rIns="508" bIns="508" rtlCol="0" anchor="ctr">
-            <a:normAutofit lnSpcReduction="10000"/>
-          </a:bodyPr>
-          <a:lstStyle/>
-          <a:p>
-            <a:pPr marL="0" indent="0" algn="l">
-              <a:buNone/>
-            </a:pPr>
-            <a:r>
-              <a:rPr lang="en-US" sz="1800" b="1" dirty="0">
-                <a:solidFill>
-                  <a:srgbClr val="0E2841"/>
-                </a:solidFill>
-                <a:latin typeface="Aptos" pitchFamily="34" charset="0"/>
-                <a:ea typeface="Aptos" pitchFamily="34" charset="-122"/>
-                <a:cs typeface="Aptos" pitchFamily="34" charset="-120"/>
-              </a:rPr>
-              <a:t>filtr SQL + hybrid ranking</a:t>
-            </a:r>
-            <a:endParaRPr lang="en-US" sz="1800" dirty="0"/>
-          </a:p>
-        </p:txBody>
-      </p:sp>
-      <p:sp>
-        <p:nvSpPr>
-          <p:cNvPr id="23" name="Shape 21"/>
-          <p:cNvSpPr/>
-          <p:nvPr/>
-        </p:nvSpPr>
-        <p:spPr>
-          <a:xfrm>
-            <a:off x="7315200" y="1417320"/>
-            <a:ext cx="3840480" cy="3429000"/>
-          </a:xfrm>
-          <a:prstGeom prst="roundRect">
-            <a:avLst>
-              <a:gd name="adj" fmla="val 3200"/>
-            </a:avLst>
-          </a:prstGeom>
-          <a:solidFill>
-            <a:srgbClr val="F7F9FB"/>
-          </a:solidFill>
-          <a:ln w="12700">
-            <a:solidFill>
-              <a:srgbClr val="D9E2F3"/>
-            </a:solidFill>
-            <a:prstDash val="solid"/>
-          </a:ln>
-        </p:spPr>
-        <p:txBody>
-          <a:bodyPr/>
-          <a:lstStyle/>
-          <a:p>
-            <a:endParaRPr lang="en-US"/>
-          </a:p>
-        </p:txBody>
-      </p:sp>
-      <p:sp>
-        <p:nvSpPr>
-          <p:cNvPr id="24" name="Text 22"/>
-          <p:cNvSpPr/>
-          <p:nvPr/>
-        </p:nvSpPr>
-        <p:spPr>
-          <a:xfrm>
-            <a:off x="7635240" y="1783080"/>
-            <a:ext cx="2926080" cy="228600"/>
-          </a:xfrm>
-          <a:prstGeom prst="rect">
-            <a:avLst/>
-          </a:prstGeom>
-          <a:noFill/>
-          <a:ln/>
-        </p:spPr>
-        <p:txBody>
-          <a:bodyPr wrap="square" lIns="508" tIns="508" rIns="508" bIns="508" rtlCol="0" anchor="ctr">
-            <a:normAutofit/>
-          </a:bodyPr>
-          <a:lstStyle/>
-          <a:p>
-            <a:pPr marL="0" indent="0" algn="l">
-              <a:buNone/>
-            </a:pPr>
-            <a:r>
-              <a:rPr lang="en-US" sz="1200" b="1" dirty="0">
-                <a:solidFill>
-                  <a:srgbClr val="E97132"/>
-                </a:solidFill>
-                <a:latin typeface="Aptos" pitchFamily="34" charset="0"/>
-                <a:ea typeface="Aptos" pitchFamily="34" charset="-122"/>
-                <a:cs typeface="Aptos" pitchFamily="34" charset="-120"/>
-              </a:rPr>
-              <a:t>Jedno pytanie testowe</a:t>
-            </a:r>
-            <a:endParaRPr lang="en-US" sz="1200" dirty="0"/>
-          </a:p>
-        </p:txBody>
-      </p:sp>
-      <p:sp>
-        <p:nvSpPr>
-          <p:cNvPr id="25" name="Text 23"/>
-          <p:cNvSpPr/>
-          <p:nvPr/>
-        </p:nvSpPr>
-        <p:spPr>
-          <a:xfrm>
-            <a:off x="7635240" y="2148840"/>
-            <a:ext cx="3017520" cy="640080"/>
-          </a:xfrm>
-          <a:prstGeom prst="rect">
-            <a:avLst/>
-          </a:prstGeom>
-          <a:noFill/>
-          <a:ln/>
-        </p:spPr>
-        <p:txBody>
-          <a:bodyPr wrap="square" lIns="508" tIns="508" rIns="508" bIns="508" rtlCol="0" anchor="ctr">
-            <a:normAutofit lnSpcReduction="10000"/>
-          </a:bodyPr>
-          <a:lstStyle/>
-          <a:p>
-            <a:pPr marL="0" indent="0" algn="l">
-              <a:buNone/>
-            </a:pPr>
-            <a:r>
-              <a:rPr lang="en-US" sz="2200" b="1" dirty="0">
-                <a:solidFill>
-                  <a:srgbClr val="0E2841"/>
-                </a:solidFill>
-                <a:latin typeface="Aptos" pitchFamily="34" charset="0"/>
-                <a:ea typeface="Aptos" pitchFamily="34" charset="-122"/>
-                <a:cs typeface="Aptos" pitchFamily="34" charset="-120"/>
-              </a:rPr>
-              <a:t>„aplikacja ma za mało</a:t>
-            </a:r>
-            <a:endParaRPr lang="en-US" sz="2200" dirty="0"/>
-          </a:p>
-          <a:p>
-            <a:pPr marL="0" indent="0" algn="l">
-              <a:buNone/>
-            </a:pPr>
-            <a:r>
-              <a:rPr lang="en-US" sz="2200" b="1" dirty="0">
-                <a:solidFill>
-                  <a:srgbClr val="0E2841"/>
-                </a:solidFill>
-                <a:latin typeface="Aptos" pitchFamily="34" charset="0"/>
-                <a:ea typeface="Aptos" pitchFamily="34" charset="-122"/>
-                <a:cs typeface="Aptos" pitchFamily="34" charset="-120"/>
-              </a:rPr>
-              <a:t>połączeń do bazy”</a:t>
-            </a:r>
-            <a:endParaRPr lang="en-US" sz="2200" dirty="0"/>
-          </a:p>
-        </p:txBody>
-      </p:sp>
-      <p:sp>
-        <p:nvSpPr>
-          <p:cNvPr id="26" name="Text 24"/>
-          <p:cNvSpPr/>
-          <p:nvPr/>
-        </p:nvSpPr>
-        <p:spPr>
-          <a:xfrm>
-            <a:off x="7635240" y="3246120"/>
-            <a:ext cx="2971800" cy="566928"/>
-          </a:xfrm>
-          <a:prstGeom prst="rect">
-            <a:avLst/>
-          </a:prstGeom>
-          <a:noFill/>
-          <a:ln/>
-        </p:spPr>
-        <p:txBody>
-          <a:bodyPr wrap="square" lIns="508" tIns="508" rIns="508" bIns="508" rtlCol="0" anchor="ctr">
-            <a:normAutofit/>
-          </a:bodyPr>
-          <a:lstStyle/>
-          <a:p>
-            <a:pPr marL="0" indent="0" algn="l">
-              <a:buNone/>
-            </a:pPr>
-            <a:r>
-              <a:rPr lang="en-US" sz="1600" dirty="0">
-                <a:solidFill>
-                  <a:srgbClr val="22313F"/>
-                </a:solidFill>
-                <a:latin typeface="Aptos" pitchFamily="34" charset="0"/>
-                <a:ea typeface="Aptos" pitchFamily="34" charset="-122"/>
-                <a:cs typeface="Aptos" pitchFamily="34" charset="-120"/>
-              </a:rPr>
-              <a:t>Wynik powinien wskazać</a:t>
-            </a:r>
-            <a:endParaRPr lang="en-US" sz="1600" dirty="0"/>
-          </a:p>
-          <a:p>
-            <a:pPr marL="0" indent="0" algn="l">
-              <a:buNone/>
-            </a:pPr>
-            <a:r>
-              <a:rPr lang="en-US" sz="1600" dirty="0">
-                <a:solidFill>
-                  <a:srgbClr val="22313F"/>
-                </a:solidFill>
-                <a:latin typeface="Aptos" pitchFamily="34" charset="0"/>
-                <a:ea typeface="Aptos" pitchFamily="34" charset="-122"/>
-                <a:cs typeface="Aptos" pitchFamily="34" charset="-120"/>
-              </a:rPr>
-              <a:t>HikariCP, nawet bez tej frazy.</a:t>
-            </a:r>
-            <a:endParaRPr lang="en-US" sz="1600" dirty="0"/>
-          </a:p>
-        </p:txBody>
-      </p:sp>
-      <p:sp>
-        <p:nvSpPr>
-          <p:cNvPr id="27" name="Text 25"/>
-          <p:cNvSpPr/>
-          <p:nvPr/>
-        </p:nvSpPr>
-        <p:spPr>
-          <a:xfrm>
-            <a:off x="7635240" y="4251960"/>
-            <a:ext cx="2926080" cy="237744"/>
-          </a:xfrm>
-          <a:prstGeom prst="rect">
-            <a:avLst/>
-          </a:prstGeom>
-          <a:noFill/>
-          <a:ln/>
-        </p:spPr>
-        <p:txBody>
-          <a:bodyPr wrap="square" lIns="508" tIns="508" rIns="508" bIns="508" rtlCol="0" anchor="ctr">
-            <a:normAutofit/>
-          </a:bodyPr>
-          <a:lstStyle/>
-          <a:p>
-            <a:pPr marL="0" indent="0" algn="l">
-              <a:buNone/>
-            </a:pPr>
-            <a:r>
-              <a:rPr lang="en-US" sz="1500" b="1" dirty="0">
-                <a:solidFill>
-                  <a:srgbClr val="E97132"/>
-                </a:solidFill>
-                <a:latin typeface="Aptos" pitchFamily="34" charset="0"/>
-                <a:ea typeface="Aptos" pitchFamily="34" charset="-122"/>
-                <a:cs typeface="Aptos" pitchFamily="34" charset="-120"/>
-              </a:rPr>
-              <a:t>To spina całą opowieść.</a:t>
-            </a:r>
-            <a:endParaRPr lang="en-US" sz="1500" dirty="0"/>
-          </a:p>
-        </p:txBody>
-      </p:sp>
-      <p:sp>
-        <p:nvSpPr>
-          <p:cNvPr id="28" name="Slide Number Placeholder 0"/>
-          <p:cNvSpPr>
-            <a:spLocks noGrp="1"/>
-          </p:cNvSpPr>
-          <p:nvPr>
-            <p:ph type="sldNum" sz="quarter" idx="4294967295"/>
-          </p:nvPr>
-        </p:nvSpPr>
-        <p:spPr>
-          <a:xfrm>
-            <a:off x="11391900" y="6473825"/>
-            <a:ext cx="800100" cy="300038"/>
-          </a:xfrm>
-          <a:prstGeom prst="rect">
-            <a:avLst/>
-          </a:prstGeom>
-          <a:extLst>
-            <a:ext uri="{C572A759-6A51-4108-AA02-DFA0A04FC94B}">
-              <ma14:wrappingTextBoxFlag xmlns:ma14="http://schemas.microsoft.com/office/mac/drawingml/2011/main" xmlns="" val="0"/>
-            </a:ext>
-          </a:extLst>
-        </p:spPr>
-        <p:txBody>
-          <a:bodyPr/>
-          <a:lstStyle>
-            <a:lvl1pPr>
-              <a:defRPr sz="700">
-                <a:solidFill>
-                  <a:srgbClr val="7F8C99"/>
-                </a:solidFill>
-                <a:latin typeface="Aptos"/>
-                <a:ea typeface="Aptos"/>
-                <a:cs typeface="Aptos"/>
-              </a:defRPr>
-            </a:lvl1pPr>
-          </a:lstStyle>
-          <a:p>
-            <a:pPr algn="l"/>
-            <a:fld id="{F7021451-1387-4CA6-816F-3879F97B5CBC}" type="slidenum">
-              <a:rPr lang="en-US" b="0"/>
-              <a:t>16</a:t>
-            </a:fld>
-            <a:endParaRPr lang="en-US"/>
-          </a:p>
-        </p:txBody>
-      </p:sp>
-    </p:spTree>
-  </p:cSld>
-  <p:clrMapOvr>
-    <a:masterClrMapping/>
-  </p:clrMapOvr>
-</p:sld>
-</file>
-
-<file path=ppt/slides/slide17.xml><?xml version="1.0" encoding="utf-8"?>
-<p:sld xmlns:a="http://schemas.openxmlformats.org/drawingml/2006/main" xmlns:r="http://schemas.openxmlformats.org/officeDocument/2006/relationships" xmlns:p="http://schemas.openxmlformats.org/presentationml/2006/main">
-  <p:cSld name="Slide 17">
-    <p:bg>
-      <p:bgPr>
-        <a:solidFill>
-          <a:srgbClr val="0E2841"/>
-        </a:solidFill>
-        <a:effectLst/>
-      </p:bgPr>
-    </p:bg>
-    <p:spTree>
-      <p:nvGrpSpPr>
-        <p:cNvPr id="1" name=""/>
-        <p:cNvGrpSpPr/>
-        <p:nvPr/>
-      </p:nvGrpSpPr>
-      <p:grpSpPr>
-        <a:xfrm>
-          <a:off x="0" y="0"/>
-          <a:ext cx="0" cy="0"/>
-          <a:chOff x="0" y="0"/>
-          <a:chExt cx="0" cy="0"/>
-        </a:xfrm>
-      </p:grpSpPr>
-      <p:sp>
-        <p:nvSpPr>
-          <p:cNvPr id="2" name="Text 0"/>
-          <p:cNvSpPr/>
-          <p:nvPr/>
-        </p:nvSpPr>
-        <p:spPr>
-          <a:xfrm>
-            <a:off x="777240" y="777240"/>
-            <a:ext cx="2743200" cy="274320"/>
-          </a:xfrm>
-          <a:prstGeom prst="rect">
-            <a:avLst/>
-          </a:prstGeom>
-          <a:noFill/>
-          <a:ln/>
-        </p:spPr>
-        <p:txBody>
-          <a:bodyPr wrap="square" lIns="508" tIns="508" rIns="508" bIns="508" rtlCol="0" anchor="ctr">
-            <a:normAutofit/>
-          </a:bodyPr>
-          <a:lstStyle/>
-          <a:p>
-            <a:pPr marL="0" indent="0" algn="l">
-              <a:buNone/>
-            </a:pPr>
-            <a:r>
-              <a:rPr lang="en-US" sz="1200" b="1" dirty="0">
-                <a:solidFill>
-                  <a:srgbClr val="9CC3D5"/>
-                </a:solidFill>
-                <a:latin typeface="Aptos" pitchFamily="34" charset="0"/>
-                <a:ea typeface="Aptos" pitchFamily="34" charset="-122"/>
-                <a:cs typeface="Aptos" pitchFamily="34" charset="-120"/>
-              </a:rPr>
-              <a:t>PODSUMOWANIE</a:t>
-            </a:r>
-            <a:endParaRPr lang="en-US" sz="1200" dirty="0"/>
-          </a:p>
-        </p:txBody>
-      </p:sp>
-      <p:sp>
-        <p:nvSpPr>
-          <p:cNvPr id="3" name="Text 1"/>
-          <p:cNvSpPr/>
-          <p:nvPr/>
-        </p:nvSpPr>
-        <p:spPr>
-          <a:xfrm>
-            <a:off x="777240" y="1417320"/>
-            <a:ext cx="9784080" cy="594360"/>
-          </a:xfrm>
-          <a:prstGeom prst="rect">
-            <a:avLst/>
-          </a:prstGeom>
-          <a:noFill/>
-          <a:ln/>
-        </p:spPr>
-        <p:txBody>
-          <a:bodyPr wrap="square" lIns="508" tIns="508" rIns="508" bIns="508" rtlCol="0" anchor="ctr">
-            <a:normAutofit/>
-          </a:bodyPr>
-          <a:lstStyle/>
-          <a:p>
-            <a:pPr marL="0" indent="0" algn="l">
-              <a:buNone/>
-            </a:pPr>
-            <a:r>
-              <a:rPr lang="en-US" sz="2900" b="1" dirty="0">
-                <a:solidFill>
-                  <a:srgbClr val="FFFFFF"/>
-                </a:solidFill>
-                <a:latin typeface="Aptos Display" pitchFamily="34" charset="0"/>
-                <a:ea typeface="Aptos Display" pitchFamily="34" charset="-122"/>
-                <a:cs typeface="Aptos Display" pitchFamily="34" charset="-120"/>
-              </a:rPr>
-              <a:t>Semantic search może wyglądać jak zwykły SQL</a:t>
-            </a:r>
-            <a:endParaRPr lang="en-US" sz="2900" dirty="0"/>
-          </a:p>
-        </p:txBody>
-      </p:sp>
-      <p:sp>
-        <p:nvSpPr>
-          <p:cNvPr id="4" name="Shape 2"/>
-          <p:cNvSpPr/>
-          <p:nvPr/>
-        </p:nvSpPr>
-        <p:spPr>
-          <a:xfrm>
-            <a:off x="960120" y="2743200"/>
+              <a:t>HNSW przyspiesza wyszukiwanie ANN</a:t>
+            </a:r>
+            <a:endParaRPr lang="en-US" sz="1700" dirty="0"/>
+          </a:p>
+        </p:txBody>
+      </p:sp>
+      <p:sp>
+        <p:nvSpPr>
+          <p:cNvPr id="10" name="Shape 8"/>
+          <p:cNvSpPr/>
+          <p:nvPr/>
+        </p:nvSpPr>
+        <p:spPr>
+          <a:xfrm>
+            <a:off x="960120" y="4251960"/>
             <a:ext cx="146304" cy="146304"/>
           </a:xfrm>
           <a:prstGeom prst="ellipse">
@@ -9531,13 +9946,13 @@
       </p:sp>
       <p:sp>
         <p:nvSpPr>
-          <p:cNvPr id="5" name="Text 3"/>
-          <p:cNvSpPr/>
-          <p:nvPr/>
-        </p:nvSpPr>
-        <p:spPr>
-          <a:xfrm>
-            <a:off x="1298448" y="2633472"/>
+          <p:cNvPr id="11" name="Text 9"/>
+          <p:cNvSpPr/>
+          <p:nvPr/>
+        </p:nvSpPr>
+        <p:spPr>
+          <a:xfrm>
+            <a:off x="1298448" y="4142232"/>
             <a:ext cx="7132320" cy="292608"/>
           </a:xfrm>
           <a:prstGeom prst="rect">
@@ -9564,7 +9979,7 @@
                 <a:ea typeface="Aptos" pitchFamily="34" charset="-122"/>
                 <a:cs typeface="Aptos" pitchFamily="34" charset="-120"/>
               </a:rPr>
-              <a:t>model generuje embedding</a:t>
+              <a:t>relacyjne filtry zostają w PostgreSQL</a:t>
             </a:r>
             <a:endParaRPr lang="en-US" sz="1700" dirty="0"/>
           </a:p>
@@ -9572,13 +9987,13 @@
       </p:sp>
       <p:sp>
         <p:nvSpPr>
-          <p:cNvPr id="6" name="Shape 4"/>
-          <p:cNvSpPr/>
-          <p:nvPr/>
-        </p:nvSpPr>
-        <p:spPr>
-          <a:xfrm>
-            <a:off x="960120" y="3246120"/>
+          <p:cNvPr id="12" name="Shape 10"/>
+          <p:cNvSpPr/>
+          <p:nvPr/>
+        </p:nvSpPr>
+        <p:spPr>
+          <a:xfrm>
+            <a:off x="960120" y="4754880"/>
             <a:ext cx="146304" cy="146304"/>
           </a:xfrm>
           <a:prstGeom prst="ellipse">
@@ -9604,13 +10019,13 @@
       </p:sp>
       <p:sp>
         <p:nvSpPr>
-          <p:cNvPr id="7" name="Text 5"/>
-          <p:cNvSpPr/>
-          <p:nvPr/>
-        </p:nvSpPr>
-        <p:spPr>
-          <a:xfrm>
-            <a:off x="1298448" y="3136392"/>
+          <p:cNvPr id="13" name="Text 11"/>
+          <p:cNvSpPr/>
+          <p:nvPr/>
+        </p:nvSpPr>
+        <p:spPr>
+          <a:xfrm>
+            <a:off x="1298448" y="4645152"/>
             <a:ext cx="7132320" cy="292608"/>
           </a:xfrm>
           <a:prstGeom prst="rect">
@@ -9637,269 +10052,9 @@
                 <a:ea typeface="Aptos" pitchFamily="34" charset="-122"/>
                 <a:cs typeface="Aptos" pitchFamily="34" charset="-120"/>
               </a:rPr>
-              <a:t>pgvector przechowuje i porównuje wektory</a:t>
+              <a:t>hybrid search łączy słowa i znaczenie</a:t>
             </a:r>
             <a:endParaRPr lang="en-US" sz="1700" dirty="0"/>
-          </a:p>
-        </p:txBody>
-      </p:sp>
-      <p:sp>
-        <p:nvSpPr>
-          <p:cNvPr id="8" name="Shape 6"/>
-          <p:cNvSpPr/>
-          <p:nvPr/>
-        </p:nvSpPr>
-        <p:spPr>
-          <a:xfrm>
-            <a:off x="960120" y="3749040"/>
-            <a:ext cx="146304" cy="146304"/>
-          </a:xfrm>
-          <a:prstGeom prst="ellipse">
-            <a:avLst/>
-          </a:prstGeom>
-          <a:solidFill>
-            <a:srgbClr val="E97132"/>
-          </a:solidFill>
-          <a:ln w="12700">
-            <a:solidFill>
-              <a:srgbClr val="E97132"/>
-            </a:solidFill>
-            <a:prstDash val="solid"/>
-          </a:ln>
-        </p:spPr>
-        <p:txBody>
-          <a:bodyPr/>
-          <a:lstStyle/>
-          <a:p>
-            <a:endParaRPr lang="en-US"/>
-          </a:p>
-        </p:txBody>
-      </p:sp>
-      <p:sp>
-        <p:nvSpPr>
-          <p:cNvPr id="9" name="Text 7"/>
-          <p:cNvSpPr/>
-          <p:nvPr/>
-        </p:nvSpPr>
-        <p:spPr>
-          <a:xfrm>
-            <a:off x="1298448" y="3639312"/>
-            <a:ext cx="7132320" cy="292608"/>
-          </a:xfrm>
-          <a:prstGeom prst="rect">
-            <a:avLst/>
-          </a:prstGeom>
-          <a:noFill/>
-          <a:ln/>
-        </p:spPr>
-        <p:txBody>
-          <a:bodyPr wrap="square" lIns="508" tIns="508" rIns="508" bIns="508" rtlCol="0" anchor="ctr">
-            <a:normAutofit/>
-          </a:bodyPr>
-          <a:lstStyle/>
-          <a:p>
-            <a:pPr marL="0" indent="0" algn="l">
-              <a:buNone/>
-            </a:pPr>
-            <a:r>
-              <a:rPr lang="en-US" sz="1700" b="1" dirty="0">
-                <a:solidFill>
-                  <a:srgbClr val="E8F1F7"/>
-                </a:solidFill>
-                <a:latin typeface="Aptos" pitchFamily="34" charset="0"/>
-                <a:ea typeface="Aptos" pitchFamily="34" charset="-122"/>
-                <a:cs typeface="Aptos" pitchFamily="34" charset="-120"/>
-              </a:rPr>
-              <a:t>HNSW przyspiesza wyszukiwanie ANN</a:t>
-            </a:r>
-            <a:endParaRPr lang="en-US" sz="1700" dirty="0"/>
-          </a:p>
-        </p:txBody>
-      </p:sp>
-      <p:sp>
-        <p:nvSpPr>
-          <p:cNvPr id="10" name="Shape 8"/>
-          <p:cNvSpPr/>
-          <p:nvPr/>
-        </p:nvSpPr>
-        <p:spPr>
-          <a:xfrm>
-            <a:off x="960120" y="4251960"/>
-            <a:ext cx="146304" cy="146304"/>
-          </a:xfrm>
-          <a:prstGeom prst="ellipse">
-            <a:avLst/>
-          </a:prstGeom>
-          <a:solidFill>
-            <a:srgbClr val="0F9ED5"/>
-          </a:solidFill>
-          <a:ln w="12700">
-            <a:solidFill>
-              <a:srgbClr val="0F9ED5"/>
-            </a:solidFill>
-            <a:prstDash val="solid"/>
-          </a:ln>
-        </p:spPr>
-        <p:txBody>
-          <a:bodyPr/>
-          <a:lstStyle/>
-          <a:p>
-            <a:endParaRPr lang="en-US"/>
-          </a:p>
-        </p:txBody>
-      </p:sp>
-      <p:sp>
-        <p:nvSpPr>
-          <p:cNvPr id="11" name="Text 9"/>
-          <p:cNvSpPr/>
-          <p:nvPr/>
-        </p:nvSpPr>
-        <p:spPr>
-          <a:xfrm>
-            <a:off x="1298448" y="4142232"/>
-            <a:ext cx="7132320" cy="292608"/>
-          </a:xfrm>
-          <a:prstGeom prst="rect">
-            <a:avLst/>
-          </a:prstGeom>
-          <a:noFill/>
-          <a:ln/>
-        </p:spPr>
-        <p:txBody>
-          <a:bodyPr wrap="square" lIns="508" tIns="508" rIns="508" bIns="508" rtlCol="0" anchor="ctr">
-            <a:normAutofit/>
-          </a:bodyPr>
-          <a:lstStyle/>
-          <a:p>
-            <a:pPr marL="0" indent="0" algn="l">
-              <a:buNone/>
-            </a:pPr>
-            <a:r>
-              <a:rPr lang="en-US" sz="1700" dirty="0">
-                <a:solidFill>
-                  <a:srgbClr val="E8F1F7"/>
-                </a:solidFill>
-                <a:latin typeface="Aptos" pitchFamily="34" charset="0"/>
-                <a:ea typeface="Aptos" pitchFamily="34" charset="-122"/>
-                <a:cs typeface="Aptos" pitchFamily="34" charset="-120"/>
-              </a:rPr>
-              <a:t>relacyjne filtry zostają w PostgreSQL</a:t>
-            </a:r>
-            <a:endParaRPr lang="en-US" sz="1700" dirty="0"/>
-          </a:p>
-        </p:txBody>
-      </p:sp>
-      <p:sp>
-        <p:nvSpPr>
-          <p:cNvPr id="12" name="Shape 10"/>
-          <p:cNvSpPr/>
-          <p:nvPr/>
-        </p:nvSpPr>
-        <p:spPr>
-          <a:xfrm>
-            <a:off x="960120" y="4754880"/>
-            <a:ext cx="146304" cy="146304"/>
-          </a:xfrm>
-          <a:prstGeom prst="ellipse">
-            <a:avLst/>
-          </a:prstGeom>
-          <a:solidFill>
-            <a:srgbClr val="0F9ED5"/>
-          </a:solidFill>
-          <a:ln w="12700">
-            <a:solidFill>
-              <a:srgbClr val="0F9ED5"/>
-            </a:solidFill>
-            <a:prstDash val="solid"/>
-          </a:ln>
-        </p:spPr>
-        <p:txBody>
-          <a:bodyPr/>
-          <a:lstStyle/>
-          <a:p>
-            <a:endParaRPr lang="en-US"/>
-          </a:p>
-        </p:txBody>
-      </p:sp>
-      <p:sp>
-        <p:nvSpPr>
-          <p:cNvPr id="13" name="Text 11"/>
-          <p:cNvSpPr/>
-          <p:nvPr/>
-        </p:nvSpPr>
-        <p:spPr>
-          <a:xfrm>
-            <a:off x="1298448" y="4645152"/>
-            <a:ext cx="7132320" cy="292608"/>
-          </a:xfrm>
-          <a:prstGeom prst="rect">
-            <a:avLst/>
-          </a:prstGeom>
-          <a:noFill/>
-          <a:ln/>
-        </p:spPr>
-        <p:txBody>
-          <a:bodyPr wrap="square" lIns="508" tIns="508" rIns="508" bIns="508" rtlCol="0" anchor="ctr">
-            <a:normAutofit/>
-          </a:bodyPr>
-          <a:lstStyle/>
-          <a:p>
-            <a:pPr marL="0" indent="0" algn="l">
-              <a:buNone/>
-            </a:pPr>
-            <a:r>
-              <a:rPr lang="en-US" sz="1700" dirty="0">
-                <a:solidFill>
-                  <a:srgbClr val="E8F1F7"/>
-                </a:solidFill>
-                <a:latin typeface="Aptos" pitchFamily="34" charset="0"/>
-                <a:ea typeface="Aptos" pitchFamily="34" charset="-122"/>
-                <a:cs typeface="Aptos" pitchFamily="34" charset="-120"/>
-              </a:rPr>
-              <a:t>hybrid search łączy słowa i znaczenie</a:t>
-            </a:r>
-            <a:endParaRPr lang="en-US" sz="1700" dirty="0"/>
-          </a:p>
-        </p:txBody>
-      </p:sp>
-      <p:sp>
-        <p:nvSpPr>
-          <p:cNvPr id="14" name="Text 12"/>
-          <p:cNvSpPr/>
-          <p:nvPr/>
-        </p:nvSpPr>
-        <p:spPr>
-          <a:xfrm>
-            <a:off x="8138160" y="5349240"/>
-            <a:ext cx="3017520" cy="274320"/>
-          </a:xfrm>
-          <a:prstGeom prst="rect">
-            <a:avLst/>
-          </a:prstGeom>
-          <a:noFill/>
-          <a:ln/>
-        </p:spPr>
-        <p:txBody>
-          <a:bodyPr wrap="square" lIns="508" tIns="508" rIns="508" bIns="508" rtlCol="0" anchor="ctr">
-            <a:normAutofit/>
-          </a:bodyPr>
-          <a:lstStyle/>
-          <a:p>
-            <a:pPr marL="0" indent="0" algn="r">
-              <a:buNone/>
-            </a:pPr>
-            <a:r>
-              <a:rPr lang="en-US" sz="1400" dirty="0">
-                <a:solidFill>
-                  <a:srgbClr val="AFC9D5"/>
-                </a:solidFill>
-                <a:latin typeface="Aptos" pitchFamily="34" charset="0"/>
-                <a:ea typeface="Aptos" pitchFamily="34" charset="-122"/>
-                <a:cs typeface="Aptos" pitchFamily="34" charset="-120"/>
-              </a:rPr>
-              <a:t>Java + PostgreSQL + pgvector</a:t>
-            </a:r>
-            <a:endParaRPr lang="en-US" sz="1400" dirty="0"/>
           </a:p>
         </p:txBody>
       </p:sp>
@@ -10025,7 +10180,7 @@
         <p:spPr>
           <a:xfrm>
             <a:off x="640080" y="1325880"/>
-            <a:ext cx="6675120" cy="548640"/>
+            <a:ext cx="8503920" cy="548640"/>
           </a:xfrm>
           <a:prstGeom prst="rect">
             <a:avLst/>
@@ -10035,7 +10190,7 @@
         </p:spPr>
         <p:txBody>
           <a:bodyPr wrap="square" lIns="508" tIns="508" rIns="508" bIns="508" rtlCol="0" anchor="ctr">
-            <a:normAutofit fontScale="92500" lnSpcReduction="20000"/>
+            <a:normAutofit fontScale="92500"/>
           </a:bodyPr>
           <a:lstStyle/>
           <a:p>
@@ -10140,8 +10295,8 @@
         </p:nvSpPr>
         <p:spPr>
           <a:xfrm>
-            <a:off x="914400" y="2761488"/>
-            <a:ext cx="4389120" cy="640080"/>
+            <a:off x="914399" y="2761488"/>
+            <a:ext cx="4739951" cy="640080"/>
           </a:xfrm>
           <a:prstGeom prst="rect">
             <a:avLst/>
@@ -10457,7 +10612,7 @@
           </a:prstGeom>
           <a:extLst>
             <a:ext uri="{C572A759-6A51-4108-AA02-DFA0A04FC94B}">
-              <ma14:wrappingTextBoxFlag xmlns:ma14="http://schemas.microsoft.com/office/mac/drawingml/2011/main" xmlns="" val="0"/>
+              <ma14:wrappingTextBoxFlag xmlns="" xmlns:ma14="http://schemas.microsoft.com/office/mac/drawingml/2011/main" val="0"/>
             </a:ext>
           </a:extLst>
         </p:spPr>
@@ -11352,7 +11507,51 @@
                 <a:ea typeface="Aptos" pitchFamily="34" charset="-122"/>
                 <a:cs typeface="Aptos" pitchFamily="34" charset="-120"/>
               </a:rPr>
-              <a:t>Używaj razem, gdy liczy się i precyzja, i sens.</a:t>
+              <a:t>Używaj razem, gdy liczy się </a:t>
+            </a:r>
+            <a:r>
+              <a:rPr lang="en-US" sz="2200" b="1" dirty="0" err="1">
+                <a:solidFill>
+                  <a:srgbClr val="E97132"/>
+                </a:solidFill>
+                <a:latin typeface="Aptos" pitchFamily="34" charset="0"/>
+                <a:ea typeface="Aptos" pitchFamily="34" charset="-122"/>
+                <a:cs typeface="Aptos" pitchFamily="34" charset="-120"/>
+              </a:rPr>
+              <a:t>i</a:t>
+            </a:r>
+            <a:r>
+              <a:rPr lang="en-US" sz="2200" b="1" dirty="0">
+                <a:solidFill>
+                  <a:srgbClr val="E97132"/>
+                </a:solidFill>
+                <a:latin typeface="Aptos" pitchFamily="34" charset="0"/>
+                <a:ea typeface="Aptos" pitchFamily="34" charset="-122"/>
+                <a:cs typeface="Aptos" pitchFamily="34" charset="-120"/>
+              </a:rPr>
+              <a:t> </a:t>
+            </a:r>
+            <a:r>
+              <a:rPr lang="en-US" sz="2200" b="1" dirty="0" err="1">
+                <a:solidFill>
+                  <a:srgbClr val="E97132"/>
+                </a:solidFill>
+                <a:latin typeface="Aptos" pitchFamily="34" charset="0"/>
+                <a:ea typeface="Aptos" pitchFamily="34" charset="-122"/>
+                <a:cs typeface="Aptos" pitchFamily="34" charset="-120"/>
+              </a:rPr>
+              <a:t>precyzja</a:t>
+            </a:r>
+            <a:r>
+              <a:rPr lang="en-US" sz="2200" b="1" dirty="0">
+                <a:solidFill>
+                  <a:srgbClr val="E97132"/>
+                </a:solidFill>
+                <a:latin typeface="Aptos" pitchFamily="34" charset="0"/>
+                <a:ea typeface="Aptos" pitchFamily="34" charset="-122"/>
+                <a:cs typeface="Aptos" pitchFamily="34" charset="-120"/>
+              </a:rPr>
+              <a:t> i sens.</a:t>
             </a:r>
             <a:endParaRPr lang="en-US" sz="2200" dirty="0"/>
           </a:p>
@@ -11378,7 +11577,7 @@
           </a:prstGeom>
           <a:extLst>
             <a:ext uri="{C572A759-6A51-4108-AA02-DFA0A04FC94B}">
-              <ma14:wrappingTextBoxFlag xmlns:ma14="http://schemas.microsoft.com/office/mac/drawingml/2011/main" xmlns="" val="0"/>
+              <ma14:wrappingTextBoxFlag xmlns="" xmlns:ma14="http://schemas.microsoft.com/office/mac/drawingml/2011/main" val="0"/>
             </a:ext>
           </a:extLst>
         </p:spPr>
@@ -11527,7 +11726,7 @@
         </p:nvSpPr>
         <p:spPr>
           <a:xfrm>
-            <a:off x="640080" y="1143000"/>
+            <a:off x="640080" y="1218686"/>
             <a:ext cx="8046720" cy="310896"/>
           </a:xfrm>
           <a:prstGeom prst="rect">
@@ -11560,781 +11759,458 @@
           </a:p>
         </p:txBody>
       </p:sp>
-      <p:sp>
-        <p:nvSpPr>
-          <p:cNvPr id="5" name="Shape 3"/>
-          <p:cNvSpPr/>
-          <p:nvPr/>
-        </p:nvSpPr>
-        <p:spPr>
-          <a:xfrm>
-            <a:off x="731520" y="1828800"/>
-            <a:ext cx="2743200" cy="658368"/>
-          </a:xfrm>
-          <a:prstGeom prst="roundRect">
-            <a:avLst>
-              <a:gd name="adj" fmla="val 16667"/>
-            </a:avLst>
-          </a:prstGeom>
-          <a:solidFill>
-            <a:srgbClr val="E8F1F7"/>
-          </a:solidFill>
-          <a:ln w="12700">
+      <p:grpSp>
+        <p:nvGrpSpPr>
+          <p:cNvPr id="30" name="Grupa 29">
+            <a:extLst>
+              <a:ext uri="{FF2B5EF4-FFF2-40B4-BE49-F238E27FC236}">
+                <a16:creationId xmlns:a16="http://schemas.microsoft.com/office/drawing/2014/main" id="{A291708E-5AA6-FAA4-50F2-F341CD1115A1}"/>
+              </a:ext>
+            </a:extLst>
+          </p:cNvPr>
+          <p:cNvGrpSpPr/>
+          <p:nvPr/>
+        </p:nvGrpSpPr>
+        <p:grpSpPr>
+          <a:xfrm>
+            <a:off x="609600" y="1974112"/>
+            <a:ext cx="10972799" cy="1572925"/>
+            <a:chOff x="731520" y="1664208"/>
+            <a:chExt cx="9601200" cy="987552"/>
+          </a:xfrm>
+        </p:grpSpPr>
+        <p:sp>
+          <p:nvSpPr>
+            <p:cNvPr id="5" name="Shape 3"/>
+            <p:cNvSpPr/>
+            <p:nvPr/>
+          </p:nvSpPr>
+          <p:spPr>
+            <a:xfrm>
+              <a:off x="731520" y="1828800"/>
+              <a:ext cx="2880360" cy="658368"/>
+            </a:xfrm>
+            <a:prstGeom prst="roundRect">
+              <a:avLst>
+                <a:gd name="adj" fmla="val 16667"/>
+              </a:avLst>
+            </a:prstGeom>
+            <a:solidFill>
+              <a:srgbClr val="E8F1F7"/>
+            </a:solidFill>
+            <a:ln w="12700">
+              <a:solidFill>
+                <a:srgbClr val="156082"/>
+              </a:solidFill>
+              <a:prstDash val="solid"/>
+            </a:ln>
+          </p:spPr>
+          <p:txBody>
+            <a:bodyPr/>
+            <a:lstStyle/>
+            <a:p>
+              <a:endParaRPr lang="en-US"/>
+            </a:p>
+          </p:txBody>
+        </p:sp>
+        <p:sp>
+          <p:nvSpPr>
+            <p:cNvPr id="6" name="Shape 4"/>
+            <p:cNvSpPr/>
+            <p:nvPr/>
+          </p:nvSpPr>
+          <p:spPr>
+            <a:xfrm>
+              <a:off x="731520" y="1828800"/>
+              <a:ext cx="73152" cy="658368"/>
+            </a:xfrm>
+            <a:prstGeom prst="rect">
+              <a:avLst/>
+            </a:prstGeom>
             <a:solidFill>
               <a:srgbClr val="156082"/>
             </a:solidFill>
-            <a:prstDash val="solid"/>
-          </a:ln>
-        </p:spPr>
-        <p:txBody>
-          <a:bodyPr/>
-          <a:lstStyle/>
-          <a:p>
-            <a:endParaRPr lang="en-US"/>
-          </a:p>
-        </p:txBody>
-      </p:sp>
-      <p:sp>
-        <p:nvSpPr>
-          <p:cNvPr id="6" name="Shape 4"/>
-          <p:cNvSpPr/>
-          <p:nvPr/>
-        </p:nvSpPr>
-        <p:spPr>
-          <a:xfrm>
-            <a:off x="731520" y="1828800"/>
-            <a:ext cx="73152" cy="658368"/>
-          </a:xfrm>
-          <a:prstGeom prst="rect">
-            <a:avLst/>
-          </a:prstGeom>
-          <a:solidFill>
-            <a:srgbClr val="156082"/>
-          </a:solidFill>
-          <a:ln w="12700">
+            <a:ln w="12700">
+              <a:solidFill>
+                <a:srgbClr val="156082"/>
+              </a:solidFill>
+              <a:prstDash val="solid"/>
+            </a:ln>
+          </p:spPr>
+          <p:txBody>
+            <a:bodyPr/>
+            <a:lstStyle/>
+            <a:p>
+              <a:endParaRPr lang="en-US"/>
+            </a:p>
+          </p:txBody>
+        </p:sp>
+        <p:sp>
+          <p:nvSpPr>
+            <p:cNvPr id="7" name="Text 5"/>
+            <p:cNvSpPr/>
+            <p:nvPr/>
+          </p:nvSpPr>
+          <p:spPr>
+            <a:xfrm>
+              <a:off x="896112" y="1874520"/>
+              <a:ext cx="2670048" cy="566928"/>
+            </a:xfrm>
+            <a:prstGeom prst="rect">
+              <a:avLst/>
+            </a:prstGeom>
+            <a:noFill/>
+            <a:ln/>
+          </p:spPr>
+          <p:txBody>
+            <a:bodyPr wrap="square" lIns="508" tIns="508" rIns="508" bIns="508" rtlCol="0" anchor="ctr">
+              <a:normAutofit/>
+            </a:bodyPr>
+            <a:lstStyle/>
+            <a:p>
+              <a:pPr marL="0" indent="0" algn="ctr">
+                <a:buNone/>
+              </a:pPr>
+              <a:r>
+                <a:rPr lang="en-US" sz="1400" b="1" dirty="0">
+                  <a:solidFill>
+                    <a:srgbClr val="0E2841"/>
+                  </a:solidFill>
+                  <a:latin typeface="Aptos" pitchFamily="34" charset="0"/>
+                  <a:ea typeface="Aptos" pitchFamily="34" charset="-122"/>
+                  <a:cs typeface="Aptos" pitchFamily="34" charset="-120"/>
+                </a:rPr>
+                <a:t>„</a:t>
+              </a:r>
+              <a:r>
+                <a:rPr lang="en-US" sz="1400" b="1" dirty="0" err="1">
+                  <a:solidFill>
+                    <a:srgbClr val="0E2841"/>
+                  </a:solidFill>
+                  <a:latin typeface="Aptos" pitchFamily="34" charset="0"/>
+                  <a:ea typeface="Aptos" pitchFamily="34" charset="-122"/>
+                  <a:cs typeface="Aptos" pitchFamily="34" charset="-120"/>
+                </a:rPr>
+                <a:t>HikariCP</a:t>
+              </a:r>
+              <a:r>
+                <a:rPr lang="en-US" sz="1400" b="1" dirty="0">
+                  <a:solidFill>
+                    <a:srgbClr val="0E2841"/>
+                  </a:solidFill>
+                  <a:latin typeface="Aptos" pitchFamily="34" charset="0"/>
+                  <a:ea typeface="Aptos" pitchFamily="34" charset="-122"/>
+                  <a:cs typeface="Aptos" pitchFamily="34" charset="-120"/>
+                </a:rPr>
+                <a:t> </a:t>
+              </a:r>
+              <a:r>
+                <a:rPr lang="pl-PL" sz="1400" b="1" dirty="0">
+                  <a:solidFill>
+                    <a:srgbClr val="0E2841"/>
+                  </a:solidFill>
+                  <a:latin typeface="Aptos" pitchFamily="34" charset="0"/>
+                  <a:ea typeface="Aptos" pitchFamily="34" charset="-122"/>
+                  <a:cs typeface="Aptos" pitchFamily="34" charset="-120"/>
+                </a:rPr>
+                <a:t>i pula połączeń JDBC</a:t>
+              </a:r>
+              <a:r>
+                <a:rPr lang="en-US" sz="1400" b="1" dirty="0">
+                  <a:solidFill>
+                    <a:srgbClr val="0E2841"/>
+                  </a:solidFill>
+                  <a:latin typeface="Aptos" pitchFamily="34" charset="0"/>
+                  <a:ea typeface="Aptos" pitchFamily="34" charset="-122"/>
+                  <a:cs typeface="Aptos" pitchFamily="34" charset="-120"/>
+                </a:rPr>
+                <a:t>”</a:t>
+              </a:r>
+              <a:endParaRPr lang="en-US" sz="1400" dirty="0"/>
+            </a:p>
+          </p:txBody>
+        </p:sp>
+        <p:sp>
+          <p:nvSpPr>
+            <p:cNvPr id="8" name="Shape 6"/>
+            <p:cNvSpPr/>
+            <p:nvPr/>
+          </p:nvSpPr>
+          <p:spPr>
+            <a:xfrm>
+              <a:off x="3840480" y="2148840"/>
+              <a:ext cx="502920" cy="0"/>
+            </a:xfrm>
+            <a:prstGeom prst="line">
+              <a:avLst/>
+            </a:prstGeom>
+            <a:noFill/>
+            <a:ln w="27940">
+              <a:solidFill>
+                <a:srgbClr val="E97132"/>
+              </a:solidFill>
+              <a:prstDash val="solid"/>
+              <a:headEnd type="none"/>
+              <a:tailEnd type="triangle"/>
+            </a:ln>
+          </p:spPr>
+          <p:txBody>
+            <a:bodyPr/>
+            <a:lstStyle/>
+            <a:p>
+              <a:endParaRPr lang="en-US"/>
+            </a:p>
+          </p:txBody>
+        </p:sp>
+        <p:sp>
+          <p:nvSpPr>
+            <p:cNvPr id="9" name="Shape 7"/>
+            <p:cNvSpPr/>
+            <p:nvPr/>
+          </p:nvSpPr>
+          <p:spPr>
+            <a:xfrm>
+              <a:off x="4480560" y="1664208"/>
+              <a:ext cx="1920240" cy="987552"/>
+            </a:xfrm>
+            <a:prstGeom prst="roundRect">
+              <a:avLst>
+                <a:gd name="adj" fmla="val 11111"/>
+              </a:avLst>
+            </a:prstGeom>
             <a:solidFill>
-              <a:srgbClr val="156082"/>
+              <a:srgbClr val="FFF1E8"/>
             </a:solidFill>
-            <a:prstDash val="solid"/>
-          </a:ln>
-        </p:spPr>
-        <p:txBody>
-          <a:bodyPr/>
-          <a:lstStyle/>
-          <a:p>
-            <a:endParaRPr lang="en-US"/>
-          </a:p>
-        </p:txBody>
-      </p:sp>
-      <p:sp>
-        <p:nvSpPr>
-          <p:cNvPr id="7" name="Text 5"/>
-          <p:cNvSpPr/>
-          <p:nvPr/>
-        </p:nvSpPr>
-        <p:spPr>
-          <a:xfrm>
-            <a:off x="896112" y="1874520"/>
-            <a:ext cx="2505456" cy="566928"/>
-          </a:xfrm>
-          <a:prstGeom prst="rect">
-            <a:avLst/>
-          </a:prstGeom>
-          <a:noFill/>
-          <a:ln/>
-        </p:spPr>
-        <p:txBody>
-          <a:bodyPr wrap="square" lIns="508" tIns="508" rIns="508" bIns="508" rtlCol="0" anchor="ctr">
-            <a:normAutofit/>
-          </a:bodyPr>
-          <a:lstStyle/>
-          <a:p>
-            <a:pPr marL="0" indent="0" algn="ctr">
-              <a:buNone/>
-            </a:pPr>
-            <a:r>
-              <a:rPr lang="en-US" sz="1400" b="1" dirty="0">
-                <a:solidFill>
-                  <a:srgbClr val="0E2841"/>
-                </a:solidFill>
-                <a:latin typeface="Aptos" pitchFamily="34" charset="0"/>
-                <a:ea typeface="Aptos" pitchFamily="34" charset="-122"/>
-                <a:cs typeface="Aptos" pitchFamily="34" charset="-120"/>
-              </a:rPr>
-              <a:t>„HikariCP pool exhaustion”</a:t>
-            </a:r>
-            <a:endParaRPr lang="en-US" sz="1400" dirty="0"/>
-          </a:p>
-        </p:txBody>
-      </p:sp>
-      <p:sp>
-        <p:nvSpPr>
-          <p:cNvPr id="8" name="Shape 6"/>
-          <p:cNvSpPr/>
-          <p:nvPr/>
-        </p:nvSpPr>
-        <p:spPr>
-          <a:xfrm>
-            <a:off x="3611880" y="2148840"/>
-            <a:ext cx="731520" cy="0"/>
-          </a:xfrm>
-          <a:prstGeom prst="line">
-            <a:avLst/>
-          </a:prstGeom>
-          <a:noFill/>
-          <a:ln w="27940">
+            <a:ln w="12700">
+              <a:solidFill>
+                <a:srgbClr val="E97132"/>
+              </a:solidFill>
+              <a:prstDash val="solid"/>
+            </a:ln>
+          </p:spPr>
+          <p:txBody>
+            <a:bodyPr/>
+            <a:lstStyle/>
+            <a:p>
+              <a:endParaRPr lang="en-US"/>
+            </a:p>
+          </p:txBody>
+        </p:sp>
+        <p:sp>
+          <p:nvSpPr>
+            <p:cNvPr id="10" name="Shape 8"/>
+            <p:cNvSpPr/>
+            <p:nvPr/>
+          </p:nvSpPr>
+          <p:spPr>
+            <a:xfrm>
+              <a:off x="4480560" y="1664208"/>
+              <a:ext cx="73152" cy="987552"/>
+            </a:xfrm>
+            <a:prstGeom prst="rect">
+              <a:avLst/>
+            </a:prstGeom>
             <a:solidFill>
               <a:srgbClr val="E97132"/>
             </a:solidFill>
-            <a:prstDash val="solid"/>
-            <a:headEnd type="none"/>
-            <a:tailEnd type="triangle"/>
-          </a:ln>
-        </p:spPr>
-        <p:txBody>
-          <a:bodyPr/>
-          <a:lstStyle/>
-          <a:p>
-            <a:endParaRPr lang="en-US"/>
-          </a:p>
-        </p:txBody>
-      </p:sp>
-      <p:sp>
-        <p:nvSpPr>
-          <p:cNvPr id="9" name="Shape 7"/>
-          <p:cNvSpPr/>
-          <p:nvPr/>
-        </p:nvSpPr>
-        <p:spPr>
-          <a:xfrm>
-            <a:off x="4480560" y="1664208"/>
-            <a:ext cx="1920240" cy="987552"/>
-          </a:xfrm>
-          <a:prstGeom prst="roundRect">
-            <a:avLst>
-              <a:gd name="adj" fmla="val 11111"/>
-            </a:avLst>
-          </a:prstGeom>
-          <a:solidFill>
-            <a:srgbClr val="FFF1E8"/>
-          </a:solidFill>
-          <a:ln w="12700">
-            <a:solidFill>
-              <a:srgbClr val="E97132"/>
-            </a:solidFill>
-            <a:prstDash val="solid"/>
-          </a:ln>
-        </p:spPr>
-        <p:txBody>
-          <a:bodyPr/>
-          <a:lstStyle/>
-          <a:p>
-            <a:endParaRPr lang="en-US"/>
-          </a:p>
-        </p:txBody>
-      </p:sp>
-      <p:sp>
-        <p:nvSpPr>
-          <p:cNvPr id="10" name="Shape 8"/>
-          <p:cNvSpPr/>
-          <p:nvPr/>
-        </p:nvSpPr>
-        <p:spPr>
-          <a:xfrm>
-            <a:off x="4480560" y="1664208"/>
-            <a:ext cx="73152" cy="987552"/>
-          </a:xfrm>
-          <a:prstGeom prst="rect">
-            <a:avLst/>
-          </a:prstGeom>
-          <a:solidFill>
-            <a:srgbClr val="E97132"/>
-          </a:solidFill>
-          <a:ln w="12700">
-            <a:solidFill>
-              <a:srgbClr val="E97132"/>
-            </a:solidFill>
-            <a:prstDash val="solid"/>
-          </a:ln>
-        </p:spPr>
-        <p:txBody>
-          <a:bodyPr/>
-          <a:lstStyle/>
-          <a:p>
-            <a:endParaRPr lang="en-US"/>
-          </a:p>
-        </p:txBody>
-      </p:sp>
-      <p:sp>
-        <p:nvSpPr>
-          <p:cNvPr id="11" name="Text 9"/>
-          <p:cNvSpPr/>
-          <p:nvPr/>
-        </p:nvSpPr>
-        <p:spPr>
-          <a:xfrm>
-            <a:off x="4645152" y="1709928"/>
-            <a:ext cx="1682496" cy="896112"/>
-          </a:xfrm>
-          <a:prstGeom prst="rect">
-            <a:avLst/>
-          </a:prstGeom>
-          <a:noFill/>
-          <a:ln/>
-        </p:spPr>
-        <p:txBody>
-          <a:bodyPr wrap="square" lIns="508" tIns="508" rIns="508" bIns="508" rtlCol="0" anchor="ctr">
-            <a:normAutofit/>
-          </a:bodyPr>
-          <a:lstStyle/>
-          <a:p>
-            <a:pPr marL="0" indent="0" algn="ctr">
-              <a:buNone/>
-            </a:pPr>
-            <a:r>
-              <a:rPr lang="en-US" sz="1400" b="1" dirty="0">
-                <a:solidFill>
-                  <a:srgbClr val="0E2841"/>
-                </a:solidFill>
-                <a:latin typeface="Aptos" pitchFamily="34" charset="0"/>
-                <a:ea typeface="Aptos" pitchFamily="34" charset="-122"/>
-                <a:cs typeface="Aptos" pitchFamily="34" charset="-120"/>
-              </a:rPr>
-              <a:t>model</a:t>
-            </a:r>
-            <a:endParaRPr lang="en-US" sz="1400" dirty="0"/>
-          </a:p>
-          <a:p>
-            <a:pPr marL="0" indent="0" algn="ctr">
-              <a:buNone/>
-            </a:pPr>
-            <a:r>
-              <a:rPr lang="en-US" sz="1400" b="1" dirty="0">
-                <a:solidFill>
-                  <a:srgbClr val="0E2841"/>
-                </a:solidFill>
-                <a:latin typeface="Aptos" pitchFamily="34" charset="0"/>
-                <a:ea typeface="Aptos" pitchFamily="34" charset="-122"/>
-                <a:cs typeface="Aptos" pitchFamily="34" charset="-120"/>
-              </a:rPr>
-              <a:t>embeddingowy</a:t>
-            </a:r>
-            <a:endParaRPr lang="en-US" sz="1400" dirty="0"/>
-          </a:p>
-        </p:txBody>
-      </p:sp>
-      <p:sp>
-        <p:nvSpPr>
-          <p:cNvPr id="12" name="Shape 10"/>
-          <p:cNvSpPr/>
-          <p:nvPr/>
-        </p:nvSpPr>
-        <p:spPr>
-          <a:xfrm>
-            <a:off x="6537960" y="2148840"/>
-            <a:ext cx="685800" cy="0"/>
-          </a:xfrm>
-          <a:prstGeom prst="line">
-            <a:avLst/>
-          </a:prstGeom>
-          <a:noFill/>
-          <a:ln w="27940">
-            <a:solidFill>
-              <a:srgbClr val="E97132"/>
-            </a:solidFill>
-            <a:prstDash val="solid"/>
-            <a:headEnd type="none"/>
-            <a:tailEnd type="triangle"/>
-          </a:ln>
-        </p:spPr>
-        <p:txBody>
-          <a:bodyPr/>
-          <a:lstStyle/>
-          <a:p>
-            <a:endParaRPr lang="en-US"/>
-          </a:p>
-        </p:txBody>
-      </p:sp>
-      <p:sp>
-        <p:nvSpPr>
-          <p:cNvPr id="13" name="Shape 11"/>
-          <p:cNvSpPr/>
-          <p:nvPr/>
-        </p:nvSpPr>
-        <p:spPr>
-          <a:xfrm>
-            <a:off x="7360920" y="1664208"/>
-            <a:ext cx="2971800" cy="987552"/>
-          </a:xfrm>
-          <a:prstGeom prst="roundRect">
-            <a:avLst>
-              <a:gd name="adj" fmla="val 7407"/>
-            </a:avLst>
-          </a:prstGeom>
-          <a:solidFill>
-            <a:srgbClr val="0E2841"/>
-          </a:solidFill>
-          <a:ln w="12700">
+            <a:ln w="12700">
+              <a:solidFill>
+                <a:srgbClr val="E97132"/>
+              </a:solidFill>
+              <a:prstDash val="solid"/>
+            </a:ln>
+          </p:spPr>
+          <p:txBody>
+            <a:bodyPr/>
+            <a:lstStyle/>
+            <a:p>
+              <a:endParaRPr lang="en-US"/>
+            </a:p>
+          </p:txBody>
+        </p:sp>
+        <p:sp>
+          <p:nvSpPr>
+            <p:cNvPr id="11" name="Text 9"/>
+            <p:cNvSpPr/>
+            <p:nvPr/>
+          </p:nvSpPr>
+          <p:spPr>
+            <a:xfrm>
+              <a:off x="4645152" y="1709928"/>
+              <a:ext cx="1682496" cy="896112"/>
+            </a:xfrm>
+            <a:prstGeom prst="rect">
+              <a:avLst/>
+            </a:prstGeom>
+            <a:noFill/>
+            <a:ln/>
+          </p:spPr>
+          <p:txBody>
+            <a:bodyPr wrap="square" lIns="508" tIns="508" rIns="508" bIns="508" rtlCol="0" anchor="ctr">
+              <a:normAutofit/>
+            </a:bodyPr>
+            <a:lstStyle/>
+            <a:p>
+              <a:pPr marL="0" indent="0" algn="ctr">
+                <a:buNone/>
+              </a:pPr>
+              <a:r>
+                <a:rPr lang="en-US" sz="1400" b="1" dirty="0">
+                  <a:solidFill>
+                    <a:srgbClr val="0E2841"/>
+                  </a:solidFill>
+                  <a:latin typeface="Aptos" pitchFamily="34" charset="0"/>
+                  <a:ea typeface="Aptos" pitchFamily="34" charset="-122"/>
+                  <a:cs typeface="Aptos" pitchFamily="34" charset="-120"/>
+                </a:rPr>
+                <a:t>model</a:t>
+              </a:r>
+              <a:endParaRPr lang="en-US" sz="1400" dirty="0"/>
+            </a:p>
+            <a:p>
+              <a:pPr marL="0" indent="0" algn="ctr">
+                <a:buNone/>
+              </a:pPr>
+              <a:r>
+                <a:rPr lang="en-US" sz="1400" b="1" dirty="0">
+                  <a:solidFill>
+                    <a:srgbClr val="0E2841"/>
+                  </a:solidFill>
+                  <a:latin typeface="Aptos" pitchFamily="34" charset="0"/>
+                  <a:ea typeface="Aptos" pitchFamily="34" charset="-122"/>
+                  <a:cs typeface="Aptos" pitchFamily="34" charset="-120"/>
+                </a:rPr>
+                <a:t>embeddingowy</a:t>
+              </a:r>
+              <a:endParaRPr lang="en-US" sz="1400" dirty="0"/>
+            </a:p>
+          </p:txBody>
+        </p:sp>
+        <p:sp>
+          <p:nvSpPr>
+            <p:cNvPr id="12" name="Shape 10"/>
+            <p:cNvSpPr/>
+            <p:nvPr/>
+          </p:nvSpPr>
+          <p:spPr>
+            <a:xfrm>
+              <a:off x="6537960" y="2148840"/>
+              <a:ext cx="685800" cy="0"/>
+            </a:xfrm>
+            <a:prstGeom prst="line">
+              <a:avLst/>
+            </a:prstGeom>
+            <a:noFill/>
+            <a:ln w="27940">
+              <a:solidFill>
+                <a:srgbClr val="E97132"/>
+              </a:solidFill>
+              <a:prstDash val="solid"/>
+              <a:headEnd type="none"/>
+              <a:tailEnd type="triangle"/>
+            </a:ln>
+          </p:spPr>
+          <p:txBody>
+            <a:bodyPr/>
+            <a:lstStyle/>
+            <a:p>
+              <a:endParaRPr lang="en-US"/>
+            </a:p>
+          </p:txBody>
+        </p:sp>
+        <p:sp>
+          <p:nvSpPr>
+            <p:cNvPr id="13" name="Shape 11"/>
+            <p:cNvSpPr/>
+            <p:nvPr/>
+          </p:nvSpPr>
+          <p:spPr>
+            <a:xfrm>
+              <a:off x="7360920" y="1664208"/>
+              <a:ext cx="2971800" cy="987552"/>
+            </a:xfrm>
+            <a:prstGeom prst="roundRect">
+              <a:avLst>
+                <a:gd name="adj" fmla="val 7407"/>
+              </a:avLst>
+            </a:prstGeom>
             <a:solidFill>
               <a:srgbClr val="0E2841"/>
             </a:solidFill>
-            <a:prstDash val="solid"/>
-          </a:ln>
-        </p:spPr>
-        <p:txBody>
-          <a:bodyPr/>
-          <a:lstStyle/>
-          <a:p>
-            <a:endParaRPr lang="en-US"/>
-          </a:p>
-        </p:txBody>
-      </p:sp>
-      <p:sp>
-        <p:nvSpPr>
-          <p:cNvPr id="14" name="Text 12"/>
-          <p:cNvSpPr/>
-          <p:nvPr/>
-        </p:nvSpPr>
-        <p:spPr>
-          <a:xfrm>
-            <a:off x="7507224" y="1773936"/>
-            <a:ext cx="2697480" cy="804672"/>
-          </a:xfrm>
-          <a:prstGeom prst="rect">
-            <a:avLst/>
-          </a:prstGeom>
-          <a:noFill/>
-          <a:ln/>
-        </p:spPr>
-        <p:txBody>
-          <a:bodyPr wrap="square" lIns="0" tIns="0" rIns="0" bIns="0" rtlCol="0" anchor="t">
-            <a:normAutofit/>
-          </a:bodyPr>
-          <a:lstStyle/>
-          <a:p>
-            <a:pPr marL="0" indent="0">
-              <a:buNone/>
-            </a:pPr>
-            <a:r>
-              <a:rPr lang="en-US" sz="1300" dirty="0">
-                <a:solidFill>
-                  <a:srgbClr val="F4F7FA"/>
-                </a:solidFill>
-                <a:latin typeface="Consolas" pitchFamily="34" charset="0"/>
-                <a:ea typeface="Consolas" pitchFamily="34" charset="-122"/>
-                <a:cs typeface="Consolas" pitchFamily="34" charset="-120"/>
-              </a:rPr>
-              <a:t>[0.021, -0.143,</a:t>
-            </a:r>
-            <a:endParaRPr lang="en-US" sz="1300" dirty="0"/>
-          </a:p>
-          <a:p>
-            <a:pPr marL="0" indent="0">
-              <a:buNone/>
-            </a:pPr>
-            <a:r>
-              <a:rPr lang="en-US" sz="1300" dirty="0">
-                <a:solidFill>
-                  <a:srgbClr val="F4F7FA"/>
-                </a:solidFill>
-                <a:latin typeface="Consolas" pitchFamily="34" charset="0"/>
-                <a:ea typeface="Consolas" pitchFamily="34" charset="-122"/>
-                <a:cs typeface="Consolas" pitchFamily="34" charset="-120"/>
-              </a:rPr>
-              <a:t> 0.761, …, 0.118]</a:t>
-            </a:r>
-            <a:endParaRPr lang="en-US" sz="1300" dirty="0"/>
-          </a:p>
-        </p:txBody>
-      </p:sp>
-      <p:sp>
-        <p:nvSpPr>
-          <p:cNvPr id="15" name="Text 13"/>
-          <p:cNvSpPr/>
-          <p:nvPr/>
-        </p:nvSpPr>
-        <p:spPr>
-          <a:xfrm>
-            <a:off x="731520" y="3154680"/>
-            <a:ext cx="9692640" cy="347472"/>
-          </a:xfrm>
-          <a:prstGeom prst="rect">
-            <a:avLst/>
-          </a:prstGeom>
-          <a:noFill/>
-          <a:ln/>
-        </p:spPr>
-        <p:txBody>
-          <a:bodyPr wrap="square" lIns="508" tIns="508" rIns="508" bIns="508" rtlCol="0" anchor="ctr">
-            <a:normAutofit/>
-          </a:bodyPr>
-          <a:lstStyle/>
-          <a:p>
-            <a:pPr marL="0" indent="0" algn="l">
-              <a:buNone/>
-            </a:pPr>
-            <a:r>
-              <a:rPr lang="en-US" sz="1700" dirty="0">
-                <a:solidFill>
-                  <a:srgbClr val="22313F"/>
-                </a:solidFill>
-                <a:latin typeface="Aptos" pitchFamily="34" charset="0"/>
-                <a:ea typeface="Aptos" pitchFamily="34" charset="-122"/>
-                <a:cs typeface="Aptos" pitchFamily="34" charset="-120"/>
-              </a:rPr>
-              <a:t>Bliskie znaczenia są blisko siebie w przestrzeni wektorowej.</a:t>
-            </a:r>
-            <a:endParaRPr lang="en-US" sz="1700" dirty="0"/>
-          </a:p>
-        </p:txBody>
-      </p:sp>
-      <p:sp>
-        <p:nvSpPr>
-          <p:cNvPr id="16" name="Shape 14"/>
-          <p:cNvSpPr/>
-          <p:nvPr/>
-        </p:nvSpPr>
-        <p:spPr>
-          <a:xfrm>
-            <a:off x="914400" y="5029200"/>
-            <a:ext cx="9966960" cy="0"/>
-          </a:xfrm>
-          <a:prstGeom prst="line">
-            <a:avLst/>
-          </a:prstGeom>
-          <a:noFill/>
-          <a:ln w="12700">
-            <a:solidFill>
-              <a:srgbClr val="D9E2F3"/>
-            </a:solidFill>
-            <a:prstDash val="solid"/>
-            <a:headEnd type="none"/>
-            <a:tailEnd type="none"/>
-          </a:ln>
-        </p:spPr>
-        <p:txBody>
-          <a:bodyPr/>
-          <a:lstStyle/>
-          <a:p>
-            <a:endParaRPr lang="en-US"/>
-          </a:p>
-        </p:txBody>
-      </p:sp>
-      <p:sp>
-        <p:nvSpPr>
-          <p:cNvPr id="17" name="Shape 15"/>
-          <p:cNvSpPr/>
-          <p:nvPr/>
-        </p:nvSpPr>
-        <p:spPr>
-          <a:xfrm>
-            <a:off x="2011680" y="4160520"/>
-            <a:ext cx="201168" cy="201168"/>
-          </a:xfrm>
-          <a:prstGeom prst="ellipse">
-            <a:avLst/>
-          </a:prstGeom>
-          <a:solidFill>
-            <a:srgbClr val="156082"/>
-          </a:solidFill>
-          <a:ln w="12700">
-            <a:solidFill>
-              <a:srgbClr val="156082"/>
-            </a:solidFill>
-            <a:prstDash val="solid"/>
-          </a:ln>
-        </p:spPr>
-        <p:txBody>
-          <a:bodyPr/>
-          <a:lstStyle/>
-          <a:p>
-            <a:endParaRPr lang="en-US"/>
-          </a:p>
-        </p:txBody>
-      </p:sp>
-      <p:sp>
-        <p:nvSpPr>
-          <p:cNvPr id="18" name="Shape 16"/>
-          <p:cNvSpPr/>
-          <p:nvPr/>
-        </p:nvSpPr>
-        <p:spPr>
-          <a:xfrm>
-            <a:off x="4709160" y="4434840"/>
-            <a:ext cx="201168" cy="201168"/>
-          </a:xfrm>
-          <a:prstGeom prst="ellipse">
-            <a:avLst/>
-          </a:prstGeom>
-          <a:solidFill>
-            <a:srgbClr val="0F9ED5"/>
-          </a:solidFill>
-          <a:ln w="12700">
-            <a:solidFill>
-              <a:srgbClr val="0F9ED5"/>
-            </a:solidFill>
-            <a:prstDash val="solid"/>
-          </a:ln>
-        </p:spPr>
-        <p:txBody>
-          <a:bodyPr/>
-          <a:lstStyle/>
-          <a:p>
-            <a:endParaRPr lang="en-US"/>
-          </a:p>
-        </p:txBody>
-      </p:sp>
-      <p:sp>
-        <p:nvSpPr>
-          <p:cNvPr id="19" name="Shape 17"/>
-          <p:cNvSpPr/>
-          <p:nvPr/>
-        </p:nvSpPr>
-        <p:spPr>
-          <a:xfrm>
-            <a:off x="6883878" y="4450021"/>
-            <a:ext cx="201168" cy="201168"/>
-          </a:xfrm>
-          <a:prstGeom prst="ellipse">
-            <a:avLst/>
-          </a:prstGeom>
-          <a:solidFill>
-            <a:srgbClr val="E97132"/>
-          </a:solidFill>
-          <a:ln w="12700">
-            <a:solidFill>
-              <a:srgbClr val="E97132"/>
-            </a:solidFill>
-            <a:prstDash val="solid"/>
-          </a:ln>
-        </p:spPr>
-        <p:txBody>
-          <a:bodyPr/>
-          <a:lstStyle/>
-          <a:p>
-            <a:endParaRPr lang="en-US"/>
-          </a:p>
-        </p:txBody>
-      </p:sp>
-      <p:sp>
-        <p:nvSpPr>
-          <p:cNvPr id="20" name="Shape 18"/>
-          <p:cNvSpPr/>
-          <p:nvPr/>
-        </p:nvSpPr>
-        <p:spPr>
-          <a:xfrm>
-            <a:off x="9363456" y="4197096"/>
-            <a:ext cx="201168" cy="201168"/>
-          </a:xfrm>
-          <a:prstGeom prst="ellipse">
-            <a:avLst/>
-          </a:prstGeom>
-          <a:solidFill>
-            <a:srgbClr val="196B24"/>
-          </a:solidFill>
-          <a:ln w="12700">
-            <a:solidFill>
-              <a:srgbClr val="196B24"/>
-            </a:solidFill>
-            <a:prstDash val="solid"/>
-          </a:ln>
-        </p:spPr>
-        <p:txBody>
-          <a:bodyPr/>
-          <a:lstStyle/>
-          <a:p>
-            <a:endParaRPr lang="en-US"/>
-          </a:p>
-        </p:txBody>
-      </p:sp>
-      <p:sp>
-        <p:nvSpPr>
-          <p:cNvPr id="21" name="Shape 19"/>
-          <p:cNvSpPr/>
-          <p:nvPr/>
-        </p:nvSpPr>
-        <p:spPr>
-          <a:xfrm>
-            <a:off x="2212848" y="4261104"/>
-            <a:ext cx="2496312" cy="274320"/>
-          </a:xfrm>
-          <a:prstGeom prst="line">
-            <a:avLst/>
-          </a:prstGeom>
-          <a:noFill/>
-          <a:ln w="12700">
-            <a:solidFill>
-              <a:srgbClr val="156082"/>
-            </a:solidFill>
-            <a:prstDash val="solid"/>
-            <a:headEnd type="none"/>
-            <a:tailEnd type="none"/>
-          </a:ln>
-        </p:spPr>
-        <p:txBody>
-          <a:bodyPr/>
-          <a:lstStyle/>
-          <a:p>
-            <a:endParaRPr lang="en-US"/>
-          </a:p>
-        </p:txBody>
-      </p:sp>
-      <p:sp>
-        <p:nvSpPr>
-          <p:cNvPr id="22" name="Shape 20"/>
-          <p:cNvSpPr/>
-          <p:nvPr/>
-        </p:nvSpPr>
-        <p:spPr>
-          <a:xfrm>
-            <a:off x="4910327" y="4535424"/>
-            <a:ext cx="1973551" cy="0"/>
-          </a:xfrm>
-          <a:prstGeom prst="line">
-            <a:avLst/>
-          </a:prstGeom>
-          <a:noFill/>
-          <a:ln w="12700">
-            <a:solidFill>
-              <a:srgbClr val="156082"/>
-            </a:solidFill>
-            <a:prstDash val="solid"/>
-            <a:headEnd type="none"/>
-            <a:tailEnd type="none"/>
-          </a:ln>
-        </p:spPr>
-        <p:txBody>
-          <a:bodyPr/>
-          <a:lstStyle/>
-          <a:p>
-            <a:endParaRPr lang="en-US"/>
-          </a:p>
-        </p:txBody>
-      </p:sp>
-      <p:sp>
-        <p:nvSpPr>
-          <p:cNvPr id="23" name="Text 21"/>
-          <p:cNvSpPr/>
-          <p:nvPr/>
-        </p:nvSpPr>
-        <p:spPr>
-          <a:xfrm>
-            <a:off x="1371600" y="5257800"/>
-            <a:ext cx="1828800" cy="201168"/>
-          </a:xfrm>
-          <a:prstGeom prst="rect">
-            <a:avLst/>
-          </a:prstGeom>
-          <a:noFill/>
-          <a:ln/>
-        </p:spPr>
-        <p:txBody>
-          <a:bodyPr wrap="square" lIns="508" tIns="508" rIns="508" bIns="508" rtlCol="0" anchor="ctr">
-            <a:normAutofit/>
-          </a:bodyPr>
-          <a:lstStyle/>
-          <a:p>
-            <a:pPr marL="0" indent="0" algn="l">
-              <a:buNone/>
-            </a:pPr>
-            <a:r>
-              <a:rPr lang="en-US" sz="1000" dirty="0">
-                <a:solidFill>
-                  <a:srgbClr val="607080"/>
-                </a:solidFill>
-                <a:latin typeface="Aptos" pitchFamily="34" charset="0"/>
-                <a:ea typeface="Aptos" pitchFamily="34" charset="-122"/>
-                <a:cs typeface="Aptos" pitchFamily="34" charset="-120"/>
-              </a:rPr>
-              <a:t>„connection pool”</a:t>
-            </a:r>
-            <a:endParaRPr lang="en-US" sz="1000" dirty="0"/>
-          </a:p>
-        </p:txBody>
-      </p:sp>
-      <p:sp>
-        <p:nvSpPr>
-          <p:cNvPr id="24" name="Text 22"/>
-          <p:cNvSpPr/>
-          <p:nvPr/>
-        </p:nvSpPr>
-        <p:spPr>
-          <a:xfrm>
-            <a:off x="4343400" y="5257800"/>
-            <a:ext cx="1828800" cy="201168"/>
-          </a:xfrm>
-          <a:prstGeom prst="rect">
-            <a:avLst/>
-          </a:prstGeom>
-          <a:noFill/>
-          <a:ln/>
-        </p:spPr>
-        <p:txBody>
-          <a:bodyPr wrap="square" lIns="508" tIns="508" rIns="508" bIns="508" rtlCol="0" anchor="ctr">
-            <a:normAutofit/>
-          </a:bodyPr>
-          <a:lstStyle/>
-          <a:p>
-            <a:pPr marL="0" indent="0" algn="l">
-              <a:buNone/>
-            </a:pPr>
-            <a:r>
-              <a:rPr lang="en-US" sz="1000" dirty="0">
-                <a:solidFill>
-                  <a:srgbClr val="607080"/>
-                </a:solidFill>
-                <a:latin typeface="Aptos" pitchFamily="34" charset="0"/>
-                <a:ea typeface="Aptos" pitchFamily="34" charset="-122"/>
-                <a:cs typeface="Aptos" pitchFamily="34" charset="-120"/>
-              </a:rPr>
-              <a:t>„brak połączeń”</a:t>
-            </a:r>
-            <a:endParaRPr lang="en-US" sz="1000" dirty="0"/>
-          </a:p>
-        </p:txBody>
-      </p:sp>
-      <p:sp>
-        <p:nvSpPr>
-          <p:cNvPr id="25" name="Text 23"/>
-          <p:cNvSpPr/>
-          <p:nvPr/>
-        </p:nvSpPr>
-        <p:spPr>
-          <a:xfrm>
-            <a:off x="8092440" y="5257800"/>
-            <a:ext cx="1371600" cy="201168"/>
-          </a:xfrm>
-          <a:prstGeom prst="rect">
-            <a:avLst/>
-          </a:prstGeom>
-          <a:noFill/>
-          <a:ln/>
-        </p:spPr>
-        <p:txBody>
-          <a:bodyPr wrap="square" lIns="508" tIns="508" rIns="508" bIns="508" rtlCol="0" anchor="ctr">
-            <a:normAutofit/>
-          </a:bodyPr>
-          <a:lstStyle/>
-          <a:p>
-            <a:pPr marL="0" indent="0" algn="l">
-              <a:buNone/>
-            </a:pPr>
-            <a:r>
-              <a:rPr lang="en-US" sz="1000" dirty="0">
-                <a:solidFill>
-                  <a:srgbClr val="607080"/>
-                </a:solidFill>
-                <a:latin typeface="Aptos" pitchFamily="34" charset="0"/>
-                <a:ea typeface="Aptos" pitchFamily="34" charset="-122"/>
-                <a:cs typeface="Aptos" pitchFamily="34" charset="-120"/>
-              </a:rPr>
-              <a:t>„HikariCP”</a:t>
-            </a:r>
-            <a:endParaRPr lang="en-US" sz="1000" dirty="0"/>
-          </a:p>
-        </p:txBody>
-      </p:sp>
+            <a:ln w="12700">
+              <a:solidFill>
+                <a:srgbClr val="0E2841"/>
+              </a:solidFill>
+              <a:prstDash val="solid"/>
+            </a:ln>
+          </p:spPr>
+          <p:txBody>
+            <a:bodyPr/>
+            <a:lstStyle/>
+            <a:p>
+              <a:endParaRPr lang="en-US"/>
+            </a:p>
+          </p:txBody>
+        </p:sp>
+        <p:sp>
+          <p:nvSpPr>
+            <p:cNvPr id="14" name="Text 12"/>
+            <p:cNvSpPr/>
+            <p:nvPr/>
+          </p:nvSpPr>
+          <p:spPr>
+            <a:xfrm>
+              <a:off x="7507224" y="1773936"/>
+              <a:ext cx="2697480" cy="804672"/>
+            </a:xfrm>
+            <a:prstGeom prst="rect">
+              <a:avLst/>
+            </a:prstGeom>
+            <a:noFill/>
+            <a:ln/>
+          </p:spPr>
+          <p:txBody>
+            <a:bodyPr wrap="square" lIns="0" tIns="0" rIns="0" bIns="0" rtlCol="0" anchor="t">
+              <a:normAutofit/>
+            </a:bodyPr>
+            <a:lstStyle/>
+            <a:p>
+              <a:pPr marL="0" indent="0">
+                <a:buNone/>
+              </a:pPr>
+              <a:r>
+                <a:rPr lang="en-US" sz="1300" dirty="0">
+                  <a:solidFill>
+                    <a:srgbClr val="F4F7FA"/>
+                  </a:solidFill>
+                  <a:latin typeface="Consolas" pitchFamily="34" charset="0"/>
+                  <a:ea typeface="Consolas" pitchFamily="34" charset="-122"/>
+                  <a:cs typeface="Consolas" pitchFamily="34" charset="-120"/>
+                </a:rPr>
+                <a:t>[0.021, -0.143,</a:t>
+              </a:r>
+              <a:endParaRPr lang="en-US" sz="1300" dirty="0"/>
+            </a:p>
+            <a:p>
+              <a:pPr marL="0" indent="0">
+                <a:buNone/>
+              </a:pPr>
+              <a:r>
+                <a:rPr lang="en-US" sz="1300" dirty="0">
+                  <a:solidFill>
+                    <a:srgbClr val="F4F7FA"/>
+                  </a:solidFill>
+                  <a:latin typeface="Consolas" pitchFamily="34" charset="0"/>
+                  <a:ea typeface="Consolas" pitchFamily="34" charset="-122"/>
+                  <a:cs typeface="Consolas" pitchFamily="34" charset="-120"/>
+                </a:rPr>
+                <a:t> 0.761, …, 0.118]</a:t>
+              </a:r>
+              <a:endParaRPr lang="en-US" sz="1300" dirty="0"/>
+            </a:p>
+          </p:txBody>
+        </p:sp>
+      </p:grpSp>
       <p:sp>
         <p:nvSpPr>
           <p:cNvPr id="26" name="Slide Number Placeholder 0"/>
@@ -12355,7 +12231,7 @@
           </a:prstGeom>
           <a:extLst>
             <a:ext uri="{C572A759-6A51-4108-AA02-DFA0A04FC94B}">
-              <ma14:wrappingTextBoxFlag xmlns:ma14="http://schemas.microsoft.com/office/mac/drawingml/2011/main" xmlns="" val="0"/>
+              <ma14:wrappingTextBoxFlag xmlns="" xmlns:ma14="http://schemas.microsoft.com/office/mac/drawingml/2011/main" val="0"/>
             </a:ext>
           </a:extLst>
         </p:spPr>
@@ -12385,10 +12261,10 @@
       </p:sp>
       <p:sp>
         <p:nvSpPr>
-          <p:cNvPr id="28" name="Shape 20">
+          <p:cNvPr id="32" name="Dymek mowy: prostokąt z zaokrąglonymi rogami 31">
             <a:extLst>
               <a:ext uri="{FF2B5EF4-FFF2-40B4-BE49-F238E27FC236}">
-                <a16:creationId xmlns:a16="http://schemas.microsoft.com/office/drawing/2014/main" id="{6E231396-9647-2F02-5181-81CCB19450E1}"/>
+                <a16:creationId xmlns:a16="http://schemas.microsoft.com/office/drawing/2014/main" id="{FC3721EA-207D-405A-49D4-8920D96AFDE3}"/>
               </a:ext>
             </a:extLst>
           </p:cNvPr>
@@ -12396,28 +12272,249 @@
           <p:nvPr/>
         </p:nvSpPr>
         <p:spPr>
-          <a:xfrm flipV="1">
-            <a:off x="7105664" y="4337937"/>
-            <a:ext cx="2257792" cy="201168"/>
-          </a:xfrm>
-          <a:prstGeom prst="line">
-            <a:avLst/>
-          </a:prstGeom>
-          <a:noFill/>
-          <a:ln w="12700">
-            <a:solidFill>
-              <a:srgbClr val="156082"/>
-            </a:solidFill>
-            <a:prstDash val="solid"/>
-            <a:headEnd type="none"/>
-            <a:tailEnd type="none"/>
-          </a:ln>
-        </p:spPr>
-        <p:txBody>
-          <a:bodyPr/>
-          <a:lstStyle/>
-          <a:p>
-            <a:endParaRPr lang="en-US"/>
+          <a:xfrm>
+            <a:off x="1184988" y="4447903"/>
+            <a:ext cx="9283959" cy="2090057"/>
+          </a:xfrm>
+          <a:prstGeom prst="wedgeRoundRectCallout">
+            <a:avLst>
+              <a:gd name="adj1" fmla="val -1938"/>
+              <a:gd name="adj2" fmla="val -74107"/>
+              <a:gd name="adj3" fmla="val 16667"/>
+            </a:avLst>
+          </a:prstGeom>
+        </p:spPr>
+        <p:style>
+          <a:lnRef idx="2">
+            <a:schemeClr val="dk1"/>
+          </a:lnRef>
+          <a:fillRef idx="1">
+            <a:schemeClr val="lt1"/>
+          </a:fillRef>
+          <a:effectRef idx="0">
+            <a:schemeClr val="dk1"/>
+          </a:effectRef>
+          <a:fontRef idx="minor">
+            <a:schemeClr val="dk1"/>
+          </a:fontRef>
+        </p:style>
+        <p:txBody>
+          <a:bodyPr rtlCol="0" anchor="ctr"/>
+          <a:lstStyle/>
+          <a:p>
+            <a:endParaRPr lang="pl-PL" sz="1600" b="1" dirty="0"/>
+          </a:p>
+          <a:p>
+            <a:r>
+              <a:rPr lang="en-US" sz="1600" b="1" dirty="0"/>
+              <a:t>Embedding</a:t>
+            </a:r>
+            <a:r>
+              <a:rPr lang="en-US" sz="1600" dirty="0"/>
+              <a:t> to </a:t>
+            </a:r>
+            <a:r>
+              <a:rPr lang="en-US" sz="1600" dirty="0" err="1"/>
+              <a:t>numeryczna</a:t>
+            </a:r>
+            <a:r>
+              <a:rPr lang="en-US" sz="1600" dirty="0"/>
+              <a:t> </a:t>
+            </a:r>
+            <a:r>
+              <a:rPr lang="en-US" sz="1600" dirty="0" err="1"/>
+              <a:t>reprezentacja</a:t>
+            </a:r>
+            <a:r>
+              <a:rPr lang="en-US" sz="1600" dirty="0"/>
+              <a:t> </a:t>
+            </a:r>
+            <a:r>
+              <a:rPr lang="en-US" sz="1600" dirty="0" err="1"/>
+              <a:t>znaczenia</a:t>
+            </a:r>
+            <a:r>
+              <a:rPr lang="en-US" sz="1600" dirty="0"/>
+              <a:t> </a:t>
+            </a:r>
+            <a:r>
+              <a:rPr lang="en-US" sz="1600" dirty="0" err="1"/>
+              <a:t>danych</a:t>
+            </a:r>
+            <a:r>
+              <a:rPr lang="en-US" sz="1600" dirty="0"/>
+              <a:t> — np. </a:t>
+            </a:r>
+            <a:r>
+              <a:rPr lang="en-US" sz="1600" dirty="0" err="1"/>
+              <a:t>tekstu</a:t>
+            </a:r>
+            <a:r>
+              <a:rPr lang="en-US" sz="1600" dirty="0"/>
+              <a:t>, </a:t>
+            </a:r>
+            <a:r>
+              <a:rPr lang="en-US" sz="1600" dirty="0" err="1"/>
+              <a:t>obrazu</a:t>
+            </a:r>
+            <a:r>
+              <a:rPr lang="en-US" sz="1600" dirty="0"/>
+              <a:t> </a:t>
+            </a:r>
+            <a:r>
+              <a:rPr lang="en-US" sz="1600" dirty="0" err="1"/>
+              <a:t>albo</a:t>
+            </a:r>
+            <a:r>
+              <a:rPr lang="en-US" sz="1600" dirty="0"/>
+              <a:t> </a:t>
+            </a:r>
+            <a:r>
+              <a:rPr lang="en-US" sz="1600" dirty="0" err="1"/>
+              <a:t>dźwięku</a:t>
+            </a:r>
+            <a:r>
+              <a:rPr lang="en-US" sz="1600" dirty="0"/>
+              <a:t> —</a:t>
+            </a:r>
+            <a:endParaRPr lang="pl-PL" sz="1600" dirty="0"/>
+          </a:p>
+          <a:p>
+            <a:r>
+              <a:rPr lang="en-US" sz="1600" dirty="0"/>
+              <a:t>w </a:t>
+            </a:r>
+            <a:r>
+              <a:rPr lang="en-US" sz="1600" dirty="0" err="1"/>
+              <a:t>postaci</a:t>
+            </a:r>
+            <a:r>
+              <a:rPr lang="en-US" sz="1600" dirty="0"/>
+              <a:t> </a:t>
+            </a:r>
+            <a:r>
+              <a:rPr lang="en-US" sz="1600" b="1" dirty="0" err="1"/>
+              <a:t>wektora</a:t>
+            </a:r>
+            <a:r>
+              <a:rPr lang="en-US" sz="1600" b="1" dirty="0"/>
+              <a:t> </a:t>
+            </a:r>
+            <a:r>
+              <a:rPr lang="en-US" sz="1600" b="1" dirty="0" err="1"/>
+              <a:t>liczb</a:t>
+            </a:r>
+            <a:r>
+              <a:rPr lang="en-US" sz="1600" dirty="0"/>
+              <a:t>.</a:t>
+            </a:r>
+          </a:p>
+          <a:p>
+            <a:endParaRPr lang="pl-PL" sz="1600" dirty="0"/>
+          </a:p>
+          <a:p>
+            <a:r>
+              <a:rPr lang="en-US" sz="1600" dirty="0" err="1"/>
+              <a:t>Przykładowo</a:t>
+            </a:r>
+            <a:r>
+              <a:rPr lang="en-US" sz="1600" dirty="0"/>
+              <a:t> model </a:t>
+            </a:r>
+            <a:r>
+              <a:rPr lang="en-US" sz="1600" dirty="0" err="1"/>
+              <a:t>embeddingowy</a:t>
+            </a:r>
+            <a:r>
+              <a:rPr lang="en-US" sz="1600" dirty="0"/>
+              <a:t> </a:t>
+            </a:r>
+            <a:r>
+              <a:rPr lang="en-US" sz="1600" dirty="0" err="1"/>
+              <a:t>może</a:t>
+            </a:r>
+            <a:r>
+              <a:rPr lang="en-US" sz="1600" dirty="0"/>
+              <a:t> </a:t>
+            </a:r>
+            <a:r>
+              <a:rPr lang="en-US" sz="1600" dirty="0" err="1"/>
+              <a:t>zamienić</a:t>
+            </a:r>
+            <a:r>
+              <a:rPr lang="en-US" sz="1600" dirty="0"/>
+              <a:t> </a:t>
+            </a:r>
+            <a:r>
+              <a:rPr lang="en-US" sz="1600" dirty="0" err="1"/>
+              <a:t>słowa</a:t>
+            </a:r>
+            <a:r>
+              <a:rPr lang="en-US" sz="1600" dirty="0"/>
+              <a:t> </a:t>
+            </a:r>
+            <a:r>
+              <a:rPr lang="en-US" sz="1600" dirty="0" err="1"/>
+              <a:t>na</a:t>
+            </a:r>
+            <a:r>
+              <a:rPr lang="en-US" sz="1600" dirty="0"/>
+              <a:t> </a:t>
+            </a:r>
+            <a:r>
+              <a:rPr lang="en-US" sz="1600" dirty="0" err="1"/>
+              <a:t>coś</a:t>
+            </a:r>
+            <a:r>
+              <a:rPr lang="en-US" sz="1600" dirty="0"/>
+              <a:t> </a:t>
+            </a:r>
+            <a:r>
+              <a:rPr lang="en-US" sz="1600" dirty="0" err="1"/>
+              <a:t>takiego</a:t>
+            </a:r>
+            <a:r>
+              <a:rPr lang="en-US" sz="1600" dirty="0"/>
+              <a:t>:</a:t>
+            </a:r>
+          </a:p>
+          <a:p>
+            <a:r>
+              <a:rPr lang="en-US" sz="1600" dirty="0"/>
+              <a:t>"pies"       → [0.12, 0.84, -0.31, ...]</a:t>
+            </a:r>
+          </a:p>
+          <a:p>
+            <a:r>
+              <a:rPr lang="en-US" sz="1600" dirty="0"/>
+              <a:t>"</a:t>
+            </a:r>
+            <a:r>
+              <a:rPr lang="en-US" sz="1600" dirty="0" err="1"/>
+              <a:t>szczeniak</a:t>
+            </a:r>
+            <a:r>
+              <a:rPr lang="en-US" sz="1600" dirty="0"/>
+              <a:t>"  → [0.15, 0.79, -0.28, ...]</a:t>
+            </a:r>
+          </a:p>
+          <a:p>
+            <a:r>
+              <a:rPr lang="en-US" sz="1600" dirty="0"/>
+              <a:t>"</a:t>
+            </a:r>
+            <a:r>
+              <a:rPr lang="en-US" sz="1600" dirty="0" err="1"/>
+              <a:t>samochód</a:t>
+            </a:r>
+            <a:r>
+              <a:rPr lang="en-US" sz="1600" dirty="0"/>
+              <a:t>"   → [-0.72, 0.11, 0.63, ...]</a:t>
+            </a:r>
+          </a:p>
+          <a:p>
+            <a:pPr algn="ctr"/>
+            <a:endParaRPr lang="en-US" sz="1600" dirty="0"/>
           </a:p>
         </p:txBody>
       </p:sp>
@@ -12430,6 +12527,805 @@
 </file>
 
 <file path=ppt/slides/slide5.xml><?xml version="1.0" encoding="utf-8"?>
+<p:sld xmlns:a="http://schemas.openxmlformats.org/drawingml/2006/main" xmlns:r="http://schemas.openxmlformats.org/officeDocument/2006/relationships" xmlns:p="http://schemas.openxmlformats.org/presentationml/2006/main">
+  <p:cSld>
+    <p:bg>
+      <p:bgPr>
+        <a:solidFill>
+          <a:schemeClr val="bg1"/>
+        </a:solidFill>
+        <a:effectLst/>
+      </p:bgPr>
+    </p:bg>
+    <p:spTree>
+      <p:nvGrpSpPr>
+        <p:cNvPr id="1" name="">
+          <a:extLst>
+            <a:ext uri="{FF2B5EF4-FFF2-40B4-BE49-F238E27FC236}">
+              <a16:creationId xmlns:a16="http://schemas.microsoft.com/office/drawing/2014/main" id="{C7CA9E29-BBF4-4820-9308-F8B85A4CB654}"/>
+            </a:ext>
+          </a:extLst>
+        </p:cNvPr>
+        <p:cNvGrpSpPr/>
+        <p:nvPr/>
+      </p:nvGrpSpPr>
+      <p:grpSpPr>
+        <a:xfrm>
+          <a:off x="0" y="0"/>
+          <a:ext cx="0" cy="0"/>
+          <a:chOff x="0" y="0"/>
+          <a:chExt cx="0" cy="0"/>
+        </a:xfrm>
+      </p:grpSpPr>
+      <p:sp useBgFill="1">
+        <p:nvSpPr>
+          <p:cNvPr id="31" name="Rectangle 21">
+            <a:extLst>
+              <a:ext uri="{FF2B5EF4-FFF2-40B4-BE49-F238E27FC236}">
+                <a16:creationId xmlns:a16="http://schemas.microsoft.com/office/drawing/2014/main" id="{A8384FB5-9ADC-4DDC-881B-597D56F5B15D}"/>
+              </a:ext>
+              <a:ext uri="{C183D7F6-B498-43B3-948B-1728B52AA6E4}">
+                <adec:decorative xmlns:adec="http://schemas.microsoft.com/office/drawing/2017/decorative" val="1"/>
+              </a:ext>
+            </a:extLst>
+          </p:cNvPr>
+          <p:cNvSpPr>
+            <a:spLocks noGrp="1" noRot="1" noChangeAspect="1" noMove="1" noResize="1" noEditPoints="1" noAdjustHandles="1" noChangeArrowheads="1" noChangeShapeType="1" noTextEdit="1"/>
+          </p:cNvSpPr>
+          <p:nvPr>
+            <p:extLst>
+              <p:ext uri="{386F3935-93C4-4BCD-93E2-E3B085C9AB24}">
+                <p16:designElem xmlns:p16="http://schemas.microsoft.com/office/powerpoint/2015/main" val="1"/>
+              </p:ext>
+            </p:extLst>
+          </p:nvPr>
+        </p:nvSpPr>
+        <p:spPr>
+          <a:xfrm>
+            <a:off x="0" y="0"/>
+            <a:ext cx="12192000" cy="6858000"/>
+          </a:xfrm>
+          <a:prstGeom prst="rect">
+            <a:avLst/>
+          </a:prstGeom>
+          <a:ln w="12700" cap="flat" cmpd="sng" algn="ctr">
+            <a:noFill/>
+            <a:prstDash val="solid"/>
+            <a:miter lim="800000"/>
+          </a:ln>
+          <a:effectLst/>
+          <a:extLst>
+            <a:ext uri="{91240B29-F687-4F45-9708-019B960494DF}">
+              <a14:hiddenLine xmlns:a14="http://schemas.microsoft.com/office/drawing/2010/main" w="12700" cap="flat" cmpd="sng" algn="ctr">
+                <a:solidFill>
+                  <a:schemeClr val="accent1">
+                    <a:shade val="50000"/>
+                  </a:schemeClr>
+                </a:solidFill>
+                <a:prstDash val="solid"/>
+                <a:miter lim="800000"/>
+              </a14:hiddenLine>
+            </a:ext>
+          </a:extLst>
+        </p:spPr>
+        <p:style>
+          <a:lnRef idx="2">
+            <a:schemeClr val="accent1">
+              <a:shade val="50000"/>
+            </a:schemeClr>
+          </a:lnRef>
+          <a:fillRef idx="1">
+            <a:schemeClr val="accent1"/>
+          </a:fillRef>
+          <a:effectRef idx="0">
+            <a:schemeClr val="accent1"/>
+          </a:effectRef>
+          <a:fontRef idx="minor">
+            <a:schemeClr val="lt1"/>
+          </a:fontRef>
+        </p:style>
+        <p:txBody>
+          <a:bodyPr rtlCol="0" anchor="ctr"/>
+          <a:lstStyle/>
+          <a:p>
+            <a:pPr algn="ctr"/>
+            <a:endParaRPr lang="en-US"/>
+          </a:p>
+        </p:txBody>
+      </p:sp>
+      <p:sp>
+        <p:nvSpPr>
+          <p:cNvPr id="32" name="Rectangle 23">
+            <a:extLst>
+              <a:ext uri="{FF2B5EF4-FFF2-40B4-BE49-F238E27FC236}">
+                <a16:creationId xmlns:a16="http://schemas.microsoft.com/office/drawing/2014/main" id="{91E5A9A7-95C6-4F4F-B00E-C82E07FE62EF}"/>
+              </a:ext>
+              <a:ext uri="{C183D7F6-B498-43B3-948B-1728B52AA6E4}">
+                <adec:decorative xmlns:adec="http://schemas.microsoft.com/office/drawing/2017/decorative" val="1"/>
+              </a:ext>
+            </a:extLst>
+          </p:cNvPr>
+          <p:cNvSpPr>
+            <a:spLocks noGrp="1" noRot="1" noChangeAspect="1" noMove="1" noResize="1" noEditPoints="1" noAdjustHandles="1" noChangeArrowheads="1" noChangeShapeType="1" noTextEdit="1"/>
+          </p:cNvSpPr>
+          <p:nvPr>
+            <p:extLst>
+              <p:ext uri="{386F3935-93C4-4BCD-93E2-E3B085C9AB24}">
+                <p16:designElem xmlns:p16="http://schemas.microsoft.com/office/powerpoint/2015/main" val="1"/>
+              </p:ext>
+            </p:extLst>
+          </p:nvPr>
+        </p:nvSpPr>
+        <p:spPr>
+          <a:xfrm rot="5400000" flipH="1">
+            <a:off x="-1417539" y="1417538"/>
+            <a:ext cx="6875818" cy="4040744"/>
+          </a:xfrm>
+          <a:prstGeom prst="rect">
+            <a:avLst/>
+          </a:prstGeom>
+          <a:gradFill>
+            <a:gsLst>
+              <a:gs pos="0">
+                <a:srgbClr val="000000"/>
+              </a:gs>
+              <a:gs pos="100000">
+                <a:schemeClr val="accent1">
+                  <a:lumMod val="75000"/>
+                </a:schemeClr>
+              </a:gs>
+            </a:gsLst>
+            <a:lin ang="18600000" scaled="0"/>
+          </a:gradFill>
+          <a:ln>
+            <a:noFill/>
+          </a:ln>
+        </p:spPr>
+        <p:style>
+          <a:lnRef idx="2">
+            <a:schemeClr val="accent1">
+              <a:shade val="50000"/>
+            </a:schemeClr>
+          </a:lnRef>
+          <a:fillRef idx="1">
+            <a:schemeClr val="accent1"/>
+          </a:fillRef>
+          <a:effectRef idx="0">
+            <a:schemeClr val="accent1"/>
+          </a:effectRef>
+          <a:fontRef idx="minor">
+            <a:schemeClr val="lt1"/>
+          </a:fontRef>
+        </p:style>
+        <p:txBody>
+          <a:bodyPr rtlCol="0" anchor="ctr"/>
+          <a:lstStyle/>
+          <a:p>
+            <a:pPr algn="ctr"/>
+            <a:endParaRPr lang="en-US" dirty="0"/>
+          </a:p>
+        </p:txBody>
+      </p:sp>
+      <p:sp>
+        <p:nvSpPr>
+          <p:cNvPr id="33" name="Rectangle 25">
+            <a:extLst>
+              <a:ext uri="{FF2B5EF4-FFF2-40B4-BE49-F238E27FC236}">
+                <a16:creationId xmlns:a16="http://schemas.microsoft.com/office/drawing/2014/main" id="{D07DD2DE-F619-49DD-B5E7-03A290FF4ED1}"/>
+              </a:ext>
+              <a:ext uri="{C183D7F6-B498-43B3-948B-1728B52AA6E4}">
+                <adec:decorative xmlns:adec="http://schemas.microsoft.com/office/drawing/2017/decorative" val="1"/>
+              </a:ext>
+            </a:extLst>
+          </p:cNvPr>
+          <p:cNvSpPr>
+            <a:spLocks noGrp="1" noRot="1" noChangeAspect="1" noMove="1" noResize="1" noEditPoints="1" noAdjustHandles="1" noChangeArrowheads="1" noChangeShapeType="1" noTextEdit="1"/>
+          </p:cNvSpPr>
+          <p:nvPr>
+            <p:extLst>
+              <p:ext uri="{386F3935-93C4-4BCD-93E2-E3B085C9AB24}">
+                <p16:designElem xmlns:p16="http://schemas.microsoft.com/office/powerpoint/2015/main" val="1"/>
+              </p:ext>
+            </p:extLst>
+          </p:nvPr>
+        </p:nvSpPr>
+        <p:spPr>
+          <a:xfrm rot="16200000">
+            <a:off x="-158495" y="2660473"/>
+            <a:ext cx="4355594" cy="4038603"/>
+          </a:xfrm>
+          <a:prstGeom prst="rect">
+            <a:avLst/>
+          </a:prstGeom>
+          <a:gradFill>
+            <a:gsLst>
+              <a:gs pos="0">
+                <a:schemeClr val="accent1">
+                  <a:alpha val="50000"/>
+                </a:schemeClr>
+              </a:gs>
+              <a:gs pos="100000">
+                <a:schemeClr val="accent1">
+                  <a:lumMod val="50000"/>
+                  <a:alpha val="0"/>
+                </a:schemeClr>
+              </a:gs>
+            </a:gsLst>
+            <a:lin ang="11400000" scaled="0"/>
+          </a:gradFill>
+          <a:ln>
+            <a:noFill/>
+          </a:ln>
+        </p:spPr>
+        <p:style>
+          <a:lnRef idx="2">
+            <a:schemeClr val="accent1">
+              <a:shade val="50000"/>
+            </a:schemeClr>
+          </a:lnRef>
+          <a:fillRef idx="1">
+            <a:schemeClr val="accent1"/>
+          </a:fillRef>
+          <a:effectRef idx="0">
+            <a:schemeClr val="accent1"/>
+          </a:effectRef>
+          <a:fontRef idx="minor">
+            <a:schemeClr val="lt1"/>
+          </a:fontRef>
+        </p:style>
+        <p:txBody>
+          <a:bodyPr rtlCol="0" anchor="ctr"/>
+          <a:lstStyle/>
+          <a:p>
+            <a:pPr algn="ctr"/>
+            <a:endParaRPr lang="en-US"/>
+          </a:p>
+        </p:txBody>
+      </p:sp>
+      <p:sp>
+        <p:nvSpPr>
+          <p:cNvPr id="34" name="Rectangle 27">
+            <a:extLst>
+              <a:ext uri="{FF2B5EF4-FFF2-40B4-BE49-F238E27FC236}">
+                <a16:creationId xmlns:a16="http://schemas.microsoft.com/office/drawing/2014/main" id="{85149191-5F60-4A28-AAFF-039F96B0F3EC}"/>
+              </a:ext>
+              <a:ext uri="{C183D7F6-B498-43B3-948B-1728B52AA6E4}">
+                <adec:decorative xmlns:adec="http://schemas.microsoft.com/office/drawing/2017/decorative" val="1"/>
+              </a:ext>
+            </a:extLst>
+          </p:cNvPr>
+          <p:cNvSpPr>
+            <a:spLocks noGrp="1" noRot="1" noChangeAspect="1" noMove="1" noResize="1" noEditPoints="1" noAdjustHandles="1" noChangeArrowheads="1" noChangeShapeType="1" noTextEdit="1"/>
+          </p:cNvSpPr>
+          <p:nvPr>
+            <p:extLst>
+              <p:ext uri="{386F3935-93C4-4BCD-93E2-E3B085C9AB24}">
+                <p16:designElem xmlns:p16="http://schemas.microsoft.com/office/powerpoint/2015/main" val="1"/>
+              </p:ext>
+            </p:extLst>
+          </p:nvPr>
+        </p:nvSpPr>
+        <p:spPr>
+          <a:xfrm rot="16200000" flipH="1">
+            <a:off x="-1180882" y="1638085"/>
+            <a:ext cx="6857572" cy="3581401"/>
+          </a:xfrm>
+          <a:prstGeom prst="rect">
+            <a:avLst/>
+          </a:prstGeom>
+          <a:gradFill>
+            <a:gsLst>
+              <a:gs pos="0">
+                <a:srgbClr val="000000">
+                  <a:alpha val="59000"/>
+                </a:srgbClr>
+              </a:gs>
+              <a:gs pos="69000">
+                <a:schemeClr val="accent1">
+                  <a:alpha val="0"/>
+                </a:schemeClr>
+              </a:gs>
+            </a:gsLst>
+            <a:lin ang="13200000" scaled="0"/>
+          </a:gradFill>
+          <a:ln>
+            <a:noFill/>
+          </a:ln>
+        </p:spPr>
+        <p:style>
+          <a:lnRef idx="2">
+            <a:schemeClr val="accent1">
+              <a:shade val="50000"/>
+            </a:schemeClr>
+          </a:lnRef>
+          <a:fillRef idx="1">
+            <a:schemeClr val="accent1"/>
+          </a:fillRef>
+          <a:effectRef idx="0">
+            <a:schemeClr val="accent1"/>
+          </a:effectRef>
+          <a:fontRef idx="minor">
+            <a:schemeClr val="lt1"/>
+          </a:fontRef>
+        </p:style>
+        <p:txBody>
+          <a:bodyPr rtlCol="0" anchor="ctr"/>
+          <a:lstStyle/>
+          <a:p>
+            <a:pPr algn="ctr"/>
+            <a:endParaRPr lang="en-US" dirty="0"/>
+          </a:p>
+        </p:txBody>
+      </p:sp>
+      <p:sp>
+        <p:nvSpPr>
+          <p:cNvPr id="30" name="Freeform: Shape 29">
+            <a:extLst>
+              <a:ext uri="{FF2B5EF4-FFF2-40B4-BE49-F238E27FC236}">
+                <a16:creationId xmlns:a16="http://schemas.microsoft.com/office/drawing/2014/main" id="{F8260ED5-17F7-4158-B241-D51DD4CF1B7E}"/>
+              </a:ext>
+              <a:ext uri="{C183D7F6-B498-43B3-948B-1728B52AA6E4}">
+                <adec:decorative xmlns:adec="http://schemas.microsoft.com/office/drawing/2017/decorative" val="1"/>
+              </a:ext>
+            </a:extLst>
+          </p:cNvPr>
+          <p:cNvSpPr>
+            <a:spLocks noGrp="1" noRot="1" noChangeAspect="1" noMove="1" noResize="1" noEditPoints="1" noAdjustHandles="1" noChangeArrowheads="1" noChangeShapeType="1" noTextEdit="1"/>
+          </p:cNvSpPr>
+          <p:nvPr>
+            <p:extLst>
+              <p:ext uri="{386F3935-93C4-4BCD-93E2-E3B085C9AB24}">
+                <p16:designElem xmlns:p16="http://schemas.microsoft.com/office/powerpoint/2015/main" val="1"/>
+              </p:ext>
+            </p:extLst>
+          </p:nvPr>
+        </p:nvSpPr>
+        <p:spPr>
+          <a:xfrm rot="6097846">
+            <a:off x="-747355" y="1201312"/>
+            <a:ext cx="4808302" cy="4088666"/>
+          </a:xfrm>
+          <a:custGeom>
+            <a:avLst/>
+            <a:gdLst>
+              <a:gd name="connsiteX0" fmla="*/ 48844 w 4808302"/>
+              <a:gd name="connsiteY0" fmla="*/ 2888671 h 4088666"/>
+              <a:gd name="connsiteX1" fmla="*/ 0 w 4808302"/>
+              <a:gd name="connsiteY1" fmla="*/ 2404151 h 4088666"/>
+              <a:gd name="connsiteX2" fmla="*/ 2404151 w 4808302"/>
+              <a:gd name="connsiteY2" fmla="*/ 0 h 4088666"/>
+              <a:gd name="connsiteX3" fmla="*/ 4808302 w 4808302"/>
+              <a:gd name="connsiteY3" fmla="*/ 2404151 h 4088666"/>
+              <a:gd name="connsiteX4" fmla="*/ 4700216 w 4808302"/>
+              <a:gd name="connsiteY4" fmla="*/ 3119072 h 4088666"/>
+              <a:gd name="connsiteX5" fmla="*/ 4643143 w 4808302"/>
+              <a:gd name="connsiteY5" fmla="*/ 3275009 h 4088666"/>
+              <a:gd name="connsiteX6" fmla="*/ 690093 w 4808302"/>
+              <a:gd name="connsiteY6" fmla="*/ 4088666 h 4088666"/>
+              <a:gd name="connsiteX7" fmla="*/ 548991 w 4808302"/>
+              <a:gd name="connsiteY7" fmla="*/ 3933414 h 4088666"/>
+              <a:gd name="connsiteX8" fmla="*/ 48844 w 4808302"/>
+              <a:gd name="connsiteY8" fmla="*/ 2888671 h 4088666"/>
+            </a:gdLst>
+            <a:ahLst/>
+            <a:cxnLst>
+              <a:cxn ang="0">
+                <a:pos x="connsiteX0" y="connsiteY0"/>
+              </a:cxn>
+              <a:cxn ang="0">
+                <a:pos x="connsiteX1" y="connsiteY1"/>
+              </a:cxn>
+              <a:cxn ang="0">
+                <a:pos x="connsiteX2" y="connsiteY2"/>
+              </a:cxn>
+              <a:cxn ang="0">
+                <a:pos x="connsiteX3" y="connsiteY3"/>
+              </a:cxn>
+              <a:cxn ang="0">
+                <a:pos x="connsiteX4" y="connsiteY4"/>
+              </a:cxn>
+              <a:cxn ang="0">
+                <a:pos x="connsiteX5" y="connsiteY5"/>
+              </a:cxn>
+              <a:cxn ang="0">
+                <a:pos x="connsiteX6" y="connsiteY6"/>
+              </a:cxn>
+              <a:cxn ang="0">
+                <a:pos x="connsiteX7" y="connsiteY7"/>
+              </a:cxn>
+              <a:cxn ang="0">
+                <a:pos x="connsiteX8" y="connsiteY8"/>
+              </a:cxn>
+            </a:cxnLst>
+            <a:rect l="l" t="t" r="r" b="b"/>
+            <a:pathLst>
+              <a:path w="4808302" h="4088666">
+                <a:moveTo>
+                  <a:pt x="48844" y="2888671"/>
+                </a:moveTo>
+                <a:cubicBezTo>
+                  <a:pt x="16818" y="2732167"/>
+                  <a:pt x="0" y="2570123"/>
+                  <a:pt x="0" y="2404151"/>
+                </a:cubicBezTo>
+                <a:cubicBezTo>
+                  <a:pt x="0" y="1076375"/>
+                  <a:pt x="1076375" y="0"/>
+                  <a:pt x="2404151" y="0"/>
+                </a:cubicBezTo>
+                <a:cubicBezTo>
+                  <a:pt x="3731927" y="0"/>
+                  <a:pt x="4808302" y="1076375"/>
+                  <a:pt x="4808302" y="2404151"/>
+                </a:cubicBezTo>
+                <a:cubicBezTo>
+                  <a:pt x="4808302" y="2653109"/>
+                  <a:pt x="4770461" y="2893229"/>
+                  <a:pt x="4700216" y="3119072"/>
+                </a:cubicBezTo>
+                <a:lnTo>
+                  <a:pt x="4643143" y="3275009"/>
+                </a:lnTo>
+                <a:lnTo>
+                  <a:pt x="690093" y="4088666"/>
+                </a:lnTo>
+                <a:lnTo>
+                  <a:pt x="548991" y="3933414"/>
+                </a:lnTo>
+                <a:cubicBezTo>
+                  <a:pt x="304015" y="3636572"/>
+                  <a:pt x="128908" y="3279932"/>
+                  <a:pt x="48844" y="2888671"/>
+                </a:cubicBezTo>
+                <a:close/>
+              </a:path>
+            </a:pathLst>
+          </a:custGeom>
+          <a:gradFill>
+            <a:gsLst>
+              <a:gs pos="39000">
+                <a:schemeClr val="accent1">
+                  <a:lumMod val="60000"/>
+                  <a:lumOff val="40000"/>
+                  <a:alpha val="0"/>
+                </a:schemeClr>
+              </a:gs>
+              <a:gs pos="100000">
+                <a:schemeClr val="accent1">
+                  <a:lumMod val="75000"/>
+                  <a:alpha val="26000"/>
+                </a:schemeClr>
+              </a:gs>
+            </a:gsLst>
+            <a:lin ang="18600000" scaled="0"/>
+          </a:gradFill>
+          <a:ln>
+            <a:noFill/>
+          </a:ln>
+        </p:spPr>
+        <p:style>
+          <a:lnRef idx="2">
+            <a:schemeClr val="accent1">
+              <a:shade val="50000"/>
+            </a:schemeClr>
+          </a:lnRef>
+          <a:fillRef idx="1">
+            <a:schemeClr val="accent1"/>
+          </a:fillRef>
+          <a:effectRef idx="0">
+            <a:schemeClr val="accent1"/>
+          </a:effectRef>
+          <a:fontRef idx="minor">
+            <a:schemeClr val="lt1"/>
+          </a:fontRef>
+        </p:style>
+        <p:txBody>
+          <a:bodyPr wrap="square" rtlCol="0" anchor="ctr">
+            <a:noAutofit/>
+          </a:bodyPr>
+          <a:lstStyle/>
+          <a:p>
+            <a:pPr algn="ctr"/>
+            <a:endParaRPr lang="en-US" dirty="0"/>
+          </a:p>
+        </p:txBody>
+      </p:sp>
+      <p:sp>
+        <p:nvSpPr>
+          <p:cNvPr id="3" name="Text 1">
+            <a:extLst>
+              <a:ext uri="{FF2B5EF4-FFF2-40B4-BE49-F238E27FC236}">
+                <a16:creationId xmlns:a16="http://schemas.microsoft.com/office/drawing/2014/main" id="{654A4020-BE20-89B6-7D3D-A1B18E77B412}"/>
+              </a:ext>
+            </a:extLst>
+          </p:cNvPr>
+          <p:cNvSpPr/>
+          <p:nvPr/>
+        </p:nvSpPr>
+        <p:spPr>
+          <a:xfrm>
+            <a:off x="366744" y="2196596"/>
+            <a:ext cx="2880828" cy="966723"/>
+          </a:xfrm>
+          <a:prstGeom prst="rect">
+            <a:avLst/>
+          </a:prstGeom>
+        </p:spPr>
+        <p:txBody>
+          <a:bodyPr vert="horz" lIns="91440" tIns="45720" rIns="91440" bIns="45720" rtlCol="0" anchor="t">
+            <a:normAutofit/>
+          </a:bodyPr>
+          <a:lstStyle/>
+          <a:p>
+            <a:pPr marL="0" indent="0">
+              <a:lnSpc>
+                <a:spcPct val="90000"/>
+              </a:lnSpc>
+              <a:spcBef>
+                <a:spcPct val="0"/>
+              </a:spcBef>
+              <a:spcAft>
+                <a:spcPts val="600"/>
+              </a:spcAft>
+            </a:pPr>
+            <a:r>
+              <a:rPr lang="en-US" sz="4000" b="1" kern="1200" dirty="0" err="1">
+                <a:solidFill>
+                  <a:srgbClr val="FFFFFF"/>
+                </a:solidFill>
+                <a:latin typeface="+mj-lt"/>
+                <a:ea typeface="+mj-ea"/>
+                <a:cs typeface="+mj-cs"/>
+              </a:rPr>
+              <a:t>Embeddingi</a:t>
+            </a:r>
+            <a:endParaRPr lang="en-US" sz="4000" kern="1200" dirty="0">
+              <a:solidFill>
+                <a:srgbClr val="FFFFFF"/>
+              </a:solidFill>
+              <a:latin typeface="+mj-lt"/>
+              <a:ea typeface="+mj-ea"/>
+              <a:cs typeface="+mj-cs"/>
+            </a:endParaRPr>
+          </a:p>
+        </p:txBody>
+      </p:sp>
+      <p:sp>
+        <p:nvSpPr>
+          <p:cNvPr id="15" name="Text 13">
+            <a:extLst>
+              <a:ext uri="{FF2B5EF4-FFF2-40B4-BE49-F238E27FC236}">
+                <a16:creationId xmlns:a16="http://schemas.microsoft.com/office/drawing/2014/main" id="{D163AB1F-AA39-1E5D-9672-862CEFF284DE}"/>
+              </a:ext>
+            </a:extLst>
+          </p:cNvPr>
+          <p:cNvSpPr/>
+          <p:nvPr/>
+        </p:nvSpPr>
+        <p:spPr>
+          <a:xfrm>
+            <a:off x="366744" y="3042019"/>
+            <a:ext cx="3253534" cy="1044790"/>
+          </a:xfrm>
+          <a:prstGeom prst="rect">
+            <a:avLst/>
+          </a:prstGeom>
+        </p:spPr>
+        <p:txBody>
+          <a:bodyPr vert="horz" lIns="91440" tIns="45720" rIns="91440" bIns="45720" rtlCol="0" anchor="b">
+            <a:normAutofit/>
+          </a:bodyPr>
+          <a:lstStyle/>
+          <a:p>
+            <a:pPr>
+              <a:lnSpc>
+                <a:spcPct val="90000"/>
+              </a:lnSpc>
+              <a:spcBef>
+                <a:spcPts val="1000"/>
+              </a:spcBef>
+            </a:pPr>
+            <a:r>
+              <a:rPr lang="en-US" sz="2000" kern="1200" dirty="0" err="1">
+                <a:solidFill>
+                  <a:srgbClr val="FFFFFF"/>
+                </a:solidFill>
+                <a:latin typeface="+mn-lt"/>
+                <a:ea typeface="+mn-ea"/>
+                <a:cs typeface="+mn-cs"/>
+              </a:rPr>
+              <a:t>Bliskie</a:t>
+            </a:r>
+            <a:r>
+              <a:rPr lang="en-US" sz="2000" kern="1200" dirty="0">
+                <a:solidFill>
+                  <a:srgbClr val="FFFFFF"/>
+                </a:solidFill>
+                <a:latin typeface="+mn-lt"/>
+                <a:ea typeface="+mn-ea"/>
+                <a:cs typeface="+mn-cs"/>
+              </a:rPr>
+              <a:t> </a:t>
+            </a:r>
+            <a:r>
+              <a:rPr lang="en-US" sz="2000" kern="1200" dirty="0" err="1">
+                <a:solidFill>
+                  <a:srgbClr val="FFFFFF"/>
+                </a:solidFill>
+                <a:latin typeface="+mn-lt"/>
+                <a:ea typeface="+mn-ea"/>
+                <a:cs typeface="+mn-cs"/>
+              </a:rPr>
+              <a:t>znaczenia</a:t>
+            </a:r>
+            <a:r>
+              <a:rPr lang="en-US" sz="2000" kern="1200" dirty="0">
+                <a:solidFill>
+                  <a:srgbClr val="FFFFFF"/>
+                </a:solidFill>
+                <a:latin typeface="+mn-lt"/>
+                <a:ea typeface="+mn-ea"/>
+                <a:cs typeface="+mn-cs"/>
+              </a:rPr>
+              <a:t> </a:t>
+            </a:r>
+            <a:r>
+              <a:rPr lang="en-US" sz="2000" kern="1200" dirty="0" err="1">
+                <a:solidFill>
+                  <a:srgbClr val="FFFFFF"/>
+                </a:solidFill>
+                <a:latin typeface="+mn-lt"/>
+                <a:ea typeface="+mn-ea"/>
+                <a:cs typeface="+mn-cs"/>
+              </a:rPr>
+              <a:t>są</a:t>
+            </a:r>
+            <a:r>
+              <a:rPr lang="en-US" sz="2000" kern="1200" dirty="0">
+                <a:solidFill>
+                  <a:srgbClr val="FFFFFF"/>
+                </a:solidFill>
+                <a:latin typeface="+mn-lt"/>
+                <a:ea typeface="+mn-ea"/>
+                <a:cs typeface="+mn-cs"/>
+              </a:rPr>
+              <a:t> </a:t>
+            </a:r>
+            <a:r>
+              <a:rPr lang="en-US" sz="2000" kern="1200" dirty="0" err="1">
+                <a:solidFill>
+                  <a:srgbClr val="FFFFFF"/>
+                </a:solidFill>
+                <a:latin typeface="+mn-lt"/>
+                <a:ea typeface="+mn-ea"/>
+                <a:cs typeface="+mn-cs"/>
+              </a:rPr>
+              <a:t>blisko</a:t>
+            </a:r>
+            <a:r>
+              <a:rPr lang="en-US" sz="2000" kern="1200" dirty="0">
+                <a:solidFill>
+                  <a:srgbClr val="FFFFFF"/>
+                </a:solidFill>
+                <a:latin typeface="+mn-lt"/>
+                <a:ea typeface="+mn-ea"/>
+                <a:cs typeface="+mn-cs"/>
+              </a:rPr>
+              <a:t> </a:t>
+            </a:r>
+            <a:r>
+              <a:rPr lang="en-US" sz="2000" kern="1200" dirty="0" err="1">
+                <a:solidFill>
+                  <a:srgbClr val="FFFFFF"/>
+                </a:solidFill>
+                <a:latin typeface="+mn-lt"/>
+                <a:ea typeface="+mn-ea"/>
+                <a:cs typeface="+mn-cs"/>
+              </a:rPr>
+              <a:t>siebie</a:t>
+            </a:r>
+            <a:r>
+              <a:rPr lang="en-US" sz="2000" kern="1200" dirty="0">
+                <a:solidFill>
+                  <a:srgbClr val="FFFFFF"/>
+                </a:solidFill>
+                <a:latin typeface="+mn-lt"/>
+                <a:ea typeface="+mn-ea"/>
+                <a:cs typeface="+mn-cs"/>
+              </a:rPr>
+              <a:t> w </a:t>
+            </a:r>
+            <a:r>
+              <a:rPr lang="en-US" sz="2000" kern="1200" dirty="0" err="1">
+                <a:solidFill>
+                  <a:srgbClr val="FFFFFF"/>
+                </a:solidFill>
+                <a:latin typeface="+mn-lt"/>
+                <a:ea typeface="+mn-ea"/>
+                <a:cs typeface="+mn-cs"/>
+              </a:rPr>
+              <a:t>przestrzeni</a:t>
+            </a:r>
+            <a:r>
+              <a:rPr lang="en-US" sz="2000" kern="1200" dirty="0">
+                <a:solidFill>
+                  <a:srgbClr val="FFFFFF"/>
+                </a:solidFill>
+                <a:latin typeface="+mn-lt"/>
+                <a:ea typeface="+mn-ea"/>
+                <a:cs typeface="+mn-cs"/>
+              </a:rPr>
+              <a:t> </a:t>
+            </a:r>
+            <a:r>
+              <a:rPr lang="en-US" sz="2000" kern="1200" dirty="0" err="1">
+                <a:solidFill>
+                  <a:srgbClr val="FFFFFF"/>
+                </a:solidFill>
+                <a:latin typeface="+mn-lt"/>
+                <a:ea typeface="+mn-ea"/>
+                <a:cs typeface="+mn-cs"/>
+              </a:rPr>
+              <a:t>wektorowej</a:t>
+            </a:r>
+            <a:r>
+              <a:rPr lang="en-US" sz="2000" kern="1200" dirty="0">
+                <a:solidFill>
+                  <a:srgbClr val="FFFFFF"/>
+                </a:solidFill>
+                <a:latin typeface="+mn-lt"/>
+                <a:ea typeface="+mn-ea"/>
+                <a:cs typeface="+mn-cs"/>
+              </a:rPr>
+              <a:t>.</a:t>
+            </a:r>
+          </a:p>
+        </p:txBody>
+      </p:sp>
+      <p:pic>
+        <p:nvPicPr>
+          <p:cNvPr id="17" name="Obraz 16">
+            <a:extLst>
+              <a:ext uri="{FF2B5EF4-FFF2-40B4-BE49-F238E27FC236}">
+                <a16:creationId xmlns:a16="http://schemas.microsoft.com/office/drawing/2014/main" id="{AEF750C7-1512-D4C1-5AA4-4937BFC1BB9E}"/>
+              </a:ext>
+            </a:extLst>
+          </p:cNvPr>
+          <p:cNvPicPr>
+            <a:picLocks noChangeAspect="1"/>
+          </p:cNvPicPr>
+          <p:nvPr/>
+        </p:nvPicPr>
+        <p:blipFill>
+          <a:blip r:embed="rId3"/>
+          <a:stretch>
+            <a:fillRect/>
+          </a:stretch>
+        </p:blipFill>
+        <p:spPr>
+          <a:xfrm>
+            <a:off x="4502428" y="1017407"/>
+            <a:ext cx="7225748" cy="4823186"/>
+          </a:xfrm>
+          <a:prstGeom prst="rect">
+            <a:avLst/>
+          </a:prstGeom>
+        </p:spPr>
+      </p:pic>
+    </p:spTree>
+    <p:extLst>
+      <p:ext uri="{BB962C8B-B14F-4D97-AF65-F5344CB8AC3E}">
+        <p14:creationId xmlns:p14="http://schemas.microsoft.com/office/powerpoint/2010/main" val="3565461546"/>
+      </p:ext>
+    </p:extLst>
+  </p:cSld>
+  <p:clrMapOvr>
+    <a:masterClrMapping/>
+  </p:clrMapOvr>
+</p:sld>
+</file>
+
+<file path=ppt/slides/slide6.xml><?xml version="1.0" encoding="utf-8"?>
 <p:sld xmlns:a="http://schemas.openxmlformats.org/drawingml/2006/main" xmlns:r="http://schemas.openxmlformats.org/officeDocument/2006/relationships" xmlns:p="http://schemas.openxmlformats.org/presentationml/2006/main">
   <p:cSld name="Slide 5">
     <p:bg>
@@ -13167,299 +14063,320 @@
           </a:p>
         </p:txBody>
       </p:sp>
-      <p:sp>
-        <p:nvSpPr>
-          <p:cNvPr id="20" name="Text 18"/>
-          <p:cNvSpPr/>
-          <p:nvPr/>
-        </p:nvSpPr>
-        <p:spPr>
-          <a:xfrm>
-            <a:off x="640080" y="3886200"/>
-            <a:ext cx="6400800" cy="310896"/>
-          </a:xfrm>
-          <a:prstGeom prst="rect">
-            <a:avLst/>
-          </a:prstGeom>
-          <a:noFill/>
-          <a:ln/>
-        </p:spPr>
-        <p:txBody>
-          <a:bodyPr wrap="square" lIns="508" tIns="508" rIns="508" bIns="508" rtlCol="0" anchor="ctr">
-            <a:normAutofit/>
-          </a:bodyPr>
-          <a:lstStyle/>
-          <a:p>
-            <a:pPr marL="0" indent="0" algn="l">
-              <a:buNone/>
-            </a:pPr>
-            <a:r>
-              <a:rPr lang="en-US" sz="1800" b="1" dirty="0">
-                <a:solidFill>
-                  <a:srgbClr val="E97132"/>
-                </a:solidFill>
-                <a:latin typeface="Aptos" pitchFamily="34" charset="0"/>
-                <a:ea typeface="Aptos" pitchFamily="34" charset="-122"/>
-                <a:cs typeface="Aptos" pitchFamily="34" charset="-120"/>
-              </a:rPr>
-              <a:t>Java spina te elementy w jeden przepływ aplikacyjny.</a:t>
-            </a:r>
-            <a:endParaRPr lang="en-US" sz="1800" dirty="0"/>
-          </a:p>
-        </p:txBody>
-      </p:sp>
-      <p:sp>
-        <p:nvSpPr>
-          <p:cNvPr id="21" name="Shape 19"/>
-          <p:cNvSpPr/>
-          <p:nvPr/>
-        </p:nvSpPr>
-        <p:spPr>
-          <a:xfrm>
-            <a:off x="731520" y="4480560"/>
-            <a:ext cx="5212080" cy="1143000"/>
-          </a:xfrm>
-          <a:prstGeom prst="roundRect">
-            <a:avLst>
-              <a:gd name="adj" fmla="val 6400"/>
-            </a:avLst>
-          </a:prstGeom>
-          <a:solidFill>
-            <a:srgbClr val="0E2841"/>
-          </a:solidFill>
-          <a:ln w="12700">
+      <p:grpSp>
+        <p:nvGrpSpPr>
+          <p:cNvPr id="29" name="Grupa 28">
+            <a:extLst>
+              <a:ext uri="{FF2B5EF4-FFF2-40B4-BE49-F238E27FC236}">
+                <a16:creationId xmlns:a16="http://schemas.microsoft.com/office/drawing/2014/main" id="{BE2BC960-1D84-1243-5B26-0DFE4EBE120B}"/>
+              </a:ext>
+            </a:extLst>
+          </p:cNvPr>
+          <p:cNvGrpSpPr/>
+          <p:nvPr/>
+        </p:nvGrpSpPr>
+        <p:grpSpPr>
+          <a:xfrm>
+            <a:off x="640080" y="4480560"/>
+            <a:ext cx="10332720" cy="1737360"/>
+            <a:chOff x="640080" y="3886200"/>
+            <a:chExt cx="10332720" cy="1737360"/>
+          </a:xfrm>
+        </p:grpSpPr>
+        <p:sp>
+          <p:nvSpPr>
+            <p:cNvPr id="20" name="Text 18"/>
+            <p:cNvSpPr/>
+            <p:nvPr/>
+          </p:nvSpPr>
+          <p:spPr>
+            <a:xfrm>
+              <a:off x="640080" y="3886200"/>
+              <a:ext cx="6400800" cy="310896"/>
+            </a:xfrm>
+            <a:prstGeom prst="rect">
+              <a:avLst/>
+            </a:prstGeom>
+            <a:noFill/>
+            <a:ln/>
+          </p:spPr>
+          <p:txBody>
+            <a:bodyPr wrap="square" lIns="508" tIns="508" rIns="508" bIns="508" rtlCol="0" anchor="ctr">
+              <a:normAutofit/>
+            </a:bodyPr>
+            <a:lstStyle/>
+            <a:p>
+              <a:pPr marL="0" indent="0" algn="l">
+                <a:buNone/>
+              </a:pPr>
+              <a:r>
+                <a:rPr lang="en-US" sz="1800" b="1" dirty="0">
+                  <a:solidFill>
+                    <a:srgbClr val="E97132"/>
+                  </a:solidFill>
+                  <a:latin typeface="Aptos" pitchFamily="34" charset="0"/>
+                  <a:ea typeface="Aptos" pitchFamily="34" charset="-122"/>
+                  <a:cs typeface="Aptos" pitchFamily="34" charset="-120"/>
+                </a:rPr>
+                <a:t>Java spina te elementy w jeden przepływ aplikacyjny.</a:t>
+              </a:r>
+              <a:endParaRPr lang="en-US" sz="1800" dirty="0"/>
+            </a:p>
+          </p:txBody>
+        </p:sp>
+        <p:sp>
+          <p:nvSpPr>
+            <p:cNvPr id="21" name="Shape 19"/>
+            <p:cNvSpPr/>
+            <p:nvPr/>
+          </p:nvSpPr>
+          <p:spPr>
+            <a:xfrm>
+              <a:off x="731520" y="4480560"/>
+              <a:ext cx="5212080" cy="1143000"/>
+            </a:xfrm>
+            <a:prstGeom prst="roundRect">
+              <a:avLst>
+                <a:gd name="adj" fmla="val 6400"/>
+              </a:avLst>
+            </a:prstGeom>
             <a:solidFill>
               <a:srgbClr val="0E2841"/>
             </a:solidFill>
-            <a:prstDash val="solid"/>
-          </a:ln>
-        </p:spPr>
-        <p:txBody>
-          <a:bodyPr/>
-          <a:lstStyle/>
-          <a:p>
-            <a:endParaRPr lang="en-US"/>
-          </a:p>
-        </p:txBody>
-      </p:sp>
-      <p:sp>
-        <p:nvSpPr>
-          <p:cNvPr id="22" name="Text 20"/>
-          <p:cNvSpPr/>
-          <p:nvPr/>
-        </p:nvSpPr>
-        <p:spPr>
-          <a:xfrm>
-            <a:off x="877824" y="4590288"/>
-            <a:ext cx="4937760" cy="960120"/>
-          </a:xfrm>
-          <a:prstGeom prst="rect">
-            <a:avLst/>
-          </a:prstGeom>
-          <a:noFill/>
-          <a:ln/>
-        </p:spPr>
-        <p:txBody>
-          <a:bodyPr wrap="square" lIns="0" tIns="0" rIns="0" bIns="0" rtlCol="0" anchor="t">
-            <a:normAutofit/>
-          </a:bodyPr>
-          <a:lstStyle/>
-          <a:p>
-            <a:pPr marL="0" indent="0">
-              <a:buNone/>
-            </a:pPr>
-            <a:r>
-              <a:rPr lang="en-US" sz="1300" dirty="0">
-                <a:solidFill>
-                  <a:srgbClr val="F4F7FA"/>
-                </a:solidFill>
-                <a:latin typeface="Consolas" pitchFamily="34" charset="0"/>
-                <a:ea typeface="Consolas" pitchFamily="34" charset="-122"/>
-                <a:cs typeface="Consolas" pitchFamily="34" charset="-120"/>
-              </a:rPr>
-              <a:t>GET /search?q=problem+z+pulą</a:t>
-            </a:r>
-            <a:endParaRPr lang="en-US" sz="1300" dirty="0"/>
-          </a:p>
-          <a:p>
-            <a:pPr marL="0" indent="0">
-              <a:buNone/>
-            </a:pPr>
-            <a:r>
-              <a:rPr lang="en-US" sz="1300" dirty="0">
-                <a:solidFill>
-                  <a:srgbClr val="F4F7FA"/>
-                </a:solidFill>
-                <a:latin typeface="Consolas" pitchFamily="34" charset="0"/>
-                <a:ea typeface="Consolas" pitchFamily="34" charset="-122"/>
-                <a:cs typeface="Consolas" pitchFamily="34" charset="-120"/>
-              </a:rPr>
-              <a:t>        ↓</a:t>
-            </a:r>
-            <a:endParaRPr lang="en-US" sz="1300" dirty="0"/>
-          </a:p>
-          <a:p>
-            <a:pPr marL="0" indent="0">
-              <a:buNone/>
-            </a:pPr>
-            <a:r>
-              <a:rPr lang="en-US" sz="1300" dirty="0">
-                <a:solidFill>
-                  <a:srgbClr val="F4F7FA"/>
-                </a:solidFill>
-                <a:latin typeface="Consolas" pitchFamily="34" charset="0"/>
-                <a:ea typeface="Consolas" pitchFamily="34" charset="-122"/>
-                <a:cs typeface="Consolas" pitchFamily="34" charset="-120"/>
-              </a:rPr>
-              <a:t>EmbeddingService → SQL → top K</a:t>
-            </a:r>
-            <a:endParaRPr lang="en-US" sz="1300" dirty="0"/>
-          </a:p>
-        </p:txBody>
-      </p:sp>
-      <p:sp>
-        <p:nvSpPr>
-          <p:cNvPr id="23" name="Shape 21"/>
-          <p:cNvSpPr/>
-          <p:nvPr/>
-        </p:nvSpPr>
-        <p:spPr>
-          <a:xfrm>
-            <a:off x="6400800" y="4480560"/>
-            <a:ext cx="4572000" cy="1143000"/>
-          </a:xfrm>
-          <a:prstGeom prst="roundRect">
-            <a:avLst>
-              <a:gd name="adj" fmla="val 6400"/>
-            </a:avLst>
-          </a:prstGeom>
-          <a:solidFill>
-            <a:srgbClr val="0E2841"/>
-          </a:solidFill>
-          <a:ln w="12700">
+            <a:ln w="12700">
+              <a:solidFill>
+                <a:srgbClr val="0E2841"/>
+              </a:solidFill>
+              <a:prstDash val="solid"/>
+            </a:ln>
+          </p:spPr>
+          <p:txBody>
+            <a:bodyPr/>
+            <a:lstStyle/>
+            <a:p>
+              <a:endParaRPr lang="en-US"/>
+            </a:p>
+          </p:txBody>
+        </p:sp>
+        <p:sp>
+          <p:nvSpPr>
+            <p:cNvPr id="22" name="Text 20"/>
+            <p:cNvSpPr/>
+            <p:nvPr/>
+          </p:nvSpPr>
+          <p:spPr>
+            <a:xfrm>
+              <a:off x="877824" y="4590288"/>
+              <a:ext cx="4937760" cy="960120"/>
+            </a:xfrm>
+            <a:prstGeom prst="rect">
+              <a:avLst/>
+            </a:prstGeom>
+            <a:noFill/>
+            <a:ln/>
+          </p:spPr>
+          <p:txBody>
+            <a:bodyPr wrap="square" lIns="0" tIns="0" rIns="0" bIns="0" rtlCol="0" anchor="t">
+              <a:normAutofit/>
+            </a:bodyPr>
+            <a:lstStyle/>
+            <a:p>
+              <a:pPr marL="0" indent="0">
+                <a:buNone/>
+              </a:pPr>
+              <a:r>
+                <a:rPr lang="en-US" sz="1300" dirty="0">
+                  <a:solidFill>
+                    <a:srgbClr val="F4F7FA"/>
+                  </a:solidFill>
+                  <a:latin typeface="Consolas" pitchFamily="34" charset="0"/>
+                  <a:ea typeface="Consolas" pitchFamily="34" charset="-122"/>
+                  <a:cs typeface="Consolas" pitchFamily="34" charset="-120"/>
+                </a:rPr>
+                <a:t>GET /search?q=problem+z+pulą</a:t>
+              </a:r>
+              <a:endParaRPr lang="en-US" sz="1300" dirty="0"/>
+            </a:p>
+            <a:p>
+              <a:pPr marL="0" indent="0">
+                <a:buNone/>
+              </a:pPr>
+              <a:r>
+                <a:rPr lang="en-US" sz="1300" dirty="0">
+                  <a:solidFill>
+                    <a:srgbClr val="F4F7FA"/>
+                  </a:solidFill>
+                  <a:latin typeface="Consolas" pitchFamily="34" charset="0"/>
+                  <a:ea typeface="Consolas" pitchFamily="34" charset="-122"/>
+                  <a:cs typeface="Consolas" pitchFamily="34" charset="-120"/>
+                </a:rPr>
+                <a:t>        ↓</a:t>
+              </a:r>
+              <a:endParaRPr lang="en-US" sz="1300" dirty="0"/>
+            </a:p>
+            <a:p>
+              <a:pPr marL="0" indent="0">
+                <a:buNone/>
+              </a:pPr>
+              <a:r>
+                <a:rPr lang="en-US" sz="1300" dirty="0">
+                  <a:solidFill>
+                    <a:srgbClr val="F4F7FA"/>
+                  </a:solidFill>
+                  <a:latin typeface="Consolas" pitchFamily="34" charset="0"/>
+                  <a:ea typeface="Consolas" pitchFamily="34" charset="-122"/>
+                  <a:cs typeface="Consolas" pitchFamily="34" charset="-120"/>
+                </a:rPr>
+                <a:t>EmbeddingService → SQL → top K</a:t>
+              </a:r>
+              <a:endParaRPr lang="en-US" sz="1300" dirty="0"/>
+            </a:p>
+          </p:txBody>
+        </p:sp>
+        <p:sp>
+          <p:nvSpPr>
+            <p:cNvPr id="23" name="Shape 21"/>
+            <p:cNvSpPr/>
+            <p:nvPr/>
+          </p:nvSpPr>
+          <p:spPr>
+            <a:xfrm>
+              <a:off x="6400800" y="4480560"/>
+              <a:ext cx="4572000" cy="1143000"/>
+            </a:xfrm>
+            <a:prstGeom prst="roundRect">
+              <a:avLst>
+                <a:gd name="adj" fmla="val 6400"/>
+              </a:avLst>
+            </a:prstGeom>
             <a:solidFill>
               <a:srgbClr val="0E2841"/>
             </a:solidFill>
-            <a:prstDash val="solid"/>
-          </a:ln>
-        </p:spPr>
-        <p:txBody>
-          <a:bodyPr/>
-          <a:lstStyle/>
-          <a:p>
-            <a:endParaRPr lang="en-US"/>
-          </a:p>
-        </p:txBody>
-      </p:sp>
-      <p:sp>
-        <p:nvSpPr>
-          <p:cNvPr id="24" name="Text 22"/>
-          <p:cNvSpPr/>
-          <p:nvPr/>
-        </p:nvSpPr>
-        <p:spPr>
-          <a:xfrm>
-            <a:off x="6547104" y="4590288"/>
-            <a:ext cx="4297680" cy="960120"/>
-          </a:xfrm>
-          <a:prstGeom prst="rect">
-            <a:avLst/>
-          </a:prstGeom>
-          <a:noFill/>
-          <a:ln/>
-        </p:spPr>
-        <p:txBody>
-          <a:bodyPr wrap="square" lIns="0" tIns="0" rIns="0" bIns="0" rtlCol="0" anchor="t">
-            <a:normAutofit lnSpcReduction="10000"/>
-          </a:bodyPr>
-          <a:lstStyle/>
-          <a:p>
-            <a:pPr marL="0" indent="0">
-              <a:buNone/>
-            </a:pPr>
-            <a:r>
-              <a:rPr lang="en-US" sz="1300" dirty="0">
-                <a:solidFill>
-                  <a:srgbClr val="F4F7FA"/>
-                </a:solidFill>
-                <a:latin typeface="Consolas" pitchFamily="34" charset="0"/>
-                <a:ea typeface="Consolas" pitchFamily="34" charset="-122"/>
-                <a:cs typeface="Consolas" pitchFamily="34" charset="-120"/>
-              </a:rPr>
-              <a:t>article(</a:t>
-            </a:r>
-            <a:endParaRPr lang="en-US" sz="1300" dirty="0"/>
-          </a:p>
-          <a:p>
-            <a:pPr marL="0" indent="0">
-              <a:buNone/>
-            </a:pPr>
-            <a:r>
-              <a:rPr lang="en-US" sz="1300" dirty="0">
-                <a:solidFill>
-                  <a:srgbClr val="F4F7FA"/>
-                </a:solidFill>
-                <a:latin typeface="Consolas" pitchFamily="34" charset="0"/>
-                <a:ea typeface="Consolas" pitchFamily="34" charset="-122"/>
-                <a:cs typeface="Consolas" pitchFamily="34" charset="-120"/>
-              </a:rPr>
-              <a:t>  title TEXT,</a:t>
-            </a:r>
-            <a:endParaRPr lang="en-US" sz="1300" dirty="0"/>
-          </a:p>
-          <a:p>
-            <a:pPr marL="0" indent="0">
-              <a:buNone/>
-            </a:pPr>
-            <a:r>
-              <a:rPr lang="en-US" sz="1300" dirty="0">
-                <a:solidFill>
-                  <a:srgbClr val="F4F7FA"/>
-                </a:solidFill>
-                <a:latin typeface="Consolas" pitchFamily="34" charset="0"/>
-                <a:ea typeface="Consolas" pitchFamily="34" charset="-122"/>
-                <a:cs typeface="Consolas" pitchFamily="34" charset="-120"/>
-              </a:rPr>
-              <a:t>  content TEXT,</a:t>
-            </a:r>
-            <a:endParaRPr lang="en-US" sz="1300" dirty="0"/>
-          </a:p>
-          <a:p>
-            <a:pPr marL="0" indent="0">
-              <a:buNone/>
-            </a:pPr>
-            <a:r>
-              <a:rPr lang="en-US" sz="1300" dirty="0">
-                <a:solidFill>
-                  <a:srgbClr val="F4F7FA"/>
-                </a:solidFill>
-                <a:latin typeface="Consolas" pitchFamily="34" charset="0"/>
-                <a:ea typeface="Consolas" pitchFamily="34" charset="-122"/>
-                <a:cs typeface="Consolas" pitchFamily="34" charset="-120"/>
-              </a:rPr>
-              <a:t>  embedding VECTOR(1024)</a:t>
-            </a:r>
-            <a:endParaRPr lang="en-US" sz="1300" dirty="0"/>
-          </a:p>
-          <a:p>
-            <a:pPr marL="0" indent="0">
-              <a:buNone/>
-            </a:pPr>
-            <a:r>
-              <a:rPr lang="en-US" sz="1300" dirty="0">
-                <a:solidFill>
-                  <a:srgbClr val="F4F7FA"/>
-                </a:solidFill>
-                <a:latin typeface="Consolas" pitchFamily="34" charset="0"/>
-                <a:ea typeface="Consolas" pitchFamily="34" charset="-122"/>
-                <a:cs typeface="Consolas" pitchFamily="34" charset="-120"/>
-              </a:rPr>
-              <a:t>)</a:t>
-            </a:r>
-            <a:endParaRPr lang="en-US" sz="1300" dirty="0"/>
-          </a:p>
-        </p:txBody>
-      </p:sp>
+            <a:ln w="12700">
+              <a:solidFill>
+                <a:srgbClr val="0E2841"/>
+              </a:solidFill>
+              <a:prstDash val="solid"/>
+            </a:ln>
+          </p:spPr>
+          <p:txBody>
+            <a:bodyPr/>
+            <a:lstStyle/>
+            <a:p>
+              <a:endParaRPr lang="en-US"/>
+            </a:p>
+          </p:txBody>
+        </p:sp>
+        <p:sp>
+          <p:nvSpPr>
+            <p:cNvPr id="24" name="Text 22"/>
+            <p:cNvSpPr/>
+            <p:nvPr/>
+          </p:nvSpPr>
+          <p:spPr>
+            <a:xfrm>
+              <a:off x="6547104" y="4590288"/>
+              <a:ext cx="4297680" cy="960120"/>
+            </a:xfrm>
+            <a:prstGeom prst="rect">
+              <a:avLst/>
+            </a:prstGeom>
+            <a:noFill/>
+            <a:ln/>
+          </p:spPr>
+          <p:txBody>
+            <a:bodyPr wrap="square" lIns="0" tIns="0" rIns="0" bIns="0" rtlCol="0" anchor="t">
+              <a:normAutofit lnSpcReduction="10000"/>
+            </a:bodyPr>
+            <a:lstStyle/>
+            <a:p>
+              <a:pPr marL="0" indent="0">
+                <a:buNone/>
+              </a:pPr>
+              <a:r>
+                <a:rPr lang="en-US" sz="1300" dirty="0">
+                  <a:solidFill>
+                    <a:srgbClr val="F4F7FA"/>
+                  </a:solidFill>
+                  <a:latin typeface="Consolas" pitchFamily="34" charset="0"/>
+                  <a:ea typeface="Consolas" pitchFamily="34" charset="-122"/>
+                  <a:cs typeface="Consolas" pitchFamily="34" charset="-120"/>
+                </a:rPr>
+                <a:t>article(</a:t>
+              </a:r>
+              <a:endParaRPr lang="en-US" sz="1300" dirty="0"/>
+            </a:p>
+            <a:p>
+              <a:pPr marL="0" indent="0">
+                <a:buNone/>
+              </a:pPr>
+              <a:r>
+                <a:rPr lang="en-US" sz="1300" dirty="0">
+                  <a:solidFill>
+                    <a:srgbClr val="F4F7FA"/>
+                  </a:solidFill>
+                  <a:latin typeface="Consolas" pitchFamily="34" charset="0"/>
+                  <a:ea typeface="Consolas" pitchFamily="34" charset="-122"/>
+                  <a:cs typeface="Consolas" pitchFamily="34" charset="-120"/>
+                </a:rPr>
+                <a:t>  title TEXT,</a:t>
+              </a:r>
+              <a:endParaRPr lang="en-US" sz="1300" dirty="0"/>
+            </a:p>
+            <a:p>
+              <a:pPr marL="0" indent="0">
+                <a:buNone/>
+              </a:pPr>
+              <a:r>
+                <a:rPr lang="en-US" sz="1300" dirty="0">
+                  <a:solidFill>
+                    <a:srgbClr val="F4F7FA"/>
+                  </a:solidFill>
+                  <a:latin typeface="Consolas" pitchFamily="34" charset="0"/>
+                  <a:ea typeface="Consolas" pitchFamily="34" charset="-122"/>
+                  <a:cs typeface="Consolas" pitchFamily="34" charset="-120"/>
+                </a:rPr>
+                <a:t>  content TEXT,</a:t>
+              </a:r>
+              <a:endParaRPr lang="en-US" sz="1300" dirty="0"/>
+            </a:p>
+            <a:p>
+              <a:pPr marL="0" indent="0">
+                <a:buNone/>
+              </a:pPr>
+              <a:r>
+                <a:rPr lang="en-US" sz="1300" dirty="0">
+                  <a:solidFill>
+                    <a:srgbClr val="F4F7FA"/>
+                  </a:solidFill>
+                  <a:latin typeface="Consolas" pitchFamily="34" charset="0"/>
+                  <a:ea typeface="Consolas" pitchFamily="34" charset="-122"/>
+                  <a:cs typeface="Consolas" pitchFamily="34" charset="-120"/>
+                </a:rPr>
+                <a:t>  embedding VECTOR(1024)</a:t>
+              </a:r>
+              <a:endParaRPr lang="en-US" sz="1300" dirty="0"/>
+            </a:p>
+            <a:p>
+              <a:pPr marL="0" indent="0">
+                <a:buNone/>
+              </a:pPr>
+              <a:r>
+                <a:rPr lang="en-US" sz="1300" dirty="0">
+                  <a:solidFill>
+                    <a:srgbClr val="F4F7FA"/>
+                  </a:solidFill>
+                  <a:latin typeface="Consolas" pitchFamily="34" charset="0"/>
+                  <a:ea typeface="Consolas" pitchFamily="34" charset="-122"/>
+                  <a:cs typeface="Consolas" pitchFamily="34" charset="-120"/>
+                </a:rPr>
+                <a:t>)</a:t>
+              </a:r>
+              <a:endParaRPr lang="en-US" sz="1300" dirty="0"/>
+            </a:p>
+          </p:txBody>
+        </p:sp>
+      </p:grpSp>
       <p:sp>
         <p:nvSpPr>
           <p:cNvPr id="25" name="Slide Number Placeholder 0"/>
@@ -13480,7 +14397,7 @@
           </a:prstGeom>
           <a:extLst>
             <a:ext uri="{C572A759-6A51-4108-AA02-DFA0A04FC94B}">
-              <ma14:wrappingTextBoxFlag xmlns:ma14="http://schemas.microsoft.com/office/mac/drawingml/2011/main" xmlns="" val="0"/>
+              <ma14:wrappingTextBoxFlag xmlns="" xmlns:ma14="http://schemas.microsoft.com/office/mac/drawingml/2011/main" val="0"/>
             </a:ext>
           </a:extLst>
         </p:spPr>
@@ -13502,9 +14419,279 @@
             <a:pPr algn="l"/>
             <a:fld id="{F7021451-1387-4CA6-816F-3879F97B5CBC}" type="slidenum">
               <a:rPr lang="en-US" b="0"/>
-              <a:t>5</a:t>
+              <a:t>6</a:t>
             </a:fld>
             <a:endParaRPr lang="en-US"/>
+          </a:p>
+        </p:txBody>
+      </p:sp>
+      <p:sp>
+        <p:nvSpPr>
+          <p:cNvPr id="30" name="Dymek mowy: prostokąt z zaokrąglonymi rogami 29">
+            <a:extLst>
+              <a:ext uri="{FF2B5EF4-FFF2-40B4-BE49-F238E27FC236}">
+                <a16:creationId xmlns:a16="http://schemas.microsoft.com/office/drawing/2014/main" id="{24D011C7-D8DA-B0CF-59CD-D1C942DD60EA}"/>
+              </a:ext>
+            </a:extLst>
+          </p:cNvPr>
+          <p:cNvSpPr/>
+          <p:nvPr/>
+        </p:nvSpPr>
+        <p:spPr>
+          <a:xfrm>
+            <a:off x="1550748" y="3340950"/>
+            <a:ext cx="3355848" cy="978034"/>
+          </a:xfrm>
+          <a:prstGeom prst="wedgeRoundRectCallout">
+            <a:avLst>
+              <a:gd name="adj1" fmla="val 39269"/>
+              <a:gd name="adj2" fmla="val -72970"/>
+              <a:gd name="adj3" fmla="val 16667"/>
+            </a:avLst>
+          </a:prstGeom>
+        </p:spPr>
+        <p:style>
+          <a:lnRef idx="2">
+            <a:schemeClr val="accent6"/>
+          </a:lnRef>
+          <a:fillRef idx="1">
+            <a:schemeClr val="lt1"/>
+          </a:fillRef>
+          <a:effectRef idx="0">
+            <a:schemeClr val="accent6"/>
+          </a:effectRef>
+          <a:fontRef idx="minor">
+            <a:schemeClr val="dk1"/>
+          </a:fontRef>
+        </p:style>
+        <p:txBody>
+          <a:bodyPr rtlCol="0" anchor="ctr"/>
+          <a:lstStyle/>
+          <a:p>
+            <a:r>
+              <a:rPr lang="en-US" sz="1200" b="1" dirty="0"/>
+              <a:t>BGE-M3</a:t>
+            </a:r>
+            <a:r>
+              <a:rPr lang="en-US" sz="1200" dirty="0"/>
+              <a:t> to model </a:t>
+            </a:r>
+            <a:r>
+              <a:rPr lang="en-US" sz="1200" dirty="0" err="1"/>
+              <a:t>embeddingowy</a:t>
+            </a:r>
+            <a:r>
+              <a:rPr lang="en-US" sz="1200" dirty="0"/>
+              <a:t> </a:t>
+            </a:r>
+            <a:r>
+              <a:rPr lang="en-US" sz="1200" dirty="0" err="1"/>
+              <a:t>stworzony</a:t>
+            </a:r>
+            <a:r>
+              <a:rPr lang="en-US" sz="1200" dirty="0"/>
+              <a:t> </a:t>
+            </a:r>
+            <a:r>
+              <a:rPr lang="en-US" sz="1200" dirty="0" err="1"/>
+              <a:t>przez</a:t>
+            </a:r>
+            <a:r>
+              <a:rPr lang="en-US" sz="1200" dirty="0"/>
+              <a:t> </a:t>
+            </a:r>
+            <a:r>
+              <a:rPr lang="en-US" sz="1200" b="1" dirty="0"/>
+              <a:t>BAAI</a:t>
+            </a:r>
+            <a:r>
+              <a:rPr lang="en-US" sz="1200" dirty="0"/>
+              <a:t> (Beijing Academy of Artificial Intelligence). </a:t>
+            </a:r>
+            <a:r>
+              <a:rPr lang="en-US" sz="1200" dirty="0" err="1"/>
+              <a:t>Jego</a:t>
+            </a:r>
+            <a:r>
+              <a:rPr lang="en-US" sz="1200" dirty="0"/>
+              <a:t> </a:t>
+            </a:r>
+            <a:r>
+              <a:rPr lang="en-US" sz="1200" dirty="0" err="1"/>
+              <a:t>zadaniem</a:t>
+            </a:r>
+            <a:r>
+              <a:rPr lang="en-US" sz="1200" dirty="0"/>
+              <a:t> jest m.in. </a:t>
+            </a:r>
+            <a:r>
+              <a:rPr lang="en-US" sz="1200" dirty="0" err="1"/>
+              <a:t>zamiana</a:t>
+            </a:r>
+            <a:r>
+              <a:rPr lang="en-US" sz="1200" dirty="0"/>
+              <a:t> </a:t>
+            </a:r>
+            <a:r>
+              <a:rPr lang="en-US" sz="1200" dirty="0" err="1"/>
+              <a:t>tekstu</a:t>
+            </a:r>
+            <a:r>
+              <a:rPr lang="en-US" sz="1200" dirty="0"/>
+              <a:t> </a:t>
+            </a:r>
+            <a:r>
+              <a:rPr lang="en-US" sz="1200" dirty="0" err="1"/>
+              <a:t>na</a:t>
+            </a:r>
+            <a:r>
+              <a:rPr lang="en-US" sz="1200" dirty="0"/>
+              <a:t> embedding</a:t>
+            </a:r>
+          </a:p>
+        </p:txBody>
+      </p:sp>
+      <p:sp>
+        <p:nvSpPr>
+          <p:cNvPr id="32" name="Dymek mowy: prostokąt z zaokrąglonymi rogami 31">
+            <a:extLst>
+              <a:ext uri="{FF2B5EF4-FFF2-40B4-BE49-F238E27FC236}">
+                <a16:creationId xmlns:a16="http://schemas.microsoft.com/office/drawing/2014/main" id="{B211EAAB-39B2-5149-18C2-FB5F268B8C87}"/>
+              </a:ext>
+            </a:extLst>
+          </p:cNvPr>
+          <p:cNvSpPr/>
+          <p:nvPr/>
+        </p:nvSpPr>
+        <p:spPr>
+          <a:xfrm>
+            <a:off x="7146036" y="3340950"/>
+            <a:ext cx="3355848" cy="978034"/>
+          </a:xfrm>
+          <a:prstGeom prst="wedgeRoundRectCallout">
+            <a:avLst>
+              <a:gd name="adj1" fmla="val 39269"/>
+              <a:gd name="adj2" fmla="val -72970"/>
+              <a:gd name="adj3" fmla="val 16667"/>
+            </a:avLst>
+          </a:prstGeom>
+        </p:spPr>
+        <p:style>
+          <a:lnRef idx="2">
+            <a:schemeClr val="accent6"/>
+          </a:lnRef>
+          <a:fillRef idx="1">
+            <a:schemeClr val="lt1"/>
+          </a:fillRef>
+          <a:effectRef idx="0">
+            <a:schemeClr val="accent6"/>
+          </a:effectRef>
+          <a:fontRef idx="minor">
+            <a:schemeClr val="dk1"/>
+          </a:fontRef>
+        </p:style>
+        <p:txBody>
+          <a:bodyPr rtlCol="0" anchor="ctr"/>
+          <a:lstStyle/>
+          <a:p>
+            <a:r>
+              <a:rPr lang="en-US" sz="1200" b="1" dirty="0" err="1"/>
+              <a:t>pgvector</a:t>
+            </a:r>
+            <a:r>
+              <a:rPr lang="en-US" sz="1200" dirty="0"/>
+              <a:t> = </a:t>
+            </a:r>
+            <a:r>
+              <a:rPr lang="en-US" sz="1200" dirty="0" err="1"/>
+              <a:t>rozszerzenie</a:t>
+            </a:r>
+            <a:r>
+              <a:rPr lang="en-US" sz="1200" dirty="0"/>
+              <a:t> PostgreSQL </a:t>
+            </a:r>
+            <a:r>
+              <a:rPr lang="en-US" sz="1200" dirty="0" err="1"/>
+              <a:t>umożliwiające</a:t>
+            </a:r>
+            <a:r>
+              <a:rPr lang="en-US" sz="1200" dirty="0"/>
+              <a:t> </a:t>
+            </a:r>
+            <a:r>
+              <a:rPr lang="en-US" sz="1200" dirty="0" err="1"/>
+              <a:t>przechowywanie</a:t>
+            </a:r>
+            <a:r>
+              <a:rPr lang="en-US" sz="1200" dirty="0"/>
+              <a:t> </a:t>
+            </a:r>
+            <a:r>
+              <a:rPr lang="en-US" sz="1200" dirty="0" err="1"/>
+              <a:t>embeddingów</a:t>
+            </a:r>
+            <a:r>
+              <a:rPr lang="en-US" sz="1200" dirty="0"/>
+              <a:t> </a:t>
+            </a:r>
+            <a:r>
+              <a:rPr lang="en-US" sz="1200" dirty="0" err="1"/>
+              <a:t>i</a:t>
+            </a:r>
+            <a:r>
+              <a:rPr lang="en-US" sz="1200" dirty="0"/>
+              <a:t> </a:t>
+            </a:r>
+            <a:r>
+              <a:rPr lang="en-US" sz="1200" dirty="0" err="1"/>
+              <a:t>wyszukiwanie</a:t>
+            </a:r>
+            <a:r>
+              <a:rPr lang="en-US" sz="1200" dirty="0"/>
+              <a:t> </a:t>
+            </a:r>
+            <a:r>
+              <a:rPr lang="en-US" sz="1200" dirty="0" err="1"/>
+              <a:t>danych</a:t>
+            </a:r>
+            <a:r>
+              <a:rPr lang="en-US" sz="1200" dirty="0"/>
+              <a:t> </a:t>
+            </a:r>
+            <a:r>
+              <a:rPr lang="en-US" sz="1200" dirty="0" err="1"/>
+              <a:t>na</a:t>
+            </a:r>
+            <a:r>
+              <a:rPr lang="en-US" sz="1200" dirty="0"/>
+              <a:t> </a:t>
+            </a:r>
+            <a:r>
+              <a:rPr lang="en-US" sz="1200" dirty="0" err="1"/>
+              <a:t>podstawie</a:t>
+            </a:r>
+            <a:r>
+              <a:rPr lang="en-US" sz="1200" dirty="0"/>
+              <a:t> </a:t>
+            </a:r>
+            <a:r>
+              <a:rPr lang="en-US" sz="1200" dirty="0" err="1"/>
+              <a:t>podobieństwa</a:t>
+            </a:r>
+            <a:r>
+              <a:rPr lang="en-US" sz="1200" dirty="0"/>
+              <a:t> </a:t>
+            </a:r>
+            <a:r>
+              <a:rPr lang="en-US" sz="1200" dirty="0" err="1"/>
+              <a:t>semantycznego</a:t>
+            </a:r>
+            <a:endParaRPr lang="en-US" sz="1200" dirty="0">
+              <a:solidFill>
+                <a:srgbClr val="F4F7FA"/>
+              </a:solidFill>
+              <a:latin typeface="Consolas" pitchFamily="34" charset="0"/>
+            </a:endParaRPr>
           </a:p>
         </p:txBody>
       </p:sp>
@@ -13516,7 +14703,7 @@
 </p:sld>
 </file>
 
-<file path=ppt/slides/slide6.xml><?xml version="1.0" encoding="utf-8"?>
+<file path=ppt/slides/slide7.xml><?xml version="1.0" encoding="utf-8"?>
 <p:sld xmlns:a="http://schemas.openxmlformats.org/drawingml/2006/main" xmlns:r="http://schemas.openxmlformats.org/officeDocument/2006/relationships" xmlns:p="http://schemas.openxmlformats.org/presentationml/2006/main">
   <p:cSld name="Slide 6">
     <p:bg>
@@ -13800,6 +14987,49 @@
               </a:rPr>
               <a:t>    embedding VECTOR(1024)</a:t>
             </a:r>
+            <a:r>
+              <a:rPr lang="pl-PL" sz="1400" dirty="0">
+                <a:solidFill>
+                  <a:srgbClr val="F4F7FA"/>
+                </a:solidFill>
+                <a:latin typeface="Consolas" pitchFamily="34" charset="0"/>
+                <a:ea typeface="Consolas" pitchFamily="34" charset="-122"/>
+                <a:cs typeface="Consolas" pitchFamily="34" charset="-120"/>
+              </a:rPr>
+              <a:t>,</a:t>
+            </a:r>
+          </a:p>
+          <a:p>
+            <a:pPr marL="0" indent="0">
+              <a:buNone/>
+            </a:pPr>
+            <a:r>
+              <a:rPr lang="pl-PL" sz="1400" dirty="0">
+                <a:solidFill>
+                  <a:srgbClr val="F4F7FA"/>
+                </a:solidFill>
+                <a:latin typeface="Consolas" pitchFamily="34" charset="0"/>
+              </a:rPr>
+              <a:t>    </a:t>
+            </a:r>
+            <a:r>
+              <a:rPr lang="pl-PL" sz="1400" dirty="0" err="1">
+                <a:solidFill>
+                  <a:srgbClr val="F4F7FA"/>
+                </a:solidFill>
+                <a:latin typeface="Consolas" pitchFamily="34" charset="0"/>
+              </a:rPr>
+              <a:t>search_tsv</a:t>
+            </a:r>
+            <a:r>
+              <a:rPr lang="pl-PL" sz="1400" dirty="0">
+                <a:solidFill>
+                  <a:srgbClr val="F4F7FA"/>
+                </a:solidFill>
+                <a:latin typeface="Consolas" pitchFamily="34" charset="0"/>
+              </a:rPr>
+              <a:t> TSVECTOR</a:t>
+            </a:r>
             <a:endParaRPr lang="en-US" sz="1400" dirty="0"/>
           </a:p>
           <a:p>
@@ -14162,8 +15392,8 @@
         </p:nvSpPr>
         <p:spPr>
           <a:xfrm>
-            <a:off x="6812280" y="5074920"/>
-            <a:ext cx="4389120" cy="411480"/>
+            <a:off x="731520" y="5615161"/>
+            <a:ext cx="4848186" cy="411480"/>
           </a:xfrm>
           <a:prstGeom prst="rect">
             <a:avLst/>
@@ -14215,7 +15445,7 @@
           </a:prstGeom>
           <a:extLst>
             <a:ext uri="{C572A759-6A51-4108-AA02-DFA0A04FC94B}">
-              <ma14:wrappingTextBoxFlag xmlns:ma14="http://schemas.microsoft.com/office/mac/drawingml/2011/main" xmlns="" val="0"/>
+              <ma14:wrappingTextBoxFlag xmlns="" xmlns:ma14="http://schemas.microsoft.com/office/mac/drawingml/2011/main" val="0"/>
             </a:ext>
           </a:extLst>
         </p:spPr>
@@ -14237,9 +15467,224 @@
             <a:pPr algn="l"/>
             <a:fld id="{F7021451-1387-4CA6-816F-3879F97B5CBC}" type="slidenum">
               <a:rPr lang="en-US" b="0"/>
-              <a:t>6</a:t>
+              <a:t>7</a:t>
             </a:fld>
             <a:endParaRPr lang="en-US"/>
+          </a:p>
+        </p:txBody>
+      </p:sp>
+      <p:sp>
+        <p:nvSpPr>
+          <p:cNvPr id="16" name="Dymek mowy: prostokąt z zaokrąglonymi rogami 15">
+            <a:extLst>
+              <a:ext uri="{FF2B5EF4-FFF2-40B4-BE49-F238E27FC236}">
+                <a16:creationId xmlns:a16="http://schemas.microsoft.com/office/drawing/2014/main" id="{5E522EE1-BC5F-0CB7-644F-20AA5C965FA8}"/>
+              </a:ext>
+            </a:extLst>
+          </p:cNvPr>
+          <p:cNvSpPr/>
+          <p:nvPr/>
+        </p:nvSpPr>
+        <p:spPr>
+          <a:xfrm>
+            <a:off x="7178040" y="4895272"/>
+            <a:ext cx="3591353" cy="1578553"/>
+          </a:xfrm>
+          <a:prstGeom prst="wedgeRoundRectCallout">
+            <a:avLst>
+              <a:gd name="adj1" fmla="val -161908"/>
+              <a:gd name="adj2" fmla="val -138708"/>
+              <a:gd name="adj3" fmla="val 16667"/>
+            </a:avLst>
+          </a:prstGeom>
+        </p:spPr>
+        <p:style>
+          <a:lnRef idx="2">
+            <a:schemeClr val="accent6"/>
+          </a:lnRef>
+          <a:fillRef idx="1">
+            <a:schemeClr val="lt1"/>
+          </a:fillRef>
+          <a:effectRef idx="0">
+            <a:schemeClr val="accent6"/>
+          </a:effectRef>
+          <a:fontRef idx="minor">
+            <a:schemeClr val="dk1"/>
+          </a:fontRef>
+        </p:style>
+        <p:txBody>
+          <a:bodyPr rtlCol="0" anchor="ctr"/>
+          <a:lstStyle/>
+          <a:p>
+            <a:r>
+              <a:rPr lang="en-US" sz="1200" dirty="0" err="1"/>
+              <a:t>Kolumna</a:t>
+            </a:r>
+            <a:r>
+              <a:rPr lang="en-US" sz="1200" dirty="0"/>
+              <a:t> </a:t>
+            </a:r>
+            <a:r>
+              <a:rPr lang="en-US" sz="1200" dirty="0" err="1"/>
+              <a:t>typu</a:t>
+            </a:r>
+            <a:r>
+              <a:rPr lang="en-US" sz="1200" dirty="0"/>
+              <a:t> </a:t>
+            </a:r>
+            <a:r>
+              <a:rPr lang="en-US" sz="1200" b="1" dirty="0"/>
+              <a:t>TSVECTOR</a:t>
+            </a:r>
+            <a:r>
+              <a:rPr lang="en-US" sz="1200" dirty="0"/>
+              <a:t> </a:t>
+            </a:r>
+            <a:r>
+              <a:rPr lang="en-US" sz="1200" dirty="0" err="1"/>
+              <a:t>służy</a:t>
+            </a:r>
+            <a:r>
+              <a:rPr lang="en-US" sz="1200" dirty="0"/>
+              <a:t> w PostgreSQL do </a:t>
+            </a:r>
+            <a:r>
+              <a:rPr lang="en-US" sz="1200" dirty="0" err="1"/>
+              <a:t>klasycznego</a:t>
+            </a:r>
+            <a:r>
+              <a:rPr lang="en-US" sz="1200" dirty="0"/>
+              <a:t> </a:t>
+            </a:r>
+            <a:r>
+              <a:rPr lang="en-US" sz="1200" b="1" dirty="0"/>
+              <a:t>Full-Text Search (FTS)</a:t>
+            </a:r>
+            <a:r>
+              <a:rPr lang="pl-PL" sz="1200" b="1" dirty="0"/>
+              <a:t>.</a:t>
+            </a:r>
+          </a:p>
+          <a:p>
+            <a:endParaRPr lang="pl-PL" sz="1200" b="1" dirty="0"/>
+          </a:p>
+          <a:p>
+            <a:r>
+              <a:rPr lang="en-US" sz="1200" dirty="0"/>
+              <a:t>PostgreSQL m.in. </a:t>
+            </a:r>
+            <a:r>
+              <a:rPr lang="en-US" sz="1200" dirty="0" err="1"/>
+              <a:t>rozbija</a:t>
+            </a:r>
+            <a:r>
+              <a:rPr lang="en-US" sz="1200" dirty="0"/>
+              <a:t> </a:t>
+            </a:r>
+            <a:r>
+              <a:rPr lang="en-US" sz="1200" dirty="0" err="1"/>
+              <a:t>tekst</a:t>
+            </a:r>
+            <a:r>
+              <a:rPr lang="en-US" sz="1200" dirty="0"/>
+              <a:t> </a:t>
+            </a:r>
+            <a:r>
+              <a:rPr lang="en-US" sz="1200" dirty="0" err="1"/>
+              <a:t>na</a:t>
+            </a:r>
+            <a:r>
+              <a:rPr lang="en-US" sz="1200" dirty="0"/>
+              <a:t> </a:t>
+            </a:r>
+            <a:r>
+              <a:rPr lang="en-US" sz="1200" dirty="0" err="1"/>
+              <a:t>tokeny</a:t>
+            </a:r>
+            <a:r>
+              <a:rPr lang="en-US" sz="1200" dirty="0"/>
+              <a:t>, </a:t>
+            </a:r>
+            <a:r>
+              <a:rPr lang="en-US" sz="1200" dirty="0" err="1"/>
+              <a:t>usuwa</a:t>
+            </a:r>
+            <a:r>
+              <a:rPr lang="en-US" sz="1200" dirty="0"/>
+              <a:t> </a:t>
+            </a:r>
+            <a:r>
+              <a:rPr lang="en-US" sz="1200" dirty="0" err="1"/>
+              <a:t>część</a:t>
+            </a:r>
+            <a:r>
+              <a:rPr lang="en-US" sz="1200" dirty="0"/>
+              <a:t> </a:t>
+            </a:r>
+            <a:r>
+              <a:rPr lang="en-US" sz="1200" dirty="0" err="1"/>
+              <a:t>nieistotnych</a:t>
+            </a:r>
+            <a:r>
+              <a:rPr lang="en-US" sz="1200" dirty="0"/>
+              <a:t> </a:t>
+            </a:r>
+            <a:r>
+              <a:rPr lang="en-US" sz="1200" dirty="0" err="1"/>
+              <a:t>słów</a:t>
+            </a:r>
+            <a:r>
+              <a:rPr lang="en-US" sz="1200" dirty="0"/>
+              <a:t> </a:t>
+            </a:r>
+            <a:r>
+              <a:rPr lang="en-US" sz="1200" dirty="0" err="1"/>
+              <a:t>i</a:t>
+            </a:r>
+            <a:r>
+              <a:rPr lang="en-US" sz="1200" dirty="0"/>
+              <a:t> </a:t>
+            </a:r>
+            <a:r>
+              <a:rPr lang="en-US" sz="1200" dirty="0" err="1"/>
+              <a:t>sprowadza</a:t>
+            </a:r>
+            <a:r>
+              <a:rPr lang="en-US" sz="1200" dirty="0"/>
+              <a:t> </a:t>
+            </a:r>
+            <a:r>
+              <a:rPr lang="en-US" sz="1200" dirty="0" err="1"/>
+              <a:t>wyrazy</a:t>
+            </a:r>
+            <a:r>
+              <a:rPr lang="en-US" sz="1200" dirty="0"/>
+              <a:t> do form </a:t>
+            </a:r>
+            <a:r>
+              <a:rPr lang="en-US" sz="1200" dirty="0" err="1"/>
+              <a:t>pozwalających</a:t>
+            </a:r>
+            <a:r>
+              <a:rPr lang="en-US" sz="1200" dirty="0"/>
+              <a:t> </a:t>
+            </a:r>
+            <a:r>
+              <a:rPr lang="en-US" sz="1200" dirty="0" err="1"/>
+              <a:t>skuteczniej</a:t>
+            </a:r>
+            <a:r>
+              <a:rPr lang="en-US" sz="1200" dirty="0"/>
+              <a:t> je </a:t>
+            </a:r>
+            <a:r>
+              <a:rPr lang="en-US" sz="1200" dirty="0" err="1"/>
+              <a:t>wyszukiwać</a:t>
+            </a:r>
+            <a:r>
+              <a:rPr lang="en-US" sz="1200" dirty="0"/>
+              <a:t>.</a:t>
+            </a:r>
           </a:p>
         </p:txBody>
       </p:sp>
@@ -14251,7 +15696,7 @@
 </p:sld>
 </file>
 
-<file path=ppt/slides/slide7.xml><?xml version="1.0" encoding="utf-8"?>
+<file path=ppt/slides/slide8.xml><?xml version="1.0" encoding="utf-8"?>
 <p:sld xmlns:a="http://schemas.openxmlformats.org/drawingml/2006/main" xmlns:r="http://schemas.openxmlformats.org/officeDocument/2006/relationships" xmlns:p="http://schemas.openxmlformats.org/presentationml/2006/main">
   <p:cSld name="Slide 7">
     <p:bg>
@@ -14540,16 +15985,10 @@
                 <a:ea typeface="Consolas" pitchFamily="34" charset="-122"/>
                 <a:cs typeface="Consolas" pitchFamily="34" charset="-120"/>
               </a:rPr>
-              <a:t>class ArticleService {</a:t>
-            </a:r>
-            <a:endParaRPr lang="en-US" sz="1200" dirty="0"/>
-          </a:p>
-          <a:p>
-            <a:pPr marL="0" indent="0">
-              <a:buNone/>
-            </a:pPr>
-            <a:r>
-              <a:rPr lang="en-US" sz="1200" dirty="0">
+              <a:t>class </a:t>
+            </a:r>
+            <a:r>
+              <a:rPr lang="en-US" sz="1200" dirty="0" err="1">
                 <a:solidFill>
                   <a:srgbClr val="F4F7FA"/>
                 </a:solidFill>
@@ -14557,14 +15996,8 @@
                 <a:ea typeface="Consolas" pitchFamily="34" charset="-122"/>
                 <a:cs typeface="Consolas" pitchFamily="34" charset="-120"/>
               </a:rPr>
-              <a:t>    Article save(Article a) {</a:t>
-            </a:r>
-            <a:endParaRPr lang="en-US" sz="1200" dirty="0"/>
-          </a:p>
-          <a:p>
-            <a:pPr marL="0" indent="0">
-              <a:buNone/>
-            </a:pPr>
+              <a:t>ArticleService</a:t>
+            </a:r>
             <a:r>
               <a:rPr lang="en-US" sz="1200" dirty="0">
                 <a:solidFill>
@@ -14574,60 +16007,380 @@
                 <a:ea typeface="Consolas" pitchFamily="34" charset="-122"/>
                 <a:cs typeface="Consolas" pitchFamily="34" charset="-120"/>
               </a:rPr>
-              <a:t>        String input = a.title() + "\n" + a.content();</a:t>
-            </a:r>
-            <a:endParaRPr lang="en-US" sz="1200" dirty="0"/>
-          </a:p>
-          <a:p>
-            <a:pPr marL="0" indent="0">
-              <a:buNone/>
-            </a:pPr>
+              <a:t> {</a:t>
+            </a:r>
+            <a:endParaRPr lang="pl-PL" sz="1200" dirty="0">
+              <a:solidFill>
+                <a:srgbClr val="F4F7FA"/>
+              </a:solidFill>
+              <a:latin typeface="Consolas" pitchFamily="34" charset="0"/>
+              <a:ea typeface="Consolas" pitchFamily="34" charset="-122"/>
+              <a:cs typeface="Consolas" pitchFamily="34" charset="-120"/>
+            </a:endParaRPr>
+          </a:p>
+          <a:p>
+            <a:r>
+              <a:rPr lang="pl-PL" sz="1200" dirty="0">
+                <a:solidFill>
+                  <a:srgbClr val="F4F7FA"/>
+                </a:solidFill>
+                <a:latin typeface="Consolas" pitchFamily="34" charset="0"/>
+              </a:rPr>
+              <a:t> </a:t>
+            </a:r>
             <a:r>
               <a:rPr lang="en-US" sz="1200" dirty="0">
                 <a:solidFill>
                   <a:srgbClr val="F4F7FA"/>
                 </a:solidFill>
                 <a:latin typeface="Consolas" pitchFamily="34" charset="0"/>
-                <a:ea typeface="Consolas" pitchFamily="34" charset="-122"/>
-                <a:cs typeface="Consolas" pitchFamily="34" charset="-120"/>
-              </a:rPr>
-              <a:t>        return repository.save(a.withEmbedding(</a:t>
-            </a:r>
-            <a:endParaRPr lang="en-US" sz="1200" dirty="0"/>
-          </a:p>
-          <a:p>
-            <a:pPr marL="0" indent="0">
-              <a:buNone/>
-            </a:pPr>
+              </a:rPr>
+              <a:t>public long create(</a:t>
+            </a:r>
+            <a:r>
+              <a:rPr lang="en-US" sz="1200" dirty="0" err="1">
+                <a:solidFill>
+                  <a:srgbClr val="F4F7FA"/>
+                </a:solidFill>
+                <a:latin typeface="Consolas" pitchFamily="34" charset="0"/>
+              </a:rPr>
+              <a:t>CreateArticleRequest</a:t>
+            </a:r>
             <a:r>
               <a:rPr lang="en-US" sz="1200" dirty="0">
                 <a:solidFill>
                   <a:srgbClr val="F4F7FA"/>
                 </a:solidFill>
                 <a:latin typeface="Consolas" pitchFamily="34" charset="0"/>
-                <a:ea typeface="Consolas" pitchFamily="34" charset="-122"/>
-                <a:cs typeface="Consolas" pitchFamily="34" charset="-120"/>
-              </a:rPr>
-              <a:t>            embeddingClient.embed(input)));</a:t>
-            </a:r>
-            <a:endParaRPr lang="en-US" sz="1200" dirty="0"/>
-          </a:p>
-          <a:p>
-            <a:pPr marL="0" indent="0">
-              <a:buNone/>
-            </a:pPr>
-            <a:r>
+              </a:rPr>
+              <a:t> request) {</a:t>
+            </a:r>
+            <a:br>
               <a:rPr lang="en-US" sz="1200" dirty="0">
                 <a:solidFill>
                   <a:srgbClr val="F4F7FA"/>
                 </a:solidFill>
                 <a:latin typeface="Consolas" pitchFamily="34" charset="0"/>
-                <a:ea typeface="Consolas" pitchFamily="34" charset="-122"/>
-                <a:cs typeface="Consolas" pitchFamily="34" charset="-120"/>
-              </a:rPr>
-              <a:t>    }</a:t>
-            </a:r>
-            <a:endParaRPr lang="en-US" sz="1200" dirty="0"/>
+              </a:rPr>
+            </a:br>
+            <a:r>
+              <a:rPr lang="en-US" sz="1200" dirty="0">
+                <a:solidFill>
+                  <a:srgbClr val="F4F7FA"/>
+                </a:solidFill>
+                <a:latin typeface="Consolas" pitchFamily="34" charset="0"/>
+              </a:rPr>
+              <a:t>  var </a:t>
+            </a:r>
+            <a:r>
+              <a:rPr lang="en-US" sz="1200" dirty="0" err="1">
+                <a:solidFill>
+                  <a:srgbClr val="F4F7FA"/>
+                </a:solidFill>
+                <a:latin typeface="Consolas" pitchFamily="34" charset="0"/>
+              </a:rPr>
+              <a:t>textToEmbed</a:t>
+            </a:r>
+            <a:r>
+              <a:rPr lang="en-US" sz="1200" dirty="0">
+                <a:solidFill>
+                  <a:srgbClr val="F4F7FA"/>
+                </a:solidFill>
+                <a:latin typeface="Consolas" pitchFamily="34" charset="0"/>
+              </a:rPr>
+              <a:t> = </a:t>
+            </a:r>
+            <a:r>
+              <a:rPr lang="en-US" sz="1200" dirty="0" err="1">
+                <a:solidFill>
+                  <a:srgbClr val="F4F7FA"/>
+                </a:solidFill>
+                <a:latin typeface="Consolas" pitchFamily="34" charset="0"/>
+              </a:rPr>
+              <a:t>request.title</a:t>
+            </a:r>
+            <a:r>
+              <a:rPr lang="en-US" sz="1200" dirty="0">
+                <a:solidFill>
+                  <a:srgbClr val="F4F7FA"/>
+                </a:solidFill>
+                <a:latin typeface="Consolas" pitchFamily="34" charset="0"/>
+              </a:rPr>
+              <a:t>() + "\n" + </a:t>
+            </a:r>
+            <a:r>
+              <a:rPr lang="en-US" sz="1200" dirty="0" err="1">
+                <a:solidFill>
+                  <a:srgbClr val="F4F7FA"/>
+                </a:solidFill>
+                <a:latin typeface="Consolas" pitchFamily="34" charset="0"/>
+              </a:rPr>
+              <a:t>request.content</a:t>
+            </a:r>
+            <a:r>
+              <a:rPr lang="en-US" sz="1200" dirty="0">
+                <a:solidFill>
+                  <a:srgbClr val="F4F7FA"/>
+                </a:solidFill>
+                <a:latin typeface="Consolas" pitchFamily="34" charset="0"/>
+              </a:rPr>
+              <a:t>();</a:t>
+            </a:r>
+            <a:br>
+              <a:rPr lang="en-US" sz="1200" dirty="0">
+                <a:solidFill>
+                  <a:srgbClr val="F4F7FA"/>
+                </a:solidFill>
+                <a:latin typeface="Consolas" pitchFamily="34" charset="0"/>
+              </a:rPr>
+            </a:br>
+            <a:r>
+              <a:rPr lang="en-US" sz="1200" dirty="0">
+                <a:solidFill>
+                  <a:srgbClr val="F4F7FA"/>
+                </a:solidFill>
+                <a:latin typeface="Consolas" pitchFamily="34" charset="0"/>
+              </a:rPr>
+              <a:t>  var embedding = </a:t>
+            </a:r>
+            <a:r>
+              <a:rPr lang="en-US" sz="1200" dirty="0" err="1">
+                <a:solidFill>
+                  <a:srgbClr val="F4F7FA"/>
+                </a:solidFill>
+                <a:latin typeface="Consolas" pitchFamily="34" charset="0"/>
+              </a:rPr>
+              <a:t>embeddingClient.embed</a:t>
+            </a:r>
+            <a:r>
+              <a:rPr lang="en-US" sz="1200" dirty="0">
+                <a:solidFill>
+                  <a:srgbClr val="F4F7FA"/>
+                </a:solidFill>
+                <a:latin typeface="Consolas" pitchFamily="34" charset="0"/>
+              </a:rPr>
+              <a:t>(</a:t>
+            </a:r>
+            <a:r>
+              <a:rPr lang="en-US" sz="1200" dirty="0" err="1">
+                <a:solidFill>
+                  <a:srgbClr val="F4F7FA"/>
+                </a:solidFill>
+                <a:latin typeface="Consolas" pitchFamily="34" charset="0"/>
+              </a:rPr>
+              <a:t>textToEmbed</a:t>
+            </a:r>
+            <a:r>
+              <a:rPr lang="en-US" sz="1200" dirty="0">
+                <a:solidFill>
+                  <a:srgbClr val="F4F7FA"/>
+                </a:solidFill>
+                <a:latin typeface="Consolas" pitchFamily="34" charset="0"/>
+              </a:rPr>
+              <a:t>);</a:t>
+            </a:r>
+            <a:br>
+              <a:rPr lang="en-US" sz="1200" dirty="0">
+                <a:solidFill>
+                  <a:srgbClr val="F4F7FA"/>
+                </a:solidFill>
+                <a:latin typeface="Consolas" pitchFamily="34" charset="0"/>
+              </a:rPr>
+            </a:br>
+            <a:r>
+              <a:rPr lang="en-US" sz="1200" dirty="0">
+                <a:solidFill>
+                  <a:srgbClr val="F4F7FA"/>
+                </a:solidFill>
+                <a:latin typeface="Consolas" pitchFamily="34" charset="0"/>
+              </a:rPr>
+              <a:t>  var article =</a:t>
+            </a:r>
+            <a:br>
+              <a:rPr lang="en-US" sz="1200" dirty="0">
+                <a:solidFill>
+                  <a:srgbClr val="F4F7FA"/>
+                </a:solidFill>
+                <a:latin typeface="Consolas" pitchFamily="34" charset="0"/>
+              </a:rPr>
+            </a:br>
+            <a:r>
+              <a:rPr lang="en-US" sz="1200" dirty="0">
+                <a:solidFill>
+                  <a:srgbClr val="F4F7FA"/>
+                </a:solidFill>
+                <a:latin typeface="Consolas" pitchFamily="34" charset="0"/>
+              </a:rPr>
+              <a:t>      </a:t>
+            </a:r>
+            <a:r>
+              <a:rPr lang="en-US" sz="1200" dirty="0" err="1">
+                <a:solidFill>
+                  <a:srgbClr val="F4F7FA"/>
+                </a:solidFill>
+                <a:latin typeface="Consolas" pitchFamily="34" charset="0"/>
+              </a:rPr>
+              <a:t>repository.save</a:t>
+            </a:r>
+            <a:r>
+              <a:rPr lang="en-US" sz="1200" dirty="0">
+                <a:solidFill>
+                  <a:srgbClr val="F4F7FA"/>
+                </a:solidFill>
+                <a:latin typeface="Consolas" pitchFamily="34" charset="0"/>
+              </a:rPr>
+              <a:t>(</a:t>
+            </a:r>
+            <a:br>
+              <a:rPr lang="en-US" sz="1200" dirty="0">
+                <a:solidFill>
+                  <a:srgbClr val="F4F7FA"/>
+                </a:solidFill>
+                <a:latin typeface="Consolas" pitchFamily="34" charset="0"/>
+              </a:rPr>
+            </a:br>
+            <a:r>
+              <a:rPr lang="en-US" sz="1200" dirty="0">
+                <a:solidFill>
+                  <a:srgbClr val="F4F7FA"/>
+                </a:solidFill>
+                <a:latin typeface="Consolas" pitchFamily="34" charset="0"/>
+              </a:rPr>
+              <a:t>          new </a:t>
+            </a:r>
+            <a:r>
+              <a:rPr lang="en-US" sz="1200" dirty="0" err="1">
+                <a:solidFill>
+                  <a:srgbClr val="F4F7FA"/>
+                </a:solidFill>
+                <a:latin typeface="Consolas" pitchFamily="34" charset="0"/>
+              </a:rPr>
+              <a:t>ArticleEntity</a:t>
+            </a:r>
+            <a:r>
+              <a:rPr lang="en-US" sz="1200" dirty="0">
+                <a:solidFill>
+                  <a:srgbClr val="F4F7FA"/>
+                </a:solidFill>
+                <a:latin typeface="Consolas" pitchFamily="34" charset="0"/>
+              </a:rPr>
+              <a:t>(</a:t>
+            </a:r>
+            <a:r>
+              <a:rPr lang="en-US" sz="1200" dirty="0" err="1">
+                <a:solidFill>
+                  <a:srgbClr val="F4F7FA"/>
+                </a:solidFill>
+                <a:latin typeface="Consolas" pitchFamily="34" charset="0"/>
+              </a:rPr>
+              <a:t>request.title</a:t>
+            </a:r>
+            <a:r>
+              <a:rPr lang="en-US" sz="1200" dirty="0">
+                <a:solidFill>
+                  <a:srgbClr val="F4F7FA"/>
+                </a:solidFill>
+                <a:latin typeface="Consolas" pitchFamily="34" charset="0"/>
+              </a:rPr>
+              <a:t>(), </a:t>
+            </a:r>
+            <a:r>
+              <a:rPr lang="en-US" sz="1200" dirty="0" err="1">
+                <a:solidFill>
+                  <a:srgbClr val="F4F7FA"/>
+                </a:solidFill>
+                <a:latin typeface="Consolas" pitchFamily="34" charset="0"/>
+              </a:rPr>
+              <a:t>request.content</a:t>
+            </a:r>
+            <a:r>
+              <a:rPr lang="en-US" sz="1200" dirty="0">
+                <a:solidFill>
+                  <a:srgbClr val="F4F7FA"/>
+                </a:solidFill>
+                <a:latin typeface="Consolas" pitchFamily="34" charset="0"/>
+              </a:rPr>
+              <a:t>(),</a:t>
+            </a:r>
+            <a:r>
+              <a:rPr lang="pl-PL" sz="1200" dirty="0">
+                <a:solidFill>
+                  <a:srgbClr val="F4F7FA"/>
+                </a:solidFill>
+                <a:latin typeface="Consolas" pitchFamily="34" charset="0"/>
+              </a:rPr>
+              <a:t> </a:t>
+            </a:r>
+            <a:r>
+              <a:rPr lang="en-US" sz="1200" dirty="0" err="1">
+                <a:solidFill>
+                  <a:srgbClr val="F4F7FA"/>
+                </a:solidFill>
+                <a:latin typeface="Consolas" pitchFamily="34" charset="0"/>
+              </a:rPr>
+              <a:t>request.category</a:t>
+            </a:r>
+            <a:r>
+              <a:rPr lang="en-US" sz="1200" dirty="0">
+                <a:solidFill>
+                  <a:srgbClr val="F4F7FA"/>
+                </a:solidFill>
+                <a:latin typeface="Consolas" pitchFamily="34" charset="0"/>
+              </a:rPr>
+              <a:t>(), embedding));</a:t>
+            </a:r>
+            <a:br>
+              <a:rPr lang="en-US" sz="1200" dirty="0">
+                <a:solidFill>
+                  <a:srgbClr val="F4F7FA"/>
+                </a:solidFill>
+                <a:latin typeface="Consolas" pitchFamily="34" charset="0"/>
+              </a:rPr>
+            </a:br>
+            <a:r>
+              <a:rPr lang="en-US" sz="1200" dirty="0">
+                <a:solidFill>
+                  <a:srgbClr val="F4F7FA"/>
+                </a:solidFill>
+                <a:latin typeface="Consolas" pitchFamily="34" charset="0"/>
+              </a:rPr>
+              <a:t>  return </a:t>
+            </a:r>
+            <a:r>
+              <a:rPr lang="en-US" sz="1200" dirty="0" err="1">
+                <a:solidFill>
+                  <a:srgbClr val="F4F7FA"/>
+                </a:solidFill>
+                <a:latin typeface="Consolas" pitchFamily="34" charset="0"/>
+              </a:rPr>
+              <a:t>article.getId</a:t>
+            </a:r>
+            <a:r>
+              <a:rPr lang="en-US" sz="1200" dirty="0">
+                <a:solidFill>
+                  <a:srgbClr val="F4F7FA"/>
+                </a:solidFill>
+                <a:latin typeface="Consolas" pitchFamily="34" charset="0"/>
+              </a:rPr>
+              <a:t>();</a:t>
+            </a:r>
+            <a:br>
+              <a:rPr lang="en-US" sz="1200" dirty="0">
+                <a:solidFill>
+                  <a:srgbClr val="F4F7FA"/>
+                </a:solidFill>
+                <a:latin typeface="Consolas" pitchFamily="34" charset="0"/>
+              </a:rPr>
+            </a:br>
+            <a:r>
+              <a:rPr lang="en-US" sz="1200" dirty="0">
+                <a:solidFill>
+                  <a:srgbClr val="F4F7FA"/>
+                </a:solidFill>
+                <a:latin typeface="Consolas" pitchFamily="34" charset="0"/>
+              </a:rPr>
+              <a:t>}</a:t>
+            </a:r>
           </a:p>
           <a:p>
             <a:pPr marL="0" indent="0">
@@ -14850,7 +16603,40 @@
                 <a:ea typeface="Aptos" pitchFamily="34" charset="-122"/>
                 <a:cs typeface="Aptos" pitchFamily="34" charset="-120"/>
               </a:rPr>
-              <a:t>Alternatywa: Spring AI, ONNX Runtime lub zewnętrzne API.</a:t>
+              <a:t>Alternatywa: Spring AI</a:t>
+            </a:r>
+            <a:r>
+              <a:rPr lang="pl-PL" sz="1500" dirty="0">
+                <a:solidFill>
+                  <a:srgbClr val="22313F"/>
+                </a:solidFill>
+                <a:latin typeface="Aptos" pitchFamily="34" charset="0"/>
+                <a:ea typeface="Aptos" pitchFamily="34" charset="-122"/>
+                <a:cs typeface="Aptos" pitchFamily="34" charset="-120"/>
+              </a:rPr>
+              <a:t> + </a:t>
+            </a:r>
+            <a:r>
+              <a:rPr lang="en-US" sz="1500" dirty="0" err="1">
+                <a:solidFill>
+                  <a:srgbClr val="22313F"/>
+                </a:solidFill>
+                <a:latin typeface="Aptos" pitchFamily="34" charset="0"/>
+                <a:ea typeface="Aptos" pitchFamily="34" charset="-122"/>
+                <a:cs typeface="Aptos" pitchFamily="34" charset="-120"/>
+              </a:rPr>
+              <a:t>zewnętrzne</a:t>
+            </a:r>
+            <a:r>
+              <a:rPr lang="en-US" sz="1500" dirty="0">
+                <a:solidFill>
+                  <a:srgbClr val="22313F"/>
+                </a:solidFill>
+                <a:latin typeface="Aptos" pitchFamily="34" charset="0"/>
+                <a:ea typeface="Aptos" pitchFamily="34" charset="-122"/>
+                <a:cs typeface="Aptos" pitchFamily="34" charset="-120"/>
+              </a:rPr>
+              <a:t> API</a:t>
             </a:r>
             <a:endParaRPr lang="en-US" sz="1500" dirty="0"/>
           </a:p>
@@ -14864,8 +16650,8 @@
         </p:nvSpPr>
         <p:spPr>
           <a:xfrm>
-            <a:off x="7315200" y="5166360"/>
-            <a:ext cx="3931920" cy="457200"/>
+            <a:off x="790615" y="5671146"/>
+            <a:ext cx="6126479" cy="457200"/>
           </a:xfrm>
           <a:prstGeom prst="rect">
             <a:avLst/>
@@ -14875,7 +16661,7 @@
         </p:spPr>
         <p:txBody>
           <a:bodyPr wrap="square" lIns="508" tIns="508" rIns="508" bIns="508" rtlCol="0" anchor="ctr">
-            <a:normAutofit lnSpcReduction="10000"/>
+            <a:normAutofit/>
           </a:bodyPr>
           <a:lstStyle/>
           <a:p>
@@ -14917,7 +16703,7 @@
           </a:prstGeom>
           <a:extLst>
             <a:ext uri="{C572A759-6A51-4108-AA02-DFA0A04FC94B}">
-              <ma14:wrappingTextBoxFlag xmlns:ma14="http://schemas.microsoft.com/office/mac/drawingml/2011/main" xmlns="" val="0"/>
+              <ma14:wrappingTextBoxFlag xmlns="" xmlns:ma14="http://schemas.microsoft.com/office/mac/drawingml/2011/main" val="0"/>
             </a:ext>
           </a:extLst>
         </p:spPr>
@@ -14939,7 +16725,7 @@
             <a:pPr algn="l"/>
             <a:fld id="{F7021451-1387-4CA6-816F-3879F97B5CBC}" type="slidenum">
               <a:rPr lang="en-US" b="0"/>
-              <a:t>7</a:t>
+              <a:t>8</a:t>
             </a:fld>
             <a:endParaRPr lang="en-US"/>
           </a:p>
@@ -14953,7 +16739,7 @@
 </p:sld>
 </file>
 
-<file path=ppt/slides/slide8.xml><?xml version="1.0" encoding="utf-8"?>
+<file path=ppt/slides/slide9.xml><?xml version="1.0" encoding="utf-8"?>
 <p:sld xmlns:a="http://schemas.openxmlformats.org/drawingml/2006/main" xmlns:r="http://schemas.openxmlformats.org/officeDocument/2006/relationships" xmlns:p="http://schemas.openxmlformats.org/presentationml/2006/main">
   <p:cSld name="Slide 8">
     <p:bg>
@@ -15615,8 +17401,8 @@
         </p:nvSpPr>
         <p:spPr>
           <a:xfrm>
-            <a:off x="731520" y="4800600"/>
-            <a:ext cx="6400800" cy="365760"/>
+            <a:off x="685800" y="4483732"/>
+            <a:ext cx="5994918" cy="365760"/>
           </a:xfrm>
           <a:prstGeom prst="rect">
             <a:avLst/>
@@ -15668,7 +17454,7 @@
           </a:prstGeom>
           <a:extLst>
             <a:ext uri="{C572A759-6A51-4108-AA02-DFA0A04FC94B}">
-              <ma14:wrappingTextBoxFlag xmlns:ma14="http://schemas.microsoft.com/office/mac/drawingml/2011/main" xmlns="" val="0"/>
+              <ma14:wrappingTextBoxFlag xmlns="" xmlns:ma14="http://schemas.microsoft.com/office/mac/drawingml/2011/main" val="0"/>
             </a:ext>
           </a:extLst>
         </p:spPr>
@@ -15690,724 +17476,361 @@
             <a:pPr algn="l"/>
             <a:fld id="{F7021451-1387-4CA6-816F-3879F97B5CBC}" type="slidenum">
               <a:rPr lang="en-US" b="0"/>
-              <a:t>8</a:t>
-            </a:fld>
-            <a:endParaRPr lang="en-US"/>
-          </a:p>
-        </p:txBody>
-      </p:sp>
-    </p:spTree>
-  </p:cSld>
-  <p:clrMapOvr>
-    <a:masterClrMapping/>
-  </p:clrMapOvr>
-</p:sld>
-</file>
-
-<file path=ppt/slides/slide9.xml><?xml version="1.0" encoding="utf-8"?>
-<p:sld xmlns:a="http://schemas.openxmlformats.org/drawingml/2006/main" xmlns:r="http://schemas.openxmlformats.org/officeDocument/2006/relationships" xmlns:p="http://schemas.openxmlformats.org/presentationml/2006/main">
-  <p:cSld name="Slide 9">
-    <p:bg>
-      <p:bgPr>
-        <a:solidFill>
-          <a:srgbClr val="FFFFFF"/>
-        </a:solidFill>
-        <a:effectLst/>
-      </p:bgPr>
-    </p:bg>
-    <p:spTree>
-      <p:nvGrpSpPr>
-        <p:cNvPr id="1" name=""/>
-        <p:cNvGrpSpPr/>
-        <p:nvPr/>
-      </p:nvGrpSpPr>
-      <p:grpSpPr>
-        <a:xfrm>
-          <a:off x="0" y="0"/>
-          <a:ext cx="0" cy="0"/>
-          <a:chOff x="0" y="0"/>
-          <a:chExt cx="0" cy="0"/>
-        </a:xfrm>
-      </p:grpSpPr>
-      <p:sp>
-        <p:nvSpPr>
-          <p:cNvPr id="2" name="Text 0"/>
-          <p:cNvSpPr/>
-          <p:nvPr/>
-        </p:nvSpPr>
-        <p:spPr>
-          <a:xfrm>
-            <a:off x="548640" y="320040"/>
-            <a:ext cx="3291840" cy="201168"/>
-          </a:xfrm>
-          <a:prstGeom prst="rect">
-            <a:avLst/>
-          </a:prstGeom>
-          <a:noFill/>
-          <a:ln/>
-        </p:spPr>
-        <p:txBody>
-          <a:bodyPr wrap="square" lIns="0" tIns="0" rIns="0" bIns="0" rtlCol="0" anchor="ctr"/>
-          <a:lstStyle/>
-          <a:p>
-            <a:pPr marL="0" indent="0">
-              <a:buNone/>
-            </a:pPr>
-            <a:r>
-              <a:rPr lang="en-US" sz="800" b="1" kern="0" spc="120" dirty="0">
-                <a:solidFill>
-                  <a:srgbClr val="E97132"/>
-                </a:solidFill>
-                <a:latin typeface="Aptos" pitchFamily="34" charset="0"/>
-                <a:ea typeface="Aptos" pitchFamily="34" charset="-122"/>
-                <a:cs typeface="Aptos" pitchFamily="34" charset="-120"/>
-              </a:rPr>
-              <a:t>JEDNO ZAPYTANIE, DWA SPOSOBY SZUKANIA</a:t>
-            </a:r>
-            <a:endParaRPr lang="en-US" sz="800" dirty="0"/>
-          </a:p>
-        </p:txBody>
-      </p:sp>
-      <p:sp>
-        <p:nvSpPr>
-          <p:cNvPr id="3" name="Text 1"/>
-          <p:cNvSpPr/>
-          <p:nvPr/>
-        </p:nvSpPr>
-        <p:spPr>
-          <a:xfrm>
-            <a:off x="548640" y="612648"/>
-            <a:ext cx="10972800" cy="438912"/>
-          </a:xfrm>
-          <a:prstGeom prst="rect">
-            <a:avLst/>
-          </a:prstGeom>
-          <a:noFill/>
-          <a:ln/>
-        </p:spPr>
-        <p:txBody>
-          <a:bodyPr wrap="square" lIns="0" tIns="0" rIns="0" bIns="0" rtlCol="0" anchor="ctr">
-            <a:normAutofit/>
-          </a:bodyPr>
-          <a:lstStyle/>
-          <a:p>
-            <a:pPr marL="0" indent="0">
-              <a:buNone/>
-            </a:pPr>
-            <a:r>
-              <a:rPr lang="en-US" sz="2600" b="1" dirty="0">
-                <a:solidFill>
-                  <a:srgbClr val="0E2841"/>
-                </a:solidFill>
-                <a:latin typeface="Aptos Display" pitchFamily="34" charset="0"/>
-                <a:ea typeface="Aptos Display" pitchFamily="34" charset="-122"/>
-                <a:cs typeface="Aptos Display" pitchFamily="34" charset="-120"/>
-              </a:rPr>
-              <a:t>Praktyczny przykład</a:t>
-            </a:r>
-            <a:endParaRPr lang="en-US" sz="2600" dirty="0"/>
-          </a:p>
-        </p:txBody>
-      </p:sp>
-      <p:sp>
-        <p:nvSpPr>
-          <p:cNvPr id="4" name="Text 2"/>
-          <p:cNvSpPr/>
-          <p:nvPr/>
-        </p:nvSpPr>
-        <p:spPr>
-          <a:xfrm>
-            <a:off x="640080" y="1143000"/>
-            <a:ext cx="9601200" cy="365760"/>
-          </a:xfrm>
-          <a:prstGeom prst="rect">
-            <a:avLst/>
-          </a:prstGeom>
-          <a:noFill/>
-          <a:ln/>
-        </p:spPr>
-        <p:txBody>
-          <a:bodyPr wrap="square" lIns="508" tIns="508" rIns="508" bIns="508" rtlCol="0" anchor="ctr">
-            <a:normAutofit/>
-          </a:bodyPr>
-          <a:lstStyle/>
-          <a:p>
-            <a:pPr marL="0" indent="0" algn="l">
-              <a:buNone/>
-            </a:pPr>
-            <a:r>
-              <a:rPr lang="en-US" sz="2000" b="1" dirty="0">
-                <a:solidFill>
-                  <a:srgbClr val="0E2841"/>
-                </a:solidFill>
-                <a:latin typeface="Aptos" pitchFamily="34" charset="0"/>
-                <a:ea typeface="Aptos" pitchFamily="34" charset="-122"/>
-                <a:cs typeface="Aptos" pitchFamily="34" charset="-120"/>
-              </a:rPr>
-              <a:t>Zapytanie: „aplikacja ma za mało połączeń do bazy”</a:t>
-            </a:r>
-            <a:endParaRPr lang="en-US" sz="2000" dirty="0"/>
-          </a:p>
-        </p:txBody>
-      </p:sp>
-      <p:sp>
-        <p:nvSpPr>
-          <p:cNvPr id="5" name="Shape 3"/>
-          <p:cNvSpPr/>
-          <p:nvPr/>
-        </p:nvSpPr>
-        <p:spPr>
-          <a:xfrm>
-            <a:off x="685800" y="1828800"/>
-            <a:ext cx="5074920" cy="2560320"/>
-          </a:xfrm>
-          <a:prstGeom prst="roundRect">
-            <a:avLst>
-              <a:gd name="adj" fmla="val 4286"/>
-            </a:avLst>
-          </a:prstGeom>
-          <a:solidFill>
-            <a:srgbClr val="F7F9FB"/>
-          </a:solidFill>
-          <a:ln w="12700">
-            <a:solidFill>
-              <a:srgbClr val="D9E2F3"/>
-            </a:solidFill>
-            <a:prstDash val="solid"/>
-          </a:ln>
-        </p:spPr>
-        <p:txBody>
-          <a:bodyPr/>
-          <a:lstStyle/>
-          <a:p>
-            <a:endParaRPr lang="en-US"/>
-          </a:p>
-        </p:txBody>
-      </p:sp>
-      <p:sp>
-        <p:nvSpPr>
-          <p:cNvPr id="6" name="Text 4"/>
-          <p:cNvSpPr/>
-          <p:nvPr/>
-        </p:nvSpPr>
-        <p:spPr>
-          <a:xfrm>
-            <a:off x="960120" y="2103120"/>
-            <a:ext cx="2194560" cy="228600"/>
-          </a:xfrm>
-          <a:prstGeom prst="rect">
-            <a:avLst/>
-          </a:prstGeom>
-          <a:noFill/>
-          <a:ln/>
-        </p:spPr>
-        <p:txBody>
-          <a:bodyPr wrap="square" lIns="508" tIns="508" rIns="508" bIns="508" rtlCol="0" anchor="ctr">
-            <a:normAutofit/>
-          </a:bodyPr>
-          <a:lstStyle/>
-          <a:p>
-            <a:pPr marL="0" indent="0" algn="l">
-              <a:buNone/>
-            </a:pPr>
-            <a:r>
-              <a:rPr lang="en-US" sz="1100" b="1" dirty="0">
-                <a:solidFill>
-                  <a:srgbClr val="E97132"/>
-                </a:solidFill>
-                <a:latin typeface="Aptos" pitchFamily="34" charset="0"/>
-                <a:ea typeface="Aptos" pitchFamily="34" charset="-122"/>
-                <a:cs typeface="Aptos" pitchFamily="34" charset="-120"/>
-              </a:rPr>
-              <a:t>Keyword / ILIKE</a:t>
-            </a:r>
-            <a:endParaRPr lang="en-US" sz="1100" dirty="0"/>
-          </a:p>
-        </p:txBody>
-      </p:sp>
-      <p:sp>
-        <p:nvSpPr>
-          <p:cNvPr id="7" name="Shape 5"/>
-          <p:cNvSpPr/>
-          <p:nvPr/>
-        </p:nvSpPr>
-        <p:spPr>
-          <a:xfrm>
-            <a:off x="960120" y="2542032"/>
-            <a:ext cx="4297680" cy="731520"/>
-          </a:xfrm>
-          <a:prstGeom prst="roundRect">
-            <a:avLst>
-              <a:gd name="adj" fmla="val 10000"/>
-            </a:avLst>
-          </a:prstGeom>
-          <a:solidFill>
-            <a:srgbClr val="0E2841"/>
-          </a:solidFill>
-          <a:ln w="12700">
-            <a:solidFill>
-              <a:srgbClr val="0E2841"/>
-            </a:solidFill>
-            <a:prstDash val="solid"/>
-          </a:ln>
-        </p:spPr>
-        <p:txBody>
-          <a:bodyPr/>
-          <a:lstStyle/>
-          <a:p>
-            <a:endParaRPr lang="en-US"/>
-          </a:p>
-        </p:txBody>
-      </p:sp>
-      <p:sp>
-        <p:nvSpPr>
-          <p:cNvPr id="8" name="Text 6"/>
-          <p:cNvSpPr/>
-          <p:nvPr/>
-        </p:nvSpPr>
-        <p:spPr>
-          <a:xfrm>
-            <a:off x="1106424" y="2651760"/>
-            <a:ext cx="4023360" cy="548640"/>
-          </a:xfrm>
-          <a:prstGeom prst="rect">
-            <a:avLst/>
-          </a:prstGeom>
-          <a:noFill/>
-          <a:ln/>
-        </p:spPr>
-        <p:txBody>
-          <a:bodyPr wrap="square" lIns="0" tIns="0" rIns="0" bIns="0" rtlCol="0" anchor="t">
-            <a:normAutofit/>
-          </a:bodyPr>
-          <a:lstStyle/>
-          <a:p>
-            <a:pPr marL="0" indent="0">
-              <a:buNone/>
-            </a:pPr>
-            <a:r>
-              <a:rPr lang="en-US" sz="1200" dirty="0">
-                <a:solidFill>
-                  <a:srgbClr val="F4F7FA"/>
-                </a:solidFill>
-                <a:latin typeface="Consolas" pitchFamily="34" charset="0"/>
-                <a:ea typeface="Consolas" pitchFamily="34" charset="-122"/>
-                <a:cs typeface="Consolas" pitchFamily="34" charset="-120"/>
-              </a:rPr>
-              <a:t>WHERE content ILIKE '%połączeń do bazy%'</a:t>
-            </a:r>
-            <a:endParaRPr lang="en-US" sz="1200" dirty="0"/>
-          </a:p>
-        </p:txBody>
-      </p:sp>
-      <p:sp>
-        <p:nvSpPr>
-          <p:cNvPr id="9" name="Text 7"/>
-          <p:cNvSpPr/>
-          <p:nvPr/>
-        </p:nvSpPr>
-        <p:spPr>
-          <a:xfrm>
-            <a:off x="960120" y="3703320"/>
-            <a:ext cx="4297680" cy="256032"/>
-          </a:xfrm>
-          <a:prstGeom prst="rect">
-            <a:avLst/>
-          </a:prstGeom>
-          <a:noFill/>
-          <a:ln/>
-        </p:spPr>
-        <p:txBody>
-          <a:bodyPr wrap="square" lIns="508" tIns="508" rIns="508" bIns="508" rtlCol="0" anchor="ctr">
-            <a:normAutofit/>
-          </a:bodyPr>
-          <a:lstStyle/>
-          <a:p>
-            <a:pPr marL="0" indent="0" algn="l">
-              <a:buNone/>
-            </a:pPr>
-            <a:r>
-              <a:rPr lang="en-US" sz="1400" dirty="0">
-                <a:solidFill>
-                  <a:srgbClr val="607080"/>
-                </a:solidFill>
-                <a:latin typeface="Aptos" pitchFamily="34" charset="0"/>
-                <a:ea typeface="Aptos" pitchFamily="34" charset="-122"/>
-                <a:cs typeface="Aptos" pitchFamily="34" charset="-120"/>
-              </a:rPr>
-              <a:t>wynik zależy od dokładnych słów</a:t>
-            </a:r>
-            <a:endParaRPr lang="en-US" sz="1400" dirty="0"/>
-          </a:p>
-        </p:txBody>
-      </p:sp>
-      <p:sp>
-        <p:nvSpPr>
-          <p:cNvPr id="10" name="Shape 8"/>
-          <p:cNvSpPr/>
-          <p:nvPr/>
-        </p:nvSpPr>
-        <p:spPr>
-          <a:xfrm>
-            <a:off x="6400800" y="1828800"/>
-            <a:ext cx="5074920" cy="2560320"/>
-          </a:xfrm>
-          <a:prstGeom prst="roundRect">
-            <a:avLst>
-              <a:gd name="adj" fmla="val 4286"/>
-            </a:avLst>
-          </a:prstGeom>
-          <a:solidFill>
-            <a:srgbClr val="F7F9FB"/>
-          </a:solidFill>
-          <a:ln w="12700">
-            <a:solidFill>
-              <a:srgbClr val="D9E2F3"/>
-            </a:solidFill>
-            <a:prstDash val="solid"/>
-          </a:ln>
-        </p:spPr>
-        <p:txBody>
-          <a:bodyPr/>
-          <a:lstStyle/>
-          <a:p>
-            <a:endParaRPr lang="en-US"/>
-          </a:p>
-        </p:txBody>
-      </p:sp>
-      <p:sp>
-        <p:nvSpPr>
-          <p:cNvPr id="11" name="Text 9"/>
-          <p:cNvSpPr/>
-          <p:nvPr/>
-        </p:nvSpPr>
-        <p:spPr>
-          <a:xfrm>
-            <a:off x="6675120" y="2103120"/>
-            <a:ext cx="2194560" cy="228600"/>
-          </a:xfrm>
-          <a:prstGeom prst="rect">
-            <a:avLst/>
-          </a:prstGeom>
-          <a:noFill/>
-          <a:ln/>
-        </p:spPr>
-        <p:txBody>
-          <a:bodyPr wrap="square" lIns="508" tIns="508" rIns="508" bIns="508" rtlCol="0" anchor="ctr">
-            <a:normAutofit/>
-          </a:bodyPr>
-          <a:lstStyle/>
-          <a:p>
-            <a:pPr marL="0" indent="0" algn="l">
-              <a:buNone/>
-            </a:pPr>
-            <a:r>
-              <a:rPr lang="en-US" sz="1100" b="1" dirty="0">
-                <a:solidFill>
-                  <a:srgbClr val="156082"/>
-                </a:solidFill>
-                <a:latin typeface="Aptos" pitchFamily="34" charset="0"/>
-                <a:ea typeface="Aptos" pitchFamily="34" charset="-122"/>
-                <a:cs typeface="Aptos" pitchFamily="34" charset="-120"/>
-              </a:rPr>
-              <a:t>Semantic search</a:t>
-            </a:r>
-            <a:endParaRPr lang="en-US" sz="1100" dirty="0"/>
-          </a:p>
-        </p:txBody>
-      </p:sp>
-      <p:sp>
-        <p:nvSpPr>
-          <p:cNvPr id="12" name="Shape 10"/>
-          <p:cNvSpPr/>
-          <p:nvPr/>
-        </p:nvSpPr>
-        <p:spPr>
-          <a:xfrm>
-            <a:off x="6675120" y="2542032"/>
-            <a:ext cx="4297680" cy="731520"/>
-          </a:xfrm>
-          <a:prstGeom prst="roundRect">
-            <a:avLst>
-              <a:gd name="adj" fmla="val 10000"/>
-            </a:avLst>
-          </a:prstGeom>
-          <a:solidFill>
-            <a:srgbClr val="0E2841"/>
-          </a:solidFill>
-          <a:ln w="12700">
-            <a:solidFill>
-              <a:srgbClr val="0E2841"/>
-            </a:solidFill>
-            <a:prstDash val="solid"/>
-          </a:ln>
-        </p:spPr>
-        <p:txBody>
-          <a:bodyPr/>
-          <a:lstStyle/>
-          <a:p>
-            <a:endParaRPr lang="en-US"/>
-          </a:p>
-        </p:txBody>
-      </p:sp>
-      <p:sp>
-        <p:nvSpPr>
-          <p:cNvPr id="13" name="Text 11"/>
-          <p:cNvSpPr/>
-          <p:nvPr/>
-        </p:nvSpPr>
-        <p:spPr>
-          <a:xfrm>
-            <a:off x="6821424" y="2651760"/>
-            <a:ext cx="4023360" cy="548640"/>
-          </a:xfrm>
-          <a:prstGeom prst="rect">
-            <a:avLst/>
-          </a:prstGeom>
-          <a:noFill/>
-          <a:ln/>
-        </p:spPr>
-        <p:txBody>
-          <a:bodyPr wrap="square" lIns="0" tIns="0" rIns="0" bIns="0" rtlCol="0" anchor="t">
-            <a:normAutofit/>
-          </a:bodyPr>
-          <a:lstStyle/>
-          <a:p>
-            <a:pPr marL="0" indent="0">
-              <a:buNone/>
-            </a:pPr>
-            <a:r>
-              <a:rPr lang="en-US" sz="1200" dirty="0">
-                <a:solidFill>
-                  <a:srgbClr val="F4F7FA"/>
-                </a:solidFill>
-                <a:latin typeface="Consolas" pitchFamily="34" charset="0"/>
-                <a:ea typeface="Consolas" pitchFamily="34" charset="-122"/>
-                <a:cs typeface="Consolas" pitchFamily="34" charset="-120"/>
-              </a:rPr>
-              <a:t>ORDER BY embedding &lt;=&gt; :q</a:t>
-            </a:r>
-            <a:endParaRPr lang="en-US" sz="1200" dirty="0"/>
-          </a:p>
-          <a:p>
-            <a:pPr marL="0" indent="0">
-              <a:buNone/>
-            </a:pPr>
-            <a:r>
-              <a:rPr lang="en-US" sz="1200" dirty="0">
-                <a:solidFill>
-                  <a:srgbClr val="F4F7FA"/>
-                </a:solidFill>
-                <a:latin typeface="Consolas" pitchFamily="34" charset="0"/>
-                <a:ea typeface="Consolas" pitchFamily="34" charset="-122"/>
-                <a:cs typeface="Consolas" pitchFamily="34" charset="-120"/>
-              </a:rPr>
-              <a:t>LIMIT 5</a:t>
-            </a:r>
-            <a:endParaRPr lang="en-US" sz="1200" dirty="0"/>
-          </a:p>
-        </p:txBody>
-      </p:sp>
-      <p:sp>
-        <p:nvSpPr>
-          <p:cNvPr id="14" name="Text 12"/>
-          <p:cNvSpPr/>
-          <p:nvPr/>
-        </p:nvSpPr>
-        <p:spPr>
-          <a:xfrm>
-            <a:off x="6675120" y="3703320"/>
-            <a:ext cx="4297680" cy="256032"/>
-          </a:xfrm>
-          <a:prstGeom prst="rect">
-            <a:avLst/>
-          </a:prstGeom>
-          <a:noFill/>
-          <a:ln/>
-        </p:spPr>
-        <p:txBody>
-          <a:bodyPr wrap="square" lIns="508" tIns="508" rIns="508" bIns="508" rtlCol="0" anchor="ctr">
-            <a:normAutofit/>
-          </a:bodyPr>
-          <a:lstStyle/>
-          <a:p>
-            <a:pPr marL="0" indent="0" algn="l">
-              <a:buNone/>
-            </a:pPr>
-            <a:r>
-              <a:rPr lang="en-US" sz="1400" dirty="0">
-                <a:solidFill>
-                  <a:srgbClr val="607080"/>
-                </a:solidFill>
-                <a:latin typeface="Aptos" pitchFamily="34" charset="0"/>
-                <a:ea typeface="Aptos" pitchFamily="34" charset="-122"/>
-                <a:cs typeface="Aptos" pitchFamily="34" charset="-120"/>
-              </a:rPr>
-              <a:t>może zwrócić „Konfiguracja HikariCP”</a:t>
-            </a:r>
-            <a:endParaRPr lang="en-US" sz="1400" dirty="0"/>
-          </a:p>
-        </p:txBody>
-      </p:sp>
-      <p:sp>
-        <p:nvSpPr>
-          <p:cNvPr id="15" name="Shape 13"/>
-          <p:cNvSpPr/>
-          <p:nvPr/>
-        </p:nvSpPr>
-        <p:spPr>
-          <a:xfrm>
-            <a:off x="5852160" y="3063240"/>
-            <a:ext cx="457200" cy="0"/>
-          </a:xfrm>
-          <a:prstGeom prst="line">
-            <a:avLst/>
-          </a:prstGeom>
-          <a:noFill/>
-          <a:ln w="27940">
-            <a:solidFill>
-              <a:srgbClr val="E97132"/>
-            </a:solidFill>
-            <a:prstDash val="solid"/>
-            <a:headEnd type="none"/>
-            <a:tailEnd type="triangle"/>
-          </a:ln>
-        </p:spPr>
-        <p:txBody>
-          <a:bodyPr/>
-          <a:lstStyle/>
-          <a:p>
-            <a:endParaRPr lang="en-US"/>
-          </a:p>
-        </p:txBody>
-      </p:sp>
-      <p:sp>
-        <p:nvSpPr>
-          <p:cNvPr id="16" name="Text 14"/>
-          <p:cNvSpPr/>
-          <p:nvPr/>
-        </p:nvSpPr>
-        <p:spPr>
-          <a:xfrm>
-            <a:off x="5349240" y="3401568"/>
-            <a:ext cx="1554480" cy="182880"/>
-          </a:xfrm>
-          <a:prstGeom prst="rect">
-            <a:avLst/>
-          </a:prstGeom>
-          <a:noFill/>
-          <a:ln/>
-        </p:spPr>
-        <p:txBody>
-          <a:bodyPr wrap="square" lIns="508" tIns="508" rIns="508" bIns="508" rtlCol="0" anchor="ctr">
-            <a:normAutofit/>
-          </a:bodyPr>
-          <a:lstStyle/>
-          <a:p>
-            <a:pPr marL="0" indent="0" algn="ctr">
-              <a:buNone/>
-            </a:pPr>
-            <a:r>
-              <a:rPr lang="en-US" sz="900" b="1" dirty="0">
-                <a:solidFill>
-                  <a:srgbClr val="E97132"/>
-                </a:solidFill>
-                <a:latin typeface="Aptos" pitchFamily="34" charset="0"/>
-                <a:ea typeface="Aptos" pitchFamily="34" charset="-122"/>
-                <a:cs typeface="Aptos" pitchFamily="34" charset="-120"/>
-              </a:rPr>
-              <a:t>znaczenie</a:t>
-            </a:r>
-            <a:endParaRPr lang="en-US" sz="900" dirty="0"/>
-          </a:p>
-        </p:txBody>
-      </p:sp>
-      <p:sp>
-        <p:nvSpPr>
-          <p:cNvPr id="17" name="Text 15"/>
-          <p:cNvSpPr/>
-          <p:nvPr/>
-        </p:nvSpPr>
-        <p:spPr>
-          <a:xfrm>
-            <a:off x="685800" y="5166360"/>
-            <a:ext cx="10881360" cy="320040"/>
-          </a:xfrm>
-          <a:prstGeom prst="rect">
-            <a:avLst/>
-          </a:prstGeom>
-          <a:noFill/>
-          <a:ln/>
-        </p:spPr>
-        <p:txBody>
-          <a:bodyPr wrap="square" lIns="508" tIns="508" rIns="508" bIns="508" rtlCol="0" anchor="ctr">
-            <a:normAutofit/>
-          </a:bodyPr>
-          <a:lstStyle/>
-          <a:p>
-            <a:pPr marL="0" indent="0" algn="ctr">
-              <a:buNone/>
-            </a:pPr>
-            <a:r>
-              <a:rPr lang="en-US" sz="1800" b="1" dirty="0">
-                <a:solidFill>
-                  <a:srgbClr val="E97132"/>
-                </a:solidFill>
-                <a:latin typeface="Aptos" pitchFamily="34" charset="0"/>
-                <a:ea typeface="Aptos" pitchFamily="34" charset="-122"/>
-                <a:cs typeface="Aptos" pitchFamily="34" charset="-120"/>
-              </a:rPr>
-              <a:t>Najlepszy demo moment: to samo zapytanie użytkownika, inny ranking wyników.</a:t>
-            </a:r>
-            <a:endParaRPr lang="en-US" sz="1800" dirty="0"/>
-          </a:p>
-        </p:txBody>
-      </p:sp>
-      <p:sp>
-        <p:nvSpPr>
-          <p:cNvPr id="25" name="Slide Number Placeholder 0"/>
-          <p:cNvSpPr>
-            <a:spLocks noGrp="1"/>
-          </p:cNvSpPr>
-          <p:nvPr>
-            <p:ph type="sldNum" sz="quarter" idx="4294967295"/>
-          </p:nvPr>
-        </p:nvSpPr>
-        <p:spPr>
-          <a:xfrm>
-            <a:off x="11391900" y="6473825"/>
-            <a:ext cx="800100" cy="300038"/>
-          </a:xfrm>
-          <a:prstGeom prst="rect">
-            <a:avLst/>
-          </a:prstGeom>
-          <a:extLst>
-            <a:ext uri="{C572A759-6A51-4108-AA02-DFA0A04FC94B}">
-              <ma14:wrappingTextBoxFlag xmlns:ma14="http://schemas.microsoft.com/office/mac/drawingml/2011/main" xmlns="" val="0"/>
-            </a:ext>
-          </a:extLst>
-        </p:spPr>
-        <p:txBody>
-          <a:bodyPr/>
-          <a:lstStyle>
-            <a:lvl1pPr>
-              <a:defRPr sz="700">
-                <a:solidFill>
-                  <a:srgbClr val="7F8C99"/>
-                </a:solidFill>
-                <a:latin typeface="Aptos"/>
-                <a:ea typeface="Aptos"/>
-                <a:cs typeface="Aptos"/>
-              </a:defRPr>
-            </a:lvl1pPr>
-          </a:lstStyle>
-          <a:p>
-            <a:pPr algn="l"/>
-            <a:fld id="{F7021451-1387-4CA6-816F-3879F97B5CBC}" type="slidenum">
-              <a:rPr lang="en-US" b="0"/>
               <a:t>9</a:t>
             </a:fld>
             <a:endParaRPr lang="en-US"/>
+          </a:p>
+        </p:txBody>
+      </p:sp>
+      <p:sp>
+        <p:nvSpPr>
+          <p:cNvPr id="17" name="Dymek mowy: prostokąt z zaokrąglonymi rogami 16">
+            <a:extLst>
+              <a:ext uri="{FF2B5EF4-FFF2-40B4-BE49-F238E27FC236}">
+                <a16:creationId xmlns:a16="http://schemas.microsoft.com/office/drawing/2014/main" id="{F5D643CB-7D0B-770D-F5C2-9CD5D2F12D1F}"/>
+              </a:ext>
+            </a:extLst>
+          </p:cNvPr>
+          <p:cNvSpPr/>
+          <p:nvPr/>
+        </p:nvSpPr>
+        <p:spPr>
+          <a:xfrm>
+            <a:off x="7020353" y="4078784"/>
+            <a:ext cx="4501087" cy="2418308"/>
+          </a:xfrm>
+          <a:prstGeom prst="wedgeRoundRectCallout">
+            <a:avLst>
+              <a:gd name="adj1" fmla="val -2176"/>
+              <a:gd name="adj2" fmla="val -64824"/>
+              <a:gd name="adj3" fmla="val 16667"/>
+            </a:avLst>
+          </a:prstGeom>
+        </p:spPr>
+        <p:style>
+          <a:lnRef idx="2">
+            <a:schemeClr val="accent6"/>
+          </a:lnRef>
+          <a:fillRef idx="1">
+            <a:schemeClr val="lt1"/>
+          </a:fillRef>
+          <a:effectRef idx="0">
+            <a:schemeClr val="accent6"/>
+          </a:effectRef>
+          <a:fontRef idx="minor">
+            <a:schemeClr val="dk1"/>
+          </a:fontRef>
+        </p:style>
+        <p:txBody>
+          <a:bodyPr rtlCol="0" anchor="ctr"/>
+          <a:lstStyle/>
+          <a:p>
+            <a:r>
+              <a:rPr lang="en-US" sz="1200" b="1" dirty="0"/>
+              <a:t>Euclidean distance</a:t>
+            </a:r>
+            <a:r>
+              <a:rPr lang="en-US" sz="1200" dirty="0"/>
+              <a:t> </a:t>
+            </a:r>
+            <a:r>
+              <a:rPr lang="en-US" sz="1200" dirty="0" err="1"/>
+              <a:t>mierzy</a:t>
+            </a:r>
+            <a:r>
+              <a:rPr lang="en-US" sz="1200" dirty="0"/>
+              <a:t> </a:t>
+            </a:r>
+            <a:r>
+              <a:rPr lang="en-US" sz="1200" dirty="0" err="1"/>
+              <a:t>fizyczną</a:t>
+            </a:r>
+            <a:r>
+              <a:rPr lang="en-US" sz="1200" dirty="0"/>
+              <a:t> </a:t>
+            </a:r>
+            <a:r>
+              <a:rPr lang="en-US" sz="1200" dirty="0" err="1"/>
+              <a:t>odległość</a:t>
+            </a:r>
+            <a:r>
+              <a:rPr lang="en-US" sz="1200" dirty="0"/>
+              <a:t> </a:t>
+            </a:r>
+            <a:r>
+              <a:rPr lang="en-US" sz="1200" dirty="0" err="1"/>
+              <a:t>między</a:t>
+            </a:r>
+            <a:r>
+              <a:rPr lang="en-US" sz="1200" dirty="0"/>
+              <a:t> </a:t>
+            </a:r>
+            <a:r>
+              <a:rPr lang="en-US" sz="1200" dirty="0" err="1"/>
+              <a:t>punktami</a:t>
+            </a:r>
+            <a:r>
+              <a:rPr lang="en-US" sz="1200" dirty="0"/>
+              <a:t> w </a:t>
+            </a:r>
+            <a:r>
+              <a:rPr lang="en-US" sz="1200" dirty="0" err="1"/>
+              <a:t>przestrzeni</a:t>
+            </a:r>
+            <a:r>
+              <a:rPr lang="pl-PL" sz="1200" dirty="0"/>
+              <a:t>.</a:t>
+            </a:r>
+          </a:p>
+          <a:p>
+            <a:endParaRPr lang="pl-PL" sz="1200" dirty="0"/>
+          </a:p>
+          <a:p>
+            <a:r>
+              <a:rPr lang="en-US" sz="1200" b="1" dirty="0"/>
+              <a:t>Cosine distance</a:t>
+            </a:r>
+            <a:r>
+              <a:rPr lang="en-US" sz="1200" dirty="0"/>
+              <a:t> </a:t>
+            </a:r>
+            <a:r>
+              <a:rPr lang="en-US" sz="1200" dirty="0" err="1"/>
+              <a:t>patrzy</a:t>
+            </a:r>
+            <a:r>
+              <a:rPr lang="en-US" sz="1200" dirty="0"/>
+              <a:t> </a:t>
+            </a:r>
+            <a:r>
+              <a:rPr lang="en-US" sz="1200" dirty="0" err="1"/>
+              <a:t>przede</a:t>
+            </a:r>
+            <a:r>
+              <a:rPr lang="en-US" sz="1200" dirty="0"/>
+              <a:t> </a:t>
+            </a:r>
+            <a:r>
+              <a:rPr lang="en-US" sz="1200" dirty="0" err="1"/>
+              <a:t>wszystkim</a:t>
+            </a:r>
+            <a:r>
+              <a:rPr lang="en-US" sz="1200" dirty="0"/>
+              <a:t> </a:t>
+            </a:r>
+            <a:r>
+              <a:rPr lang="en-US" sz="1200" dirty="0" err="1"/>
+              <a:t>na</a:t>
+            </a:r>
+            <a:r>
+              <a:rPr lang="en-US" sz="1200" dirty="0"/>
+              <a:t> </a:t>
+            </a:r>
+            <a:r>
+              <a:rPr lang="en-US" sz="1200" b="1" dirty="0" err="1"/>
+              <a:t>kąt</a:t>
+            </a:r>
+            <a:r>
+              <a:rPr lang="en-US" sz="1200" b="1" dirty="0"/>
+              <a:t> </a:t>
+            </a:r>
+            <a:r>
+              <a:rPr lang="en-US" sz="1200" b="1" dirty="0" err="1"/>
+              <a:t>między</a:t>
+            </a:r>
+            <a:r>
+              <a:rPr lang="en-US" sz="1200" b="1" dirty="0"/>
+              <a:t> </a:t>
+            </a:r>
+            <a:r>
+              <a:rPr lang="en-US" sz="1200" b="1" dirty="0" err="1"/>
+              <a:t>wektorami</a:t>
+            </a:r>
+            <a:r>
+              <a:rPr lang="en-US" sz="1200" dirty="0"/>
+              <a:t>, a </a:t>
+            </a:r>
+            <a:r>
+              <a:rPr lang="en-US" sz="1200" dirty="0" err="1"/>
+              <a:t>nie</a:t>
+            </a:r>
+            <a:r>
+              <a:rPr lang="en-US" sz="1200" dirty="0"/>
+              <a:t> </a:t>
+            </a:r>
+            <a:r>
+              <a:rPr lang="en-US" sz="1200" dirty="0" err="1"/>
+              <a:t>na</a:t>
+            </a:r>
+            <a:r>
+              <a:rPr lang="en-US" sz="1200" dirty="0"/>
+              <a:t> ich </a:t>
+            </a:r>
+            <a:r>
+              <a:rPr lang="en-US" sz="1200" dirty="0" err="1"/>
+              <a:t>długość</a:t>
+            </a:r>
+            <a:endParaRPr lang="pl-PL" sz="1200" dirty="0"/>
+          </a:p>
+          <a:p>
+            <a:endParaRPr lang="pl-PL" sz="1200" dirty="0"/>
+          </a:p>
+          <a:p>
+            <a:r>
+              <a:rPr lang="en-US" sz="1200" b="1" dirty="0"/>
+              <a:t>Negative inner product</a:t>
+            </a:r>
+            <a:r>
+              <a:rPr lang="en-US" sz="1200" dirty="0"/>
+              <a:t> to </a:t>
+            </a:r>
+            <a:r>
+              <a:rPr lang="en-US" sz="1200" dirty="0" err="1"/>
+              <a:t>ujemny</a:t>
+            </a:r>
+            <a:r>
+              <a:rPr lang="en-US" sz="1200" dirty="0"/>
+              <a:t> </a:t>
+            </a:r>
+            <a:r>
+              <a:rPr lang="en-US" sz="1200" b="1" dirty="0" err="1"/>
+              <a:t>iloczyn</a:t>
+            </a:r>
+            <a:r>
+              <a:rPr lang="en-US" sz="1200" b="1" dirty="0"/>
+              <a:t> </a:t>
+            </a:r>
+            <a:r>
+              <a:rPr lang="en-US" sz="1200" b="1" dirty="0" err="1"/>
+              <a:t>skalarny</a:t>
+            </a:r>
+            <a:r>
+              <a:rPr lang="en-US" sz="1200" dirty="0"/>
+              <a:t> </a:t>
+            </a:r>
+            <a:r>
+              <a:rPr lang="en-US" sz="1200" dirty="0" err="1"/>
+              <a:t>dwóch</a:t>
+            </a:r>
+            <a:r>
+              <a:rPr lang="en-US" sz="1200" dirty="0"/>
+              <a:t> </a:t>
+            </a:r>
+            <a:r>
+              <a:rPr lang="en-US" sz="1200" dirty="0" err="1"/>
+              <a:t>wektorów</a:t>
+            </a:r>
+            <a:r>
+              <a:rPr lang="en-US" sz="1200" dirty="0"/>
+              <a:t>. W </a:t>
+            </a:r>
+            <a:r>
+              <a:rPr lang="en-US" sz="1200" dirty="0" err="1"/>
+              <a:t>pgvector</a:t>
+            </a:r>
+            <a:r>
+              <a:rPr lang="en-US" sz="1200" dirty="0"/>
+              <a:t> jest </a:t>
+            </a:r>
+            <a:r>
+              <a:rPr lang="en-US" sz="1200" dirty="0" err="1"/>
+              <a:t>trzecią</a:t>
+            </a:r>
+            <a:r>
+              <a:rPr lang="en-US" sz="1200" dirty="0"/>
+              <a:t> </a:t>
+            </a:r>
+            <a:r>
+              <a:rPr lang="en-US" sz="1200" dirty="0" err="1"/>
+              <a:t>popularną</a:t>
+            </a:r>
+            <a:r>
+              <a:rPr lang="en-US" sz="1200" dirty="0"/>
+              <a:t> </a:t>
+            </a:r>
+            <a:r>
+              <a:rPr lang="en-US" sz="1200" dirty="0" err="1"/>
+              <a:t>miarą</a:t>
+            </a:r>
+            <a:r>
+              <a:rPr lang="en-US" sz="1200" dirty="0"/>
+              <a:t> </a:t>
+            </a:r>
+            <a:r>
+              <a:rPr lang="en-US" sz="1200" dirty="0" err="1"/>
+              <a:t>obok</a:t>
+            </a:r>
+            <a:r>
+              <a:rPr lang="en-US" sz="1200" dirty="0"/>
+              <a:t> Euclidean </a:t>
+            </a:r>
+            <a:r>
+              <a:rPr lang="en-US" sz="1200" dirty="0" err="1"/>
+              <a:t>i</a:t>
+            </a:r>
+            <a:r>
+              <a:rPr lang="en-US" sz="1200" dirty="0"/>
+              <a:t> cosine distance.</a:t>
+            </a:r>
+            <a:endParaRPr lang="pl-PL" sz="1200" dirty="0"/>
+          </a:p>
+          <a:p>
+            <a:endParaRPr lang="pl-PL" sz="1200" dirty="0"/>
+          </a:p>
+          <a:p>
+            <a:r>
+              <a:rPr lang="en-US" sz="1200" dirty="0" err="1"/>
+              <a:t>Przy</a:t>
+            </a:r>
+            <a:r>
+              <a:rPr lang="en-US" sz="1200" dirty="0"/>
+              <a:t> </a:t>
+            </a:r>
+            <a:r>
+              <a:rPr lang="en-US" sz="1200" b="1" dirty="0" err="1"/>
+              <a:t>znormalizowanych</a:t>
+            </a:r>
+            <a:r>
+              <a:rPr lang="en-US" sz="1200" b="1" dirty="0"/>
+              <a:t> </a:t>
+            </a:r>
+            <a:r>
+              <a:rPr lang="en-US" sz="1200" b="1" dirty="0" err="1"/>
+              <a:t>wektorach</a:t>
+            </a:r>
+            <a:r>
+              <a:rPr lang="en-US" sz="1200" dirty="0"/>
+              <a:t> ranking </a:t>
+            </a:r>
+            <a:r>
+              <a:rPr lang="en-US" sz="1200" dirty="0" err="1"/>
+              <a:t>według</a:t>
+            </a:r>
+            <a:r>
+              <a:rPr lang="en-US" sz="1200" dirty="0"/>
+              <a:t> cosine </a:t>
+            </a:r>
+            <a:r>
+              <a:rPr lang="en-US" sz="1200" dirty="0" err="1"/>
+              <a:t>i</a:t>
+            </a:r>
+            <a:r>
+              <a:rPr lang="en-US" sz="1200" dirty="0"/>
+              <a:t> Euclidean jest w </a:t>
+            </a:r>
+            <a:r>
+              <a:rPr lang="en-US" sz="1200" dirty="0" err="1"/>
+              <a:t>praktyce</a:t>
+            </a:r>
+            <a:r>
+              <a:rPr lang="en-US" sz="1200" dirty="0"/>
+              <a:t> </a:t>
+            </a:r>
+            <a:r>
+              <a:rPr lang="en-US" sz="1200" dirty="0" err="1"/>
+              <a:t>równoważny</a:t>
+            </a:r>
+            <a:endParaRPr lang="en-US" sz="1200" dirty="0"/>
           </a:p>
         </p:txBody>
       </p:sp>
